--- a/chapter09/ASE_9_program_manager.pptx
+++ b/chapter09/ASE_9_program_manager.pptx
@@ -2,73 +2,73 @@
 <file path=ppt/presentation.xml><?xml version="1.0" encoding="utf-8"?>
 <p:presentation xmlns:a="http://schemas.openxmlformats.org/drawingml/2006/main" xmlns:r="http://schemas.openxmlformats.org/officeDocument/2006/relationships" xmlns:p="http://schemas.openxmlformats.org/presentationml/2006/main">
   <p:sldMasterIdLst>
-    <p:sldMasterId id="2147483648" r:id="rId1"/>
-    <p:sldMasterId id="2147483666" r:id="rId3"/>
+    <p:sldMasterId id="2147483648" r:id="rId4"/>
+    <p:sldMasterId id="2147483666" r:id="rId5"/>
   </p:sldMasterIdLst>
   <p:notesMasterIdLst>
-    <p:notesMasterId r:id="rId9"/>
+    <p:notesMasterId r:id="rId66"/>
   </p:notesMasterIdLst>
   <p:sldIdLst>
-    <p:sldId id="265" r:id="rId4"/>
-    <p:sldId id="266" r:id="rId5"/>
-    <p:sldId id="303" r:id="rId6"/>
-    <p:sldId id="302" r:id="rId7"/>
-    <p:sldId id="267" r:id="rId8"/>
-    <p:sldId id="268" r:id="rId10"/>
-    <p:sldId id="275" r:id="rId11"/>
-    <p:sldId id="269" r:id="rId12"/>
-    <p:sldId id="272" r:id="rId13"/>
-    <p:sldId id="278" r:id="rId14"/>
-    <p:sldId id="305" r:id="rId15"/>
-    <p:sldId id="304" r:id="rId16"/>
-    <p:sldId id="274" r:id="rId17"/>
-    <p:sldId id="300" r:id="rId18"/>
-    <p:sldId id="311" r:id="rId19"/>
-    <p:sldId id="307" r:id="rId20"/>
-    <p:sldId id="306" r:id="rId21"/>
-    <p:sldId id="295" r:id="rId22"/>
-    <p:sldId id="296" r:id="rId23"/>
-    <p:sldId id="289" r:id="rId24"/>
-    <p:sldId id="290" r:id="rId25"/>
-    <p:sldId id="312" r:id="rId26"/>
-    <p:sldId id="313" r:id="rId27"/>
-    <p:sldId id="271" r:id="rId28"/>
-    <p:sldId id="276" r:id="rId29"/>
-    <p:sldId id="279" r:id="rId30"/>
-    <p:sldId id="298" r:id="rId31"/>
-    <p:sldId id="301" r:id="rId32"/>
-    <p:sldId id="280" r:id="rId33"/>
-    <p:sldId id="273" r:id="rId34"/>
-    <p:sldId id="258" r:id="rId35"/>
-    <p:sldId id="259" r:id="rId36"/>
-    <p:sldId id="323" r:id="rId37"/>
-    <p:sldId id="324" r:id="rId38"/>
-    <p:sldId id="325" r:id="rId39"/>
-    <p:sldId id="326" r:id="rId40"/>
-    <p:sldId id="328" r:id="rId41"/>
-    <p:sldId id="329" r:id="rId42"/>
-    <p:sldId id="330" r:id="rId43"/>
-    <p:sldId id="331" r:id="rId44"/>
-    <p:sldId id="332" r:id="rId45"/>
-    <p:sldId id="333" r:id="rId46"/>
-    <p:sldId id="270" r:id="rId47"/>
-    <p:sldId id="334" r:id="rId48"/>
-    <p:sldId id="309" r:id="rId49"/>
-    <p:sldId id="310" r:id="rId50"/>
-    <p:sldId id="314" r:id="rId51"/>
-    <p:sldId id="315" r:id="rId52"/>
-    <p:sldId id="316" r:id="rId53"/>
-    <p:sldId id="336" r:id="rId54"/>
-    <p:sldId id="317" r:id="rId55"/>
-    <p:sldId id="318" r:id="rId56"/>
-    <p:sldId id="320" r:id="rId57"/>
-    <p:sldId id="335" r:id="rId58"/>
-    <p:sldId id="321" r:id="rId59"/>
-    <p:sldId id="319" r:id="rId60"/>
-    <p:sldId id="281" r:id="rId61"/>
-    <p:sldId id="299" r:id="rId62"/>
-    <p:sldId id="277" r:id="rId63"/>
-    <p:sldId id="322" r:id="rId64"/>
+    <p:sldId id="265" r:id="rId6"/>
+    <p:sldId id="266" r:id="rId7"/>
+    <p:sldId id="303" r:id="rId8"/>
+    <p:sldId id="302" r:id="rId9"/>
+    <p:sldId id="267" r:id="rId10"/>
+    <p:sldId id="268" r:id="rId11"/>
+    <p:sldId id="275" r:id="rId12"/>
+    <p:sldId id="269" r:id="rId13"/>
+    <p:sldId id="272" r:id="rId14"/>
+    <p:sldId id="278" r:id="rId15"/>
+    <p:sldId id="305" r:id="rId16"/>
+    <p:sldId id="304" r:id="rId17"/>
+    <p:sldId id="274" r:id="rId18"/>
+    <p:sldId id="300" r:id="rId19"/>
+    <p:sldId id="311" r:id="rId20"/>
+    <p:sldId id="307" r:id="rId21"/>
+    <p:sldId id="306" r:id="rId22"/>
+    <p:sldId id="295" r:id="rId23"/>
+    <p:sldId id="296" r:id="rId24"/>
+    <p:sldId id="289" r:id="rId25"/>
+    <p:sldId id="290" r:id="rId26"/>
+    <p:sldId id="312" r:id="rId27"/>
+    <p:sldId id="313" r:id="rId28"/>
+    <p:sldId id="271" r:id="rId29"/>
+    <p:sldId id="276" r:id="rId30"/>
+    <p:sldId id="279" r:id="rId31"/>
+    <p:sldId id="298" r:id="rId32"/>
+    <p:sldId id="301" r:id="rId33"/>
+    <p:sldId id="280" r:id="rId34"/>
+    <p:sldId id="273" r:id="rId35"/>
+    <p:sldId id="258" r:id="rId36"/>
+    <p:sldId id="259" r:id="rId37"/>
+    <p:sldId id="323" r:id="rId38"/>
+    <p:sldId id="324" r:id="rId39"/>
+    <p:sldId id="325" r:id="rId40"/>
+    <p:sldId id="326" r:id="rId41"/>
+    <p:sldId id="328" r:id="rId42"/>
+    <p:sldId id="329" r:id="rId43"/>
+    <p:sldId id="330" r:id="rId44"/>
+    <p:sldId id="331" r:id="rId45"/>
+    <p:sldId id="332" r:id="rId46"/>
+    <p:sldId id="333" r:id="rId47"/>
+    <p:sldId id="270" r:id="rId48"/>
+    <p:sldId id="334" r:id="rId49"/>
+    <p:sldId id="309" r:id="rId50"/>
+    <p:sldId id="310" r:id="rId51"/>
+    <p:sldId id="314" r:id="rId52"/>
+    <p:sldId id="315" r:id="rId53"/>
+    <p:sldId id="316" r:id="rId54"/>
+    <p:sldId id="336" r:id="rId55"/>
+    <p:sldId id="317" r:id="rId56"/>
+    <p:sldId id="318" r:id="rId57"/>
+    <p:sldId id="320" r:id="rId58"/>
+    <p:sldId id="335" r:id="rId59"/>
+    <p:sldId id="321" r:id="rId60"/>
+    <p:sldId id="319" r:id="rId61"/>
+    <p:sldId id="281" r:id="rId62"/>
+    <p:sldId id="299" r:id="rId63"/>
+    <p:sldId id="277" r:id="rId64"/>
+    <p:sldId id="322" r:id="rId65"/>
   </p:sldIdLst>
   <p:sldSz cx="12192000" cy="6858000"/>
   <p:notesSz cx="6858000" cy="9144000"/>
@@ -217,7 +217,7 @@
 </file>
 
 <file path=ppt/diagrams/colors1.xml><?xml version="1.0" encoding="utf-8"?>
-<dgm:colorsDef xmlns:dgm="http://schemas.openxmlformats.org/drawingml/2006/diagram" xmlns:a="http://schemas.openxmlformats.org/drawingml/2006/main" uniqueId="urn:microsoft.com/office/officeart/2005/8/colors/accent1_2">
+<dgm:colorsDef xmlns:dgm="http://schemas.openxmlformats.org/drawingml/2006/diagram" xmlns:a="http://schemas.openxmlformats.org/drawingml/2006/main" uniqueId="urn:microsoft.com/office/officeart/2005/8/colors/accent1_2#7">
   <dgm:title val=""/>
   <dgm:desc val=""/>
   <dgm:catLst>
@@ -967,7 +967,7 @@
 <dgm:dataModel xmlns:dgm="http://schemas.openxmlformats.org/drawingml/2006/diagram" xmlns:a="http://schemas.openxmlformats.org/drawingml/2006/main">
   <dgm:ptLst>
     <dgm:pt modelId="{C3AA9F3A-9F77-497E-BE99-20C33280445E}" type="doc">
-      <dgm:prSet loTypeId="urn:microsoft.com/office/officeart/2016/7/layout/BasicLinearProcessNumbered" loCatId="process" qsTypeId="urn:microsoft.com/office/officeart/2005/8/quickstyle/simple1" qsCatId="simple" csTypeId="urn:microsoft.com/office/officeart/2005/8/colors/accent1_2" csCatId="accent1"/>
+      <dgm:prSet loTypeId="urn:microsoft.com/office/officeart/2016/7/layout/BasicLinearProcessNumbered" loCatId="process" qsTypeId="urn:microsoft.com/office/officeart/2005/8/quickstyle/simple1#8" qsCatId="simple" csTypeId="urn:microsoft.com/office/officeart/2005/8/colors/accent1_2#7" csCatId="accent1"/>
       <dgm:spPr/>
       <dgm:t>
         <a:bodyPr/>
@@ -992,7 +992,7 @@
         </a:p>
       </dgm:t>
     </dgm:pt>
-    <dgm:pt modelId="{92E5FB9C-B8E9-47BA-AFDC-F6B5BD4D22EF}" cxnId="{7BC21468-CD4C-4990-ACA9-6E7ADB0D688E}" type="parTrans">
+    <dgm:pt modelId="{92E5FB9C-B8E9-47BA-AFDC-F6B5BD4D22EF}" type="parTrans" cxnId="{7BC21468-CD4C-4990-ACA9-6E7ADB0D688E}">
       <dgm:prSet/>
       <dgm:spPr/>
       <dgm:t>
@@ -1003,7 +1003,7 @@
         </a:p>
       </dgm:t>
     </dgm:pt>
-    <dgm:pt modelId="{5394F033-67BC-4665-B7E7-3F830AAD0236}" cxnId="{7BC21468-CD4C-4990-ACA9-6E7ADB0D688E}" type="sibTrans">
+    <dgm:pt modelId="{5394F033-67BC-4665-B7E7-3F830AAD0236}" type="sibTrans" cxnId="{7BC21468-CD4C-4990-ACA9-6E7ADB0D688E}">
       <dgm:prSet phldrT="1" phldr="0"/>
       <dgm:spPr/>
       <dgm:t>
@@ -1032,7 +1032,7 @@
         </a:p>
       </dgm:t>
     </dgm:pt>
-    <dgm:pt modelId="{13438AF7-2241-4371-945F-90873B5402A3}" cxnId="{A2260C16-1105-49EE-9326-09265BA8BABB}" type="parTrans">
+    <dgm:pt modelId="{13438AF7-2241-4371-945F-90873B5402A3}" type="parTrans" cxnId="{A2260C16-1105-49EE-9326-09265BA8BABB}">
       <dgm:prSet/>
       <dgm:spPr/>
       <dgm:t>
@@ -1043,7 +1043,7 @@
         </a:p>
       </dgm:t>
     </dgm:pt>
-    <dgm:pt modelId="{5329B9D1-9A2E-40A0-859A-4C8FAE03E486}" cxnId="{A2260C16-1105-49EE-9326-09265BA8BABB}" type="sibTrans">
+    <dgm:pt modelId="{5329B9D1-9A2E-40A0-859A-4C8FAE03E486}" type="sibTrans" cxnId="{A2260C16-1105-49EE-9326-09265BA8BABB}">
       <dgm:prSet phldrT="2" phldr="0"/>
       <dgm:spPr/>
       <dgm:t>
@@ -1072,7 +1072,7 @@
         </a:p>
       </dgm:t>
     </dgm:pt>
-    <dgm:pt modelId="{F43252C0-F0FA-46F9-B131-88CB57E87782}" cxnId="{B84E47B8-5047-480A-920D-D8F18A1C46C7}" type="parTrans">
+    <dgm:pt modelId="{F43252C0-F0FA-46F9-B131-88CB57E87782}" type="parTrans" cxnId="{B84E47B8-5047-480A-920D-D8F18A1C46C7}">
       <dgm:prSet/>
       <dgm:spPr/>
       <dgm:t>
@@ -1083,7 +1083,7 @@
         </a:p>
       </dgm:t>
     </dgm:pt>
-    <dgm:pt modelId="{56AF8C10-8A0E-4C36-A5EA-B1CEE38A6815}" cxnId="{B84E47B8-5047-480A-920D-D8F18A1C46C7}" type="sibTrans">
+    <dgm:pt modelId="{56AF8C10-8A0E-4C36-A5EA-B1CEE38A6815}" type="sibTrans" cxnId="{B84E47B8-5047-480A-920D-D8F18A1C46C7}">
       <dgm:prSet phldrT="3" phldr="0"/>
       <dgm:spPr/>
       <dgm:t>
@@ -1256,33 +1256,26 @@
   <dgm:whole/>
   <dgm:extLst>
     <a:ext uri="http://schemas.microsoft.com/office/drawing/2008/diagram">
-      <dsp:dataModelExt xmlns:dsp="http://schemas.microsoft.com/office/drawing/2008/diagram" relId="rId6" minVer="http://schemas.openxmlformats.org/drawingml/2006/diagram"/>
+      <dsp:dataModelExt xmlns:dsp="http://schemas.microsoft.com/office/drawing/2008/diagram" relId="rId7" minVer="http://schemas.openxmlformats.org/drawingml/2006/diagram"/>
     </a:ext>
   </dgm:extLst>
 </dgm:dataModel>
 </file>
 
 <file path=ppt/diagrams/drawing1.xml><?xml version="1.0" encoding="utf-8"?>
-<dsp:drawing xmlns:dgm="http://schemas.openxmlformats.org/drawingml/2006/diagram" xmlns:dsp="http://schemas.microsoft.com/office/drawing/2008/diagram" xmlns:a="http://schemas.openxmlformats.org/drawingml/2006/main" xmlns:r="http://schemas.openxmlformats.org/officeDocument/2006/relationships">
+<dsp:drawing xmlns:dgm="http://schemas.openxmlformats.org/drawingml/2006/diagram" xmlns:dsp="http://schemas.microsoft.com/office/drawing/2008/diagram" xmlns:a="http://schemas.openxmlformats.org/drawingml/2006/main">
   <dsp:spTree>
     <dsp:nvGrpSpPr>
-      <dsp:cNvPr id="2" name="组合 1"/>
+      <dsp:cNvPr id="0" name=""/>
       <dsp:cNvGrpSpPr/>
     </dsp:nvGrpSpPr>
-    <dsp:grpSpPr>
-      <a:xfrm>
-        <a:off x="0" y="0"/>
-        <a:ext cx="10233025" cy="4351338"/>
-        <a:chOff x="0" y="0"/>
-        <a:chExt cx="10233025" cy="4351338"/>
-      </a:xfrm>
-    </dsp:grpSpPr>
+    <dsp:grpSpPr/>
     <dsp:sp modelId="{F9E9805D-A387-4292-BCFD-A2EC770F1FCE}">
       <dsp:nvSpPr>
-        <dsp:cNvPr id="3" name="矩形 2"/>
+        <dsp:cNvPr id="0" name=""/>
         <dsp:cNvSpPr/>
       </dsp:nvSpPr>
-      <dsp:spPr bwMode="white">
+      <dsp:spPr>
         <a:xfrm>
           <a:off x="0" y="0"/>
           <a:ext cx="3197820" cy="4351338"/>
@@ -1290,466 +1283,31 @@
         <a:prstGeom prst="rect">
           <a:avLst/>
         </a:prstGeom>
-      </dsp:spPr>
-      <dsp:style>
-        <a:lnRef idx="2">
+        <a:solidFill>
           <a:schemeClr val="accent1">
             <a:alpha val="90000"/>
             <a:tint val="40000"/>
+            <a:hueOff val="0"/>
+            <a:satOff val="0"/>
+            <a:lumOff val="0"/>
+            <a:alphaOff val="0"/>
           </a:schemeClr>
-        </a:lnRef>
-        <a:fillRef idx="1">
-          <a:schemeClr val="accent1">
-            <a:alpha val="90000"/>
-            <a:tint val="40000"/>
-          </a:schemeClr>
-        </a:fillRef>
-        <a:effectRef idx="0">
-          <a:scrgbClr r="0" g="0" b="0"/>
-        </a:effectRef>
-        <a:fontRef idx="minor"/>
-      </dsp:style>
-      <dsp:txXfrm>
-        <a:off x="0" y="0"/>
-        <a:ext cx="3197820" cy="4351338"/>
-      </dsp:txXfrm>
-    </dsp:sp>
-    <dsp:sp modelId="{A83D9F38-F630-4552-9BAA-DD73A9E50D6F}">
-      <dsp:nvSpPr>
-        <dsp:cNvPr id="4" name="椭圆 3"/>
-        <dsp:cNvSpPr/>
-      </dsp:nvSpPr>
-      <dsp:spPr bwMode="white">
-        <a:xfrm>
-          <a:off x="946209" y="435134"/>
-          <a:ext cx="1305401" cy="1305401"/>
-        </a:xfrm>
-        <a:prstGeom prst="ellipse">
-          <a:avLst/>
-        </a:prstGeom>
-      </dsp:spPr>
-      <dsp:style>
-        <a:lnRef idx="2">
-          <a:schemeClr val="accent1"/>
-        </a:lnRef>
-        <a:fillRef idx="1">
-          <a:schemeClr val="accent1"/>
-        </a:fillRef>
-        <a:effectRef idx="0">
-          <a:scrgbClr r="0" g="0" b="0"/>
-        </a:effectRef>
-        <a:fontRef idx="minor">
-          <a:schemeClr val="lt1"/>
-        </a:fontRef>
-      </dsp:style>
-      <dsp:txBody>
-        <a:bodyPr lIns="101774" tIns="12700" rIns="101774" bIns="12700" anchor="ctr"/>
-        <a:lstStyle>
-          <a:lvl1pPr algn="ctr">
-            <a:defRPr sz="5800"/>
-          </a:lvl1pPr>
-          <a:lvl2pPr marL="285750" indent="-285750" algn="ctr">
-            <a:defRPr sz="4500"/>
-          </a:lvl2pPr>
-          <a:lvl3pPr marL="571500" indent="-285750" algn="ctr">
-            <a:defRPr sz="4500"/>
-          </a:lvl3pPr>
-          <a:lvl4pPr marL="857250" indent="-285750" algn="ctr">
-            <a:defRPr sz="4500"/>
-          </a:lvl4pPr>
-          <a:lvl5pPr marL="1143000" indent="-285750" algn="ctr">
-            <a:defRPr sz="4500"/>
-          </a:lvl5pPr>
-          <a:lvl6pPr marL="1428750" indent="-285750" algn="ctr">
-            <a:defRPr sz="4500"/>
-          </a:lvl6pPr>
-          <a:lvl7pPr marL="1714500" indent="-285750" algn="ctr">
-            <a:defRPr sz="4500"/>
-          </a:lvl7pPr>
-          <a:lvl8pPr marL="2000250" indent="-285750" algn="ctr">
-            <a:defRPr sz="4500"/>
-          </a:lvl8pPr>
-          <a:lvl9pPr marL="2286000" indent="-285750" algn="ctr">
-            <a:defRPr sz="4500"/>
-          </a:lvl9pPr>
-        </a:lstStyle>
-        <a:p>
-          <a:pPr lvl="0">
-            <a:lnSpc>
-              <a:spcPct val="100000"/>
-            </a:lnSpc>
-            <a:spcBef>
-              <a:spcPct val="0"/>
-            </a:spcBef>
-            <a:spcAft>
-              <a:spcPct val="35000"/>
-            </a:spcAft>
-          </a:pPr>
-          <a:r>
-            <a:rPr lang="en-US"/>
-            <a:t>1</a:t>
-          </a:r>
-        </a:p>
-      </dsp:txBody>
-      <dsp:txXfrm>
-        <a:off x="946209" y="435134"/>
-        <a:ext cx="1305401" cy="1305401"/>
-      </dsp:txXfrm>
-    </dsp:sp>
-    <dsp:sp modelId="{AF80EDD1-50C1-415F-9966-244A1B95414C}">
-      <dsp:nvSpPr>
-        <dsp:cNvPr id="5" name="矩形 4"/>
-        <dsp:cNvSpPr/>
-      </dsp:nvSpPr>
-      <dsp:spPr bwMode="white">
-        <a:xfrm>
-          <a:off x="0" y="4351266"/>
-          <a:ext cx="3197820" cy="72"/>
-        </a:xfrm>
-        <a:prstGeom prst="rect">
-          <a:avLst/>
-        </a:prstGeom>
-      </dsp:spPr>
-      <dsp:style>
-        <a:lnRef idx="2">
-          <a:schemeClr val="accent1"/>
-        </a:lnRef>
-        <a:fillRef idx="1">
-          <a:schemeClr val="accent1"/>
-        </a:fillRef>
-        <a:effectRef idx="0">
-          <a:scrgbClr r="0" g="0" b="0"/>
-        </a:effectRef>
-        <a:fontRef idx="minor">
-          <a:schemeClr val="lt1"/>
-        </a:fontRef>
-      </dsp:style>
-      <dsp:txXfrm>
-        <a:off x="0" y="4351266"/>
-        <a:ext cx="3197820" cy="72"/>
-      </dsp:txXfrm>
-    </dsp:sp>
-    <dsp:sp modelId="{321CFF82-2C80-4F1D-94DA-DE49F1B4F7B3}">
-      <dsp:nvSpPr>
-        <dsp:cNvPr id="7" name="矩形 6"/>
-        <dsp:cNvSpPr/>
-      </dsp:nvSpPr>
-      <dsp:spPr bwMode="white">
-        <a:xfrm>
-          <a:off x="3517602" y="0"/>
-          <a:ext cx="3197820" cy="4351338"/>
-        </a:xfrm>
-        <a:prstGeom prst="rect">
-          <a:avLst/>
-        </a:prstGeom>
-      </dsp:spPr>
-      <dsp:style>
-        <a:lnRef idx="2">
-          <a:schemeClr val="accent1">
-            <a:alpha val="90000"/>
-            <a:tint val="40000"/>
-          </a:schemeClr>
-        </a:lnRef>
-        <a:fillRef idx="1">
-          <a:schemeClr val="accent1">
-            <a:alpha val="90000"/>
-            <a:tint val="40000"/>
-          </a:schemeClr>
-        </a:fillRef>
-        <a:effectRef idx="0">
-          <a:scrgbClr r="0" g="0" b="0"/>
-        </a:effectRef>
-        <a:fontRef idx="minor"/>
-      </dsp:style>
-      <dsp:txXfrm>
-        <a:off x="3517602" y="0"/>
-        <a:ext cx="3197820" cy="4351338"/>
-      </dsp:txXfrm>
-    </dsp:sp>
-    <dsp:sp modelId="{E2F41D60-EFB9-4E7A-986C-A7AAE5556B01}">
-      <dsp:nvSpPr>
-        <dsp:cNvPr id="8" name="椭圆 7"/>
-        <dsp:cNvSpPr/>
-      </dsp:nvSpPr>
-      <dsp:spPr bwMode="white">
-        <a:xfrm>
-          <a:off x="4463812" y="435134"/>
-          <a:ext cx="1305401" cy="1305401"/>
-        </a:xfrm>
-        <a:prstGeom prst="ellipse">
-          <a:avLst/>
-        </a:prstGeom>
-      </dsp:spPr>
-      <dsp:style>
-        <a:lnRef idx="2">
-          <a:schemeClr val="accent1"/>
-        </a:lnRef>
-        <a:fillRef idx="1">
-          <a:schemeClr val="accent1"/>
-        </a:fillRef>
-        <a:effectRef idx="0">
-          <a:scrgbClr r="0" g="0" b="0"/>
-        </a:effectRef>
-        <a:fontRef idx="minor">
-          <a:schemeClr val="lt1"/>
-        </a:fontRef>
-      </dsp:style>
-      <dsp:txBody>
-        <a:bodyPr lIns="101774" tIns="12700" rIns="101774" bIns="12700" anchor="ctr"/>
-        <a:lstStyle>
-          <a:lvl1pPr algn="ctr">
-            <a:defRPr sz="5800"/>
-          </a:lvl1pPr>
-          <a:lvl2pPr marL="285750" indent="-285750" algn="ctr">
-            <a:defRPr sz="4500"/>
-          </a:lvl2pPr>
-          <a:lvl3pPr marL="571500" indent="-285750" algn="ctr">
-            <a:defRPr sz="4500"/>
-          </a:lvl3pPr>
-          <a:lvl4pPr marL="857250" indent="-285750" algn="ctr">
-            <a:defRPr sz="4500"/>
-          </a:lvl4pPr>
-          <a:lvl5pPr marL="1143000" indent="-285750" algn="ctr">
-            <a:defRPr sz="4500"/>
-          </a:lvl5pPr>
-          <a:lvl6pPr marL="1428750" indent="-285750" algn="ctr">
-            <a:defRPr sz="4500"/>
-          </a:lvl6pPr>
-          <a:lvl7pPr marL="1714500" indent="-285750" algn="ctr">
-            <a:defRPr sz="4500"/>
-          </a:lvl7pPr>
-          <a:lvl8pPr marL="2000250" indent="-285750" algn="ctr">
-            <a:defRPr sz="4500"/>
-          </a:lvl8pPr>
-          <a:lvl9pPr marL="2286000" indent="-285750" algn="ctr">
-            <a:defRPr sz="4500"/>
-          </a:lvl9pPr>
-        </a:lstStyle>
-        <a:p>
-          <a:pPr lvl="0">
-            <a:lnSpc>
-              <a:spcPct val="100000"/>
-            </a:lnSpc>
-            <a:spcBef>
-              <a:spcPct val="0"/>
-            </a:spcBef>
-            <a:spcAft>
-              <a:spcPct val="35000"/>
-            </a:spcAft>
-          </a:pPr>
-          <a:r>
-            <a:rPr lang="en-US"/>
-            <a:t>2</a:t>
-          </a:r>
-        </a:p>
-      </dsp:txBody>
-      <dsp:txXfrm>
-        <a:off x="4463812" y="435134"/>
-        <a:ext cx="1305401" cy="1305401"/>
-      </dsp:txXfrm>
-    </dsp:sp>
-    <dsp:sp modelId="{944A6CCB-0ABE-4DCF-9B3A-B514639DBAEC}">
-      <dsp:nvSpPr>
-        <dsp:cNvPr id="9" name="矩形 8"/>
-        <dsp:cNvSpPr/>
-      </dsp:nvSpPr>
-      <dsp:spPr bwMode="white">
-        <a:xfrm>
-          <a:off x="3517602" y="4351266"/>
-          <a:ext cx="3197820" cy="72"/>
-        </a:xfrm>
-        <a:prstGeom prst="rect">
-          <a:avLst/>
-        </a:prstGeom>
-      </dsp:spPr>
-      <dsp:style>
-        <a:lnRef idx="2">
-          <a:schemeClr val="accent1"/>
-        </a:lnRef>
-        <a:fillRef idx="1">
-          <a:schemeClr val="accent1"/>
-        </a:fillRef>
-        <a:effectRef idx="0">
-          <a:scrgbClr r="0" g="0" b="0"/>
-        </a:effectRef>
-        <a:fontRef idx="minor">
-          <a:schemeClr val="lt1"/>
-        </a:fontRef>
-      </dsp:style>
-      <dsp:txXfrm>
-        <a:off x="3517602" y="4351266"/>
-        <a:ext cx="3197820" cy="72"/>
-      </dsp:txXfrm>
-    </dsp:sp>
-    <dsp:sp modelId="{5FC1F0C6-5B23-48DB-BE83-17E543B05BF0}">
-      <dsp:nvSpPr>
-        <dsp:cNvPr id="11" name="矩形 10"/>
-        <dsp:cNvSpPr/>
-      </dsp:nvSpPr>
-      <dsp:spPr bwMode="white">
-        <a:xfrm>
-          <a:off x="7035205" y="0"/>
-          <a:ext cx="3197820" cy="4351338"/>
-        </a:xfrm>
-        <a:prstGeom prst="rect">
-          <a:avLst/>
-        </a:prstGeom>
-      </dsp:spPr>
-      <dsp:style>
-        <a:lnRef idx="2">
-          <a:schemeClr val="accent1">
-            <a:alpha val="90000"/>
-            <a:tint val="40000"/>
-          </a:schemeClr>
-        </a:lnRef>
-        <a:fillRef idx="1">
-          <a:schemeClr val="accent1">
-            <a:alpha val="90000"/>
-            <a:tint val="40000"/>
-          </a:schemeClr>
-        </a:fillRef>
-        <a:effectRef idx="0">
-          <a:scrgbClr r="0" g="0" b="0"/>
-        </a:effectRef>
-        <a:fontRef idx="minor"/>
-      </dsp:style>
-      <dsp:txXfrm>
-        <a:off x="7035205" y="0"/>
-        <a:ext cx="3197820" cy="4351338"/>
-      </dsp:txXfrm>
-    </dsp:sp>
-    <dsp:sp modelId="{CDA1AC24-B223-4148-8F93-43B4ABB71931}">
-      <dsp:nvSpPr>
-        <dsp:cNvPr id="12" name="椭圆 11"/>
-        <dsp:cNvSpPr/>
-      </dsp:nvSpPr>
-      <dsp:spPr bwMode="white">
-        <a:xfrm>
-          <a:off x="7981414" y="435134"/>
-          <a:ext cx="1305401" cy="1305401"/>
-        </a:xfrm>
-        <a:prstGeom prst="ellipse">
-          <a:avLst/>
-        </a:prstGeom>
-      </dsp:spPr>
-      <dsp:style>
-        <a:lnRef idx="2">
-          <a:schemeClr val="accent1"/>
-        </a:lnRef>
-        <a:fillRef idx="1">
-          <a:schemeClr val="accent1"/>
-        </a:fillRef>
-        <a:effectRef idx="0">
-          <a:scrgbClr r="0" g="0" b="0"/>
-        </a:effectRef>
-        <a:fontRef idx="minor">
-          <a:schemeClr val="lt1"/>
-        </a:fontRef>
-      </dsp:style>
-      <dsp:txBody>
-        <a:bodyPr lIns="101774" tIns="12700" rIns="101774" bIns="12700" anchor="ctr"/>
-        <a:lstStyle>
-          <a:lvl1pPr algn="ctr">
-            <a:defRPr sz="5800"/>
-          </a:lvl1pPr>
-          <a:lvl2pPr marL="285750" indent="-285750" algn="ctr">
-            <a:defRPr sz="4500"/>
-          </a:lvl2pPr>
-          <a:lvl3pPr marL="571500" indent="-285750" algn="ctr">
-            <a:defRPr sz="4500"/>
-          </a:lvl3pPr>
-          <a:lvl4pPr marL="857250" indent="-285750" algn="ctr">
-            <a:defRPr sz="4500"/>
-          </a:lvl4pPr>
-          <a:lvl5pPr marL="1143000" indent="-285750" algn="ctr">
-            <a:defRPr sz="4500"/>
-          </a:lvl5pPr>
-          <a:lvl6pPr marL="1428750" indent="-285750" algn="ctr">
-            <a:defRPr sz="4500"/>
-          </a:lvl6pPr>
-          <a:lvl7pPr marL="1714500" indent="-285750" algn="ctr">
-            <a:defRPr sz="4500"/>
-          </a:lvl7pPr>
-          <a:lvl8pPr marL="2000250" indent="-285750" algn="ctr">
-            <a:defRPr sz="4500"/>
-          </a:lvl8pPr>
-          <a:lvl9pPr marL="2286000" indent="-285750" algn="ctr">
-            <a:defRPr sz="4500"/>
-          </a:lvl9pPr>
-        </a:lstStyle>
-        <a:p>
-          <a:pPr lvl="0">
-            <a:lnSpc>
-              <a:spcPct val="100000"/>
-            </a:lnSpc>
-            <a:spcBef>
-              <a:spcPct val="0"/>
-            </a:spcBef>
-            <a:spcAft>
-              <a:spcPct val="35000"/>
-            </a:spcAft>
-          </a:pPr>
-          <a:r>
-            <a:rPr lang="en-US"/>
-            <a:t>3</a:t>
-          </a:r>
-        </a:p>
-      </dsp:txBody>
-      <dsp:txXfrm>
-        <a:off x="7981414" y="435134"/>
-        <a:ext cx="1305401" cy="1305401"/>
-      </dsp:txXfrm>
-    </dsp:sp>
-    <dsp:sp modelId="{E414DBE0-5009-457C-9349-C33092CBCE01}">
-      <dsp:nvSpPr>
-        <dsp:cNvPr id="13" name="矩形 12"/>
-        <dsp:cNvSpPr/>
-      </dsp:nvSpPr>
-      <dsp:spPr bwMode="white">
-        <a:xfrm>
-          <a:off x="7035205" y="4351266"/>
-          <a:ext cx="3197820" cy="72"/>
-        </a:xfrm>
-        <a:prstGeom prst="rect">
-          <a:avLst/>
-        </a:prstGeom>
-      </dsp:spPr>
-      <dsp:style>
-        <a:lnRef idx="2">
-          <a:schemeClr val="accent1"/>
-        </a:lnRef>
-        <a:fillRef idx="1">
-          <a:schemeClr val="accent1"/>
-        </a:fillRef>
-        <a:effectRef idx="0">
-          <a:scrgbClr r="0" g="0" b="0"/>
-        </a:effectRef>
-        <a:fontRef idx="minor">
-          <a:schemeClr val="lt1"/>
-        </a:fontRef>
-      </dsp:style>
-      <dsp:txXfrm>
-        <a:off x="7035205" y="4351266"/>
-        <a:ext cx="3197820" cy="72"/>
-      </dsp:txXfrm>
-    </dsp:sp>
-    <dsp:sp modelId="{56722F75-AEA6-4910-9D9B-3BB9FD8D2015}">
-      <dsp:nvSpPr>
-        <dsp:cNvPr id="6" name="矩形 5"/>
-        <dsp:cNvSpPr/>
-      </dsp:nvSpPr>
-      <dsp:spPr bwMode="white">
-        <a:xfrm>
-          <a:off x="0" y="1653508"/>
-          <a:ext cx="3197820" cy="2610803"/>
-        </a:xfrm>
-        <a:prstGeom prst="rect">
-          <a:avLst/>
-        </a:prstGeom>
-        <a:noFill/>
-        <a:ln>
-          <a:noFill/>
+        </a:solidFill>
+        <a:ln w="12700" cap="flat" cmpd="sng" algn="ctr">
+          <a:solidFill>
+            <a:schemeClr val="accent1">
+              <a:alpha val="90000"/>
+              <a:tint val="40000"/>
+              <a:hueOff val="0"/>
+              <a:satOff val="0"/>
+              <a:lumOff val="0"/>
+              <a:alphaOff val="0"/>
+            </a:schemeClr>
+          </a:solidFill>
+          <a:prstDash val="solid"/>
+          <a:miter lim="800000"/>
         </a:ln>
+        <a:effectLst/>
       </dsp:spPr>
       <dsp:style>
         <a:lnRef idx="2">
@@ -1764,40 +1322,14 @@
         <a:fontRef idx="minor"/>
       </dsp:style>
       <dsp:txBody>
-        <a:bodyPr lIns="249314" tIns="330200" rIns="249314" bIns="330200" anchor="t"/>
-        <a:lstStyle>
-          <a:lvl1pPr algn="l">
-            <a:defRPr sz="3100"/>
-          </a:lvl1pPr>
-          <a:lvl2pPr marL="228600" indent="-228600" algn="l">
-            <a:defRPr sz="2400"/>
-          </a:lvl2pPr>
-          <a:lvl3pPr marL="457200" indent="-228600" algn="l">
-            <a:defRPr sz="2400"/>
-          </a:lvl3pPr>
-          <a:lvl4pPr marL="685800" indent="-228600" algn="l">
-            <a:defRPr sz="2400"/>
-          </a:lvl4pPr>
-          <a:lvl5pPr marL="914400" indent="-228600" algn="l">
-            <a:defRPr sz="2400"/>
-          </a:lvl5pPr>
-          <a:lvl6pPr marL="1143000" indent="-228600" algn="l">
-            <a:defRPr sz="2400"/>
-          </a:lvl6pPr>
-          <a:lvl7pPr marL="1371600" indent="-228600" algn="l">
-            <a:defRPr sz="2400"/>
-          </a:lvl7pPr>
-          <a:lvl8pPr marL="1600200" indent="-228600" algn="l">
-            <a:defRPr sz="2400"/>
-          </a:lvl8pPr>
-          <a:lvl9pPr marL="1828800" indent="-228600" algn="l">
-            <a:defRPr sz="2400"/>
-          </a:lvl9pPr>
-        </a:lstStyle>
+        <a:bodyPr spcFirstLastPara="0" vert="horz" wrap="square" lIns="249315" tIns="330200" rIns="249315" bIns="330200" numCol="1" spcCol="1270" anchor="t" anchorCtr="0">
+          <a:noAutofit/>
+        </a:bodyPr>
+        <a:lstStyle/>
         <a:p>
-          <a:pPr lvl="0">
+          <a:pPr marL="0" lvl="0" indent="0" algn="l" defTabSz="1155700">
             <a:lnSpc>
-              <a:spcPct val="100000"/>
+              <a:spcPct val="90000"/>
             </a:lnSpc>
             <a:spcBef>
               <a:spcPct val="0"/>
@@ -1805,44 +1337,186 @@
             <a:spcAft>
               <a:spcPct val="35000"/>
             </a:spcAft>
+            <a:buNone/>
           </a:pPr>
           <a:r>
-            <a:rPr lang="zh-CN">
-              <a:solidFill>
-                <a:schemeClr val="dk1"/>
-              </a:solidFill>
-            </a:rPr>
+            <a:rPr lang="zh-CN" sz="2600" kern="1200"/>
             <a:t>明确会议目的，要解决的问题是什么</a:t>
           </a:r>
-          <a:endParaRPr lang="en-US">
-            <a:solidFill>
-              <a:schemeClr val="dk1"/>
-            </a:solidFill>
-          </a:endParaRPr>
+          <a:endParaRPr lang="en-US" sz="2600" kern="1200"/>
         </a:p>
       </dsp:txBody>
       <dsp:txXfrm>
         <a:off x="0" y="1653508"/>
-        <a:ext cx="3197820" cy="2610803"/>
+        <a:ext cx="3197820" cy="2610802"/>
       </dsp:txXfrm>
     </dsp:sp>
-    <dsp:sp modelId="{1569FBFE-9959-481B-B675-7244B17DBB83}">
+    <dsp:sp modelId="{A83D9F38-F630-4552-9BAA-DD73A9E50D6F}">
       <dsp:nvSpPr>
-        <dsp:cNvPr id="10" name="矩形 9"/>
+        <dsp:cNvPr id="0" name=""/>
         <dsp:cNvSpPr/>
       </dsp:nvSpPr>
-      <dsp:spPr bwMode="white">
+      <dsp:spPr>
         <a:xfrm>
-          <a:off x="3517602" y="1653508"/>
-          <a:ext cx="3197820" cy="2610803"/>
+          <a:off x="946209" y="435133"/>
+          <a:ext cx="1305401" cy="1305401"/>
+        </a:xfrm>
+        <a:prstGeom prst="ellipse">
+          <a:avLst/>
+        </a:prstGeom>
+        <a:solidFill>
+          <a:schemeClr val="accent1">
+            <a:hueOff val="0"/>
+            <a:satOff val="0"/>
+            <a:lumOff val="0"/>
+            <a:alphaOff val="0"/>
+          </a:schemeClr>
+        </a:solidFill>
+        <a:ln w="12700" cap="flat" cmpd="sng" algn="ctr">
+          <a:solidFill>
+            <a:schemeClr val="accent1">
+              <a:hueOff val="0"/>
+              <a:satOff val="0"/>
+              <a:lumOff val="0"/>
+              <a:alphaOff val="0"/>
+            </a:schemeClr>
+          </a:solidFill>
+          <a:prstDash val="solid"/>
+          <a:miter lim="800000"/>
+        </a:ln>
+        <a:effectLst/>
+      </dsp:spPr>
+      <dsp:style>
+        <a:lnRef idx="2">
+          <a:scrgbClr r="0" g="0" b="0"/>
+        </a:lnRef>
+        <a:fillRef idx="1">
+          <a:scrgbClr r="0" g="0" b="0"/>
+        </a:fillRef>
+        <a:effectRef idx="0">
+          <a:scrgbClr r="0" g="0" b="0"/>
+        </a:effectRef>
+        <a:fontRef idx="minor">
+          <a:schemeClr val="lt1"/>
+        </a:fontRef>
+      </dsp:style>
+      <dsp:txBody>
+        <a:bodyPr spcFirstLastPara="0" vert="horz" wrap="square" lIns="101774" tIns="12700" rIns="101774" bIns="12700" numCol="1" spcCol="1270" anchor="ctr" anchorCtr="0">
+          <a:noAutofit/>
+        </a:bodyPr>
+        <a:lstStyle/>
+        <a:p>
+          <a:pPr marL="0" lvl="0" indent="0" algn="ctr" defTabSz="2133600">
+            <a:lnSpc>
+              <a:spcPct val="90000"/>
+            </a:lnSpc>
+            <a:spcBef>
+              <a:spcPct val="0"/>
+            </a:spcBef>
+            <a:spcAft>
+              <a:spcPct val="35000"/>
+            </a:spcAft>
+            <a:buNone/>
+          </a:pPr>
+          <a:r>
+            <a:rPr lang="en-US" sz="4800" kern="1200"/>
+            <a:t>1</a:t>
+          </a:r>
+        </a:p>
+      </dsp:txBody>
+      <dsp:txXfrm>
+        <a:off x="1137381" y="626305"/>
+        <a:ext cx="923057" cy="923057"/>
+      </dsp:txXfrm>
+    </dsp:sp>
+    <dsp:sp modelId="{AF80EDD1-50C1-415F-9966-244A1B95414C}">
+      <dsp:nvSpPr>
+        <dsp:cNvPr id="0" name=""/>
+        <dsp:cNvSpPr/>
+      </dsp:nvSpPr>
+      <dsp:spPr>
+        <a:xfrm>
+          <a:off x="0" y="4351266"/>
+          <a:ext cx="3197820" cy="72"/>
         </a:xfrm>
         <a:prstGeom prst="rect">
           <a:avLst/>
         </a:prstGeom>
-        <a:noFill/>
-        <a:ln>
-          <a:noFill/>
+        <a:solidFill>
+          <a:schemeClr val="accent1">
+            <a:hueOff val="0"/>
+            <a:satOff val="0"/>
+            <a:lumOff val="0"/>
+            <a:alphaOff val="0"/>
+          </a:schemeClr>
+        </a:solidFill>
+        <a:ln w="12700" cap="flat" cmpd="sng" algn="ctr">
+          <a:solidFill>
+            <a:schemeClr val="accent1">
+              <a:hueOff val="0"/>
+              <a:satOff val="0"/>
+              <a:lumOff val="0"/>
+              <a:alphaOff val="0"/>
+            </a:schemeClr>
+          </a:solidFill>
+          <a:prstDash val="solid"/>
+          <a:miter lim="800000"/>
         </a:ln>
+        <a:effectLst/>
+      </dsp:spPr>
+      <dsp:style>
+        <a:lnRef idx="2">
+          <a:scrgbClr r="0" g="0" b="0"/>
+        </a:lnRef>
+        <a:fillRef idx="1">
+          <a:scrgbClr r="0" g="0" b="0"/>
+        </a:fillRef>
+        <a:effectRef idx="0">
+          <a:scrgbClr r="0" g="0" b="0"/>
+        </a:effectRef>
+        <a:fontRef idx="minor">
+          <a:schemeClr val="lt1"/>
+        </a:fontRef>
+      </dsp:style>
+    </dsp:sp>
+    <dsp:sp modelId="{321CFF82-2C80-4F1D-94DA-DE49F1B4F7B3}">
+      <dsp:nvSpPr>
+        <dsp:cNvPr id="0" name=""/>
+        <dsp:cNvSpPr/>
+      </dsp:nvSpPr>
+      <dsp:spPr>
+        <a:xfrm>
+          <a:off x="3517602" y="0"/>
+          <a:ext cx="3197820" cy="4351338"/>
+        </a:xfrm>
+        <a:prstGeom prst="rect">
+          <a:avLst/>
+        </a:prstGeom>
+        <a:solidFill>
+          <a:schemeClr val="accent1">
+            <a:alpha val="90000"/>
+            <a:tint val="40000"/>
+            <a:hueOff val="0"/>
+            <a:satOff val="0"/>
+            <a:lumOff val="0"/>
+            <a:alphaOff val="0"/>
+          </a:schemeClr>
+        </a:solidFill>
+        <a:ln w="12700" cap="flat" cmpd="sng" algn="ctr">
+          <a:solidFill>
+            <a:schemeClr val="accent1">
+              <a:alpha val="90000"/>
+              <a:tint val="40000"/>
+              <a:hueOff val="0"/>
+              <a:satOff val="0"/>
+              <a:lumOff val="0"/>
+              <a:alphaOff val="0"/>
+            </a:schemeClr>
+          </a:solidFill>
+          <a:prstDash val="solid"/>
+          <a:miter lim="800000"/>
+        </a:ln>
+        <a:effectLst/>
       </dsp:spPr>
       <dsp:style>
         <a:lnRef idx="2">
@@ -1857,40 +1531,14 @@
         <a:fontRef idx="minor"/>
       </dsp:style>
       <dsp:txBody>
-        <a:bodyPr lIns="249314" tIns="330200" rIns="249314" bIns="330200" anchor="t"/>
-        <a:lstStyle>
-          <a:lvl1pPr algn="l">
-            <a:defRPr sz="3100"/>
-          </a:lvl1pPr>
-          <a:lvl2pPr marL="228600" indent="-228600" algn="l">
-            <a:defRPr sz="2400"/>
-          </a:lvl2pPr>
-          <a:lvl3pPr marL="457200" indent="-228600" algn="l">
-            <a:defRPr sz="2400"/>
-          </a:lvl3pPr>
-          <a:lvl4pPr marL="685800" indent="-228600" algn="l">
-            <a:defRPr sz="2400"/>
-          </a:lvl4pPr>
-          <a:lvl5pPr marL="914400" indent="-228600" algn="l">
-            <a:defRPr sz="2400"/>
-          </a:lvl5pPr>
-          <a:lvl6pPr marL="1143000" indent="-228600" algn="l">
-            <a:defRPr sz="2400"/>
-          </a:lvl6pPr>
-          <a:lvl7pPr marL="1371600" indent="-228600" algn="l">
-            <a:defRPr sz="2400"/>
-          </a:lvl7pPr>
-          <a:lvl8pPr marL="1600200" indent="-228600" algn="l">
-            <a:defRPr sz="2400"/>
-          </a:lvl8pPr>
-          <a:lvl9pPr marL="1828800" indent="-228600" algn="l">
-            <a:defRPr sz="2400"/>
-          </a:lvl9pPr>
-        </a:lstStyle>
+        <a:bodyPr spcFirstLastPara="0" vert="horz" wrap="square" lIns="249315" tIns="330200" rIns="249315" bIns="330200" numCol="1" spcCol="1270" anchor="t" anchorCtr="0">
+          <a:noAutofit/>
+        </a:bodyPr>
+        <a:lstStyle/>
         <a:p>
-          <a:pPr lvl="0">
+          <a:pPr marL="0" lvl="0" indent="0" algn="l" defTabSz="1155700">
             <a:lnSpc>
-              <a:spcPct val="100000"/>
+              <a:spcPct val="90000"/>
             </a:lnSpc>
             <a:spcBef>
               <a:spcPct val="0"/>
@@ -1898,44 +1546,186 @@
             <a:spcAft>
               <a:spcPct val="35000"/>
             </a:spcAft>
+            <a:buNone/>
           </a:pPr>
           <a:r>
-            <a:rPr lang="zh-CN">
-              <a:solidFill>
-                <a:schemeClr val="dk1"/>
-              </a:solidFill>
-            </a:rPr>
+            <a:rPr lang="zh-CN" sz="2600" kern="1200"/>
             <a:t>推动会议进程，促使与会者在每一个阶段做合适的事情</a:t>
           </a:r>
-          <a:endParaRPr lang="en-US">
-            <a:solidFill>
-              <a:schemeClr val="dk1"/>
-            </a:solidFill>
-          </a:endParaRPr>
+          <a:endParaRPr lang="en-US" sz="2600" kern="1200"/>
         </a:p>
       </dsp:txBody>
       <dsp:txXfrm>
         <a:off x="3517602" y="1653508"/>
-        <a:ext cx="3197820" cy="2610803"/>
+        <a:ext cx="3197820" cy="2610802"/>
       </dsp:txXfrm>
     </dsp:sp>
-    <dsp:sp modelId="{2CC4AECF-F70A-4E61-AB69-C514BAE04B9E}">
+    <dsp:sp modelId="{E2F41D60-EFB9-4E7A-986C-A7AAE5556B01}">
       <dsp:nvSpPr>
-        <dsp:cNvPr id="14" name="矩形 13"/>
+        <dsp:cNvPr id="0" name=""/>
         <dsp:cNvSpPr/>
       </dsp:nvSpPr>
-      <dsp:spPr bwMode="white">
+      <dsp:spPr>
         <a:xfrm>
-          <a:off x="7035205" y="1653508"/>
-          <a:ext cx="3197820" cy="2610803"/>
+          <a:off x="4463811" y="435133"/>
+          <a:ext cx="1305401" cy="1305401"/>
+        </a:xfrm>
+        <a:prstGeom prst="ellipse">
+          <a:avLst/>
+        </a:prstGeom>
+        <a:solidFill>
+          <a:schemeClr val="accent1">
+            <a:hueOff val="0"/>
+            <a:satOff val="0"/>
+            <a:lumOff val="0"/>
+            <a:alphaOff val="0"/>
+          </a:schemeClr>
+        </a:solidFill>
+        <a:ln w="12700" cap="flat" cmpd="sng" algn="ctr">
+          <a:solidFill>
+            <a:schemeClr val="accent1">
+              <a:hueOff val="0"/>
+              <a:satOff val="0"/>
+              <a:lumOff val="0"/>
+              <a:alphaOff val="0"/>
+            </a:schemeClr>
+          </a:solidFill>
+          <a:prstDash val="solid"/>
+          <a:miter lim="800000"/>
+        </a:ln>
+        <a:effectLst/>
+      </dsp:spPr>
+      <dsp:style>
+        <a:lnRef idx="2">
+          <a:scrgbClr r="0" g="0" b="0"/>
+        </a:lnRef>
+        <a:fillRef idx="1">
+          <a:scrgbClr r="0" g="0" b="0"/>
+        </a:fillRef>
+        <a:effectRef idx="0">
+          <a:scrgbClr r="0" g="0" b="0"/>
+        </a:effectRef>
+        <a:fontRef idx="minor">
+          <a:schemeClr val="lt1"/>
+        </a:fontRef>
+      </dsp:style>
+      <dsp:txBody>
+        <a:bodyPr spcFirstLastPara="0" vert="horz" wrap="square" lIns="101774" tIns="12700" rIns="101774" bIns="12700" numCol="1" spcCol="1270" anchor="ctr" anchorCtr="0">
+          <a:noAutofit/>
+        </a:bodyPr>
+        <a:lstStyle/>
+        <a:p>
+          <a:pPr marL="0" lvl="0" indent="0" algn="ctr" defTabSz="2133600">
+            <a:lnSpc>
+              <a:spcPct val="90000"/>
+            </a:lnSpc>
+            <a:spcBef>
+              <a:spcPct val="0"/>
+            </a:spcBef>
+            <a:spcAft>
+              <a:spcPct val="35000"/>
+            </a:spcAft>
+            <a:buNone/>
+          </a:pPr>
+          <a:r>
+            <a:rPr lang="en-US" sz="4800" kern="1200"/>
+            <a:t>2</a:t>
+          </a:r>
+        </a:p>
+      </dsp:txBody>
+      <dsp:txXfrm>
+        <a:off x="4654983" y="626305"/>
+        <a:ext cx="923057" cy="923057"/>
+      </dsp:txXfrm>
+    </dsp:sp>
+    <dsp:sp modelId="{944A6CCB-0ABE-4DCF-9B3A-B514639DBAEC}">
+      <dsp:nvSpPr>
+        <dsp:cNvPr id="0" name=""/>
+        <dsp:cNvSpPr/>
+      </dsp:nvSpPr>
+      <dsp:spPr>
+        <a:xfrm>
+          <a:off x="3517602" y="4351266"/>
+          <a:ext cx="3197820" cy="72"/>
         </a:xfrm>
         <a:prstGeom prst="rect">
           <a:avLst/>
         </a:prstGeom>
-        <a:noFill/>
-        <a:ln>
-          <a:noFill/>
+        <a:solidFill>
+          <a:schemeClr val="accent1">
+            <a:hueOff val="0"/>
+            <a:satOff val="0"/>
+            <a:lumOff val="0"/>
+            <a:alphaOff val="0"/>
+          </a:schemeClr>
+        </a:solidFill>
+        <a:ln w="12700" cap="flat" cmpd="sng" algn="ctr">
+          <a:solidFill>
+            <a:schemeClr val="accent1">
+              <a:hueOff val="0"/>
+              <a:satOff val="0"/>
+              <a:lumOff val="0"/>
+              <a:alphaOff val="0"/>
+            </a:schemeClr>
+          </a:solidFill>
+          <a:prstDash val="solid"/>
+          <a:miter lim="800000"/>
         </a:ln>
+        <a:effectLst/>
+      </dsp:spPr>
+      <dsp:style>
+        <a:lnRef idx="2">
+          <a:scrgbClr r="0" g="0" b="0"/>
+        </a:lnRef>
+        <a:fillRef idx="1">
+          <a:scrgbClr r="0" g="0" b="0"/>
+        </a:fillRef>
+        <a:effectRef idx="0">
+          <a:scrgbClr r="0" g="0" b="0"/>
+        </a:effectRef>
+        <a:fontRef idx="minor">
+          <a:schemeClr val="lt1"/>
+        </a:fontRef>
+      </dsp:style>
+    </dsp:sp>
+    <dsp:sp modelId="{5FC1F0C6-5B23-48DB-BE83-17E543B05BF0}">
+      <dsp:nvSpPr>
+        <dsp:cNvPr id="0" name=""/>
+        <dsp:cNvSpPr/>
+      </dsp:nvSpPr>
+      <dsp:spPr>
+        <a:xfrm>
+          <a:off x="7035204" y="0"/>
+          <a:ext cx="3197820" cy="4351338"/>
+        </a:xfrm>
+        <a:prstGeom prst="rect">
+          <a:avLst/>
+        </a:prstGeom>
+        <a:solidFill>
+          <a:schemeClr val="accent1">
+            <a:alpha val="90000"/>
+            <a:tint val="40000"/>
+            <a:hueOff val="0"/>
+            <a:satOff val="0"/>
+            <a:lumOff val="0"/>
+            <a:alphaOff val="0"/>
+          </a:schemeClr>
+        </a:solidFill>
+        <a:ln w="12700" cap="flat" cmpd="sng" algn="ctr">
+          <a:solidFill>
+            <a:schemeClr val="accent1">
+              <a:alpha val="90000"/>
+              <a:tint val="40000"/>
+              <a:hueOff val="0"/>
+              <a:satOff val="0"/>
+              <a:lumOff val="0"/>
+              <a:alphaOff val="0"/>
+            </a:schemeClr>
+          </a:solidFill>
+          <a:prstDash val="solid"/>
+          <a:miter lim="800000"/>
+        </a:ln>
+        <a:effectLst/>
       </dsp:spPr>
       <dsp:style>
         <a:lnRef idx="2">
@@ -1950,40 +1740,14 @@
         <a:fontRef idx="minor"/>
       </dsp:style>
       <dsp:txBody>
-        <a:bodyPr lIns="249314" tIns="330200" rIns="249314" bIns="330200" anchor="t"/>
-        <a:lstStyle>
-          <a:lvl1pPr algn="l">
-            <a:defRPr sz="3100"/>
-          </a:lvl1pPr>
-          <a:lvl2pPr marL="228600" indent="-228600" algn="l">
-            <a:defRPr sz="2400"/>
-          </a:lvl2pPr>
-          <a:lvl3pPr marL="457200" indent="-228600" algn="l">
-            <a:defRPr sz="2400"/>
-          </a:lvl3pPr>
-          <a:lvl4pPr marL="685800" indent="-228600" algn="l">
-            <a:defRPr sz="2400"/>
-          </a:lvl4pPr>
-          <a:lvl5pPr marL="914400" indent="-228600" algn="l">
-            <a:defRPr sz="2400"/>
-          </a:lvl5pPr>
-          <a:lvl6pPr marL="1143000" indent="-228600" algn="l">
-            <a:defRPr sz="2400"/>
-          </a:lvl6pPr>
-          <a:lvl7pPr marL="1371600" indent="-228600" algn="l">
-            <a:defRPr sz="2400"/>
-          </a:lvl7pPr>
-          <a:lvl8pPr marL="1600200" indent="-228600" algn="l">
-            <a:defRPr sz="2400"/>
-          </a:lvl8pPr>
-          <a:lvl9pPr marL="1828800" indent="-228600" algn="l">
-            <a:defRPr sz="2400"/>
-          </a:lvl9pPr>
-        </a:lstStyle>
+        <a:bodyPr spcFirstLastPara="0" vert="horz" wrap="square" lIns="249315" tIns="330200" rIns="249315" bIns="330200" numCol="1" spcCol="1270" anchor="t" anchorCtr="0">
+          <a:noAutofit/>
+        </a:bodyPr>
+        <a:lstStyle/>
         <a:p>
-          <a:pPr lvl="0">
+          <a:pPr marL="0" lvl="0" indent="0" algn="l" defTabSz="1155700">
             <a:lnSpc>
-              <a:spcPct val="100000"/>
+              <a:spcPct val="90000"/>
             </a:lnSpc>
             <a:spcBef>
               <a:spcPct val="0"/>
@@ -1991,26 +1755,147 @@
             <a:spcAft>
               <a:spcPct val="35000"/>
             </a:spcAft>
+            <a:buNone/>
           </a:pPr>
           <a:r>
-            <a:rPr lang="zh-CN">
-              <a:solidFill>
-                <a:schemeClr val="dk1"/>
-              </a:solidFill>
-            </a:rPr>
+            <a:rPr lang="zh-CN" sz="2600" kern="1200"/>
             <a:t>总结会议，记录要点，落实行动负责人</a:t>
           </a:r>
-          <a:endParaRPr lang="en-US">
-            <a:solidFill>
-              <a:schemeClr val="dk1"/>
-            </a:solidFill>
-          </a:endParaRPr>
+          <a:endParaRPr lang="en-US" sz="2600" kern="1200"/>
         </a:p>
       </dsp:txBody>
       <dsp:txXfrm>
-        <a:off x="7035205" y="1653508"/>
-        <a:ext cx="3197820" cy="2610803"/>
+        <a:off x="7035204" y="1653508"/>
+        <a:ext cx="3197820" cy="2610802"/>
       </dsp:txXfrm>
+    </dsp:sp>
+    <dsp:sp modelId="{CDA1AC24-B223-4148-8F93-43B4ABB71931}">
+      <dsp:nvSpPr>
+        <dsp:cNvPr id="0" name=""/>
+        <dsp:cNvSpPr/>
+      </dsp:nvSpPr>
+      <dsp:spPr>
+        <a:xfrm>
+          <a:off x="7981414" y="435133"/>
+          <a:ext cx="1305401" cy="1305401"/>
+        </a:xfrm>
+        <a:prstGeom prst="ellipse">
+          <a:avLst/>
+        </a:prstGeom>
+        <a:solidFill>
+          <a:schemeClr val="accent1">
+            <a:hueOff val="0"/>
+            <a:satOff val="0"/>
+            <a:lumOff val="0"/>
+            <a:alphaOff val="0"/>
+          </a:schemeClr>
+        </a:solidFill>
+        <a:ln w="12700" cap="flat" cmpd="sng" algn="ctr">
+          <a:solidFill>
+            <a:schemeClr val="accent1">
+              <a:hueOff val="0"/>
+              <a:satOff val="0"/>
+              <a:lumOff val="0"/>
+              <a:alphaOff val="0"/>
+            </a:schemeClr>
+          </a:solidFill>
+          <a:prstDash val="solid"/>
+          <a:miter lim="800000"/>
+        </a:ln>
+        <a:effectLst/>
+      </dsp:spPr>
+      <dsp:style>
+        <a:lnRef idx="2">
+          <a:scrgbClr r="0" g="0" b="0"/>
+        </a:lnRef>
+        <a:fillRef idx="1">
+          <a:scrgbClr r="0" g="0" b="0"/>
+        </a:fillRef>
+        <a:effectRef idx="0">
+          <a:scrgbClr r="0" g="0" b="0"/>
+        </a:effectRef>
+        <a:fontRef idx="minor">
+          <a:schemeClr val="lt1"/>
+        </a:fontRef>
+      </dsp:style>
+      <dsp:txBody>
+        <a:bodyPr spcFirstLastPara="0" vert="horz" wrap="square" lIns="101774" tIns="12700" rIns="101774" bIns="12700" numCol="1" spcCol="1270" anchor="ctr" anchorCtr="0">
+          <a:noAutofit/>
+        </a:bodyPr>
+        <a:lstStyle/>
+        <a:p>
+          <a:pPr marL="0" lvl="0" indent="0" algn="ctr" defTabSz="2133600">
+            <a:lnSpc>
+              <a:spcPct val="90000"/>
+            </a:lnSpc>
+            <a:spcBef>
+              <a:spcPct val="0"/>
+            </a:spcBef>
+            <a:spcAft>
+              <a:spcPct val="35000"/>
+            </a:spcAft>
+            <a:buNone/>
+          </a:pPr>
+          <a:r>
+            <a:rPr lang="en-US" sz="4800" kern="1200"/>
+            <a:t>3</a:t>
+          </a:r>
+        </a:p>
+      </dsp:txBody>
+      <dsp:txXfrm>
+        <a:off x="8172586" y="626305"/>
+        <a:ext cx="923057" cy="923057"/>
+      </dsp:txXfrm>
+    </dsp:sp>
+    <dsp:sp modelId="{E414DBE0-5009-457C-9349-C33092CBCE01}">
+      <dsp:nvSpPr>
+        <dsp:cNvPr id="0" name=""/>
+        <dsp:cNvSpPr/>
+      </dsp:nvSpPr>
+      <dsp:spPr>
+        <a:xfrm>
+          <a:off x="7035204" y="4351266"/>
+          <a:ext cx="3197820" cy="72"/>
+        </a:xfrm>
+        <a:prstGeom prst="rect">
+          <a:avLst/>
+        </a:prstGeom>
+        <a:solidFill>
+          <a:schemeClr val="accent1">
+            <a:hueOff val="0"/>
+            <a:satOff val="0"/>
+            <a:lumOff val="0"/>
+            <a:alphaOff val="0"/>
+          </a:schemeClr>
+        </a:solidFill>
+        <a:ln w="12700" cap="flat" cmpd="sng" algn="ctr">
+          <a:solidFill>
+            <a:schemeClr val="accent1">
+              <a:hueOff val="0"/>
+              <a:satOff val="0"/>
+              <a:lumOff val="0"/>
+              <a:alphaOff val="0"/>
+            </a:schemeClr>
+          </a:solidFill>
+          <a:prstDash val="solid"/>
+          <a:miter lim="800000"/>
+        </a:ln>
+        <a:effectLst/>
+      </dsp:spPr>
+      <dsp:style>
+        <a:lnRef idx="2">
+          <a:scrgbClr r="0" g="0" b="0"/>
+        </a:lnRef>
+        <a:fillRef idx="1">
+          <a:scrgbClr r="0" g="0" b="0"/>
+        </a:fillRef>
+        <a:effectRef idx="0">
+          <a:scrgbClr r="0" g="0" b="0"/>
+        </a:effectRef>
+        <a:fontRef idx="minor">
+          <a:schemeClr val="lt1"/>
+        </a:fontRef>
+      </dsp:style>
     </dsp:sp>
   </dsp:spTree>
 </dsp:drawing>
@@ -2045,7 +1930,7 @@
         <dgm:pt modelId="31">
           <dgm:prSet phldr="1"/>
         </dgm:pt>
-        <dgm:pt modelId="101" cxnId="4" type="sibTrans">
+        <dgm:pt modelId="101" type="sibTrans" cxnId="4">
           <dgm:prSet phldrT="1"/>
           <dgm:t>
             <a:bodyPr/>
@@ -2058,7 +1943,7 @@
             </a:p>
           </dgm:t>
         </dgm:pt>
-        <dgm:pt modelId="201" cxnId="5" type="sibTrans">
+        <dgm:pt modelId="201" type="sibTrans" cxnId="5">
           <dgm:prSet phldrT="2"/>
           <dgm:t>
             <a:bodyPr/>
@@ -2071,7 +1956,7 @@
             </a:p>
           </dgm:t>
         </dgm:pt>
-        <dgm:pt modelId="301" cxnId="6" type="sibTrans">
+        <dgm:pt modelId="301" type="sibTrans" cxnId="6">
           <dgm:prSet phldrT="3"/>
           <dgm:t>
             <a:bodyPr/>
@@ -2286,7 +2171,7 @@
 </file>
 
 <file path=ppt/diagrams/quickStyle1.xml><?xml version="1.0" encoding="utf-8"?>
-<dgm:styleDef xmlns:dgm="http://schemas.openxmlformats.org/drawingml/2006/diagram" xmlns:a="http://schemas.openxmlformats.org/drawingml/2006/main" uniqueId="urn:microsoft.com/office/officeart/2005/8/quickstyle/simple1">
+<dgm:styleDef xmlns:dgm="http://schemas.openxmlformats.org/drawingml/2006/diagram" xmlns:a="http://schemas.openxmlformats.org/drawingml/2006/main" uniqueId="urn:microsoft.com/office/officeart/2005/8/quickstyle/simple1#8">
   <dgm:title val=""/>
   <dgm:desc val=""/>
   <dgm:catLst>
@@ -2301,6 +2186,7 @@
       <a:camera prst="orthographicFront"/>
       <a:lightRig rig="threePt" dir="t"/>
     </dgm:scene3d>
+    <dgm:sp3d/>
     <dgm:txPr/>
     <dgm:style>
       <a:lnRef idx="2">
@@ -2320,6 +2206,7 @@
       <a:camera prst="orthographicFront"/>
       <a:lightRig rig="threePt" dir="t"/>
     </dgm:scene3d>
+    <dgm:sp3d/>
     <dgm:txPr/>
     <dgm:style>
       <a:lnRef idx="2">
@@ -2339,6 +2226,7 @@
       <a:camera prst="orthographicFront"/>
       <a:lightRig rig="threePt" dir="t"/>
     </dgm:scene3d>
+    <dgm:sp3d/>
     <dgm:txPr/>
     <dgm:style>
       <a:lnRef idx="2">
@@ -2358,6 +2246,7 @@
       <a:camera prst="orthographicFront"/>
       <a:lightRig rig="threePt" dir="t"/>
     </dgm:scene3d>
+    <dgm:sp3d/>
     <dgm:txPr/>
     <dgm:style>
       <a:lnRef idx="2">
@@ -2379,6 +2268,7 @@
       <a:camera prst="orthographicFront"/>
       <a:lightRig rig="threePt" dir="t"/>
     </dgm:scene3d>
+    <dgm:sp3d/>
     <dgm:txPr/>
     <dgm:style>
       <a:lnRef idx="2">
@@ -2400,6 +2290,7 @@
       <a:camera prst="orthographicFront"/>
       <a:lightRig rig="threePt" dir="t"/>
     </dgm:scene3d>
+    <dgm:sp3d/>
     <dgm:txPr/>
     <dgm:style>
       <a:lnRef idx="2">
@@ -2421,6 +2312,7 @@
       <a:camera prst="orthographicFront"/>
       <a:lightRig rig="threePt" dir="t"/>
     </dgm:scene3d>
+    <dgm:sp3d/>
     <dgm:txPr/>
     <dgm:style>
       <a:lnRef idx="2">
@@ -2442,6 +2334,7 @@
       <a:camera prst="orthographicFront"/>
       <a:lightRig rig="threePt" dir="t"/>
     </dgm:scene3d>
+    <dgm:sp3d/>
     <dgm:txPr/>
     <dgm:style>
       <a:lnRef idx="2">
@@ -2463,6 +2356,7 @@
       <a:camera prst="orthographicFront"/>
       <a:lightRig rig="threePt" dir="t"/>
     </dgm:scene3d>
+    <dgm:sp3d/>
     <dgm:txPr/>
     <dgm:style>
       <a:lnRef idx="2">
@@ -2484,6 +2378,7 @@
       <a:camera prst="orthographicFront"/>
       <a:lightRig rig="threePt" dir="t"/>
     </dgm:scene3d>
+    <dgm:sp3d/>
     <dgm:txPr/>
     <dgm:style>
       <a:lnRef idx="2">
@@ -2503,6 +2398,7 @@
       <a:camera prst="orthographicFront"/>
       <a:lightRig rig="threePt" dir="t"/>
     </dgm:scene3d>
+    <dgm:sp3d/>
     <dgm:txPr/>
     <dgm:style>
       <a:lnRef idx="2">
@@ -2522,6 +2418,7 @@
       <a:camera prst="orthographicFront"/>
       <a:lightRig rig="threePt" dir="t"/>
     </dgm:scene3d>
+    <dgm:sp3d/>
     <dgm:txPr/>
     <dgm:style>
       <a:lnRef idx="2">
@@ -2541,6 +2438,7 @@
       <a:camera prst="orthographicFront"/>
       <a:lightRig rig="threePt" dir="t"/>
     </dgm:scene3d>
+    <dgm:sp3d/>
     <dgm:txPr/>
     <dgm:style>
       <a:lnRef idx="0">
@@ -2560,6 +2458,7 @@
       <a:camera prst="orthographicFront"/>
       <a:lightRig rig="threePt" dir="t"/>
     </dgm:scene3d>
+    <dgm:sp3d/>
     <dgm:txPr/>
     <dgm:style>
       <a:lnRef idx="0">
@@ -2581,6 +2480,7 @@
       <a:camera prst="orthographicFront"/>
       <a:lightRig rig="threePt" dir="t"/>
     </dgm:scene3d>
+    <dgm:sp3d/>
     <dgm:txPr/>
     <dgm:style>
       <a:lnRef idx="2">
@@ -2600,6 +2500,7 @@
       <a:camera prst="orthographicFront"/>
       <a:lightRig rig="threePt" dir="t"/>
     </dgm:scene3d>
+    <dgm:sp3d/>
     <dgm:txPr/>
     <dgm:style>
       <a:lnRef idx="2">
@@ -2619,6 +2520,7 @@
       <a:camera prst="orthographicFront"/>
       <a:lightRig rig="threePt" dir="t"/>
     </dgm:scene3d>
+    <dgm:sp3d/>
     <dgm:txPr/>
     <dgm:style>
       <a:lnRef idx="0">
@@ -2638,6 +2540,7 @@
       <a:camera prst="orthographicFront"/>
       <a:lightRig rig="threePt" dir="t"/>
     </dgm:scene3d>
+    <dgm:sp3d/>
     <dgm:txPr/>
     <dgm:style>
       <a:lnRef idx="2">
@@ -2657,6 +2560,7 @@
       <a:camera prst="orthographicFront"/>
       <a:lightRig rig="threePt" dir="t"/>
     </dgm:scene3d>
+    <dgm:sp3d/>
     <dgm:txPr/>
     <dgm:style>
       <a:lnRef idx="2">
@@ -2676,6 +2580,7 @@
       <a:camera prst="orthographicFront"/>
       <a:lightRig rig="threePt" dir="t"/>
     </dgm:scene3d>
+    <dgm:sp3d/>
     <dgm:txPr/>
     <dgm:style>
       <a:lnRef idx="2">
@@ -2695,6 +2600,7 @@
       <a:camera prst="orthographicFront"/>
       <a:lightRig rig="threePt" dir="t"/>
     </dgm:scene3d>
+    <dgm:sp3d/>
     <dgm:txPr/>
     <dgm:style>
       <a:lnRef idx="2">
@@ -2714,6 +2620,7 @@
       <a:camera prst="orthographicFront"/>
       <a:lightRig rig="threePt" dir="t"/>
     </dgm:scene3d>
+    <dgm:sp3d/>
     <dgm:txPr/>
     <dgm:style>
       <a:lnRef idx="2">
@@ -2733,6 +2640,7 @@
       <a:camera prst="orthographicFront"/>
       <a:lightRig rig="threePt" dir="t"/>
     </dgm:scene3d>
+    <dgm:sp3d/>
     <dgm:txPr/>
     <dgm:style>
       <a:lnRef idx="2">
@@ -2752,6 +2660,7 @@
       <a:camera prst="orthographicFront"/>
       <a:lightRig rig="threePt" dir="t"/>
     </dgm:scene3d>
+    <dgm:sp3d/>
     <dgm:txPr/>
     <dgm:style>
       <a:lnRef idx="2">
@@ -2771,6 +2680,7 @@
       <a:camera prst="orthographicFront"/>
       <a:lightRig rig="threePt" dir="t"/>
     </dgm:scene3d>
+    <dgm:sp3d/>
     <dgm:txPr/>
     <dgm:style>
       <a:lnRef idx="2">
@@ -2790,6 +2700,7 @@
       <a:camera prst="orthographicFront"/>
       <a:lightRig rig="threePt" dir="t"/>
     </dgm:scene3d>
+    <dgm:sp3d/>
     <dgm:txPr/>
     <dgm:style>
       <a:lnRef idx="0">
@@ -2811,6 +2722,7 @@
       <a:camera prst="orthographicFront"/>
       <a:lightRig rig="threePt" dir="t"/>
     </dgm:scene3d>
+    <dgm:sp3d/>
     <dgm:txPr/>
     <dgm:style>
       <a:lnRef idx="2">
@@ -2832,6 +2744,7 @@
       <a:camera prst="orthographicFront"/>
       <a:lightRig rig="threePt" dir="t"/>
     </dgm:scene3d>
+    <dgm:sp3d/>
     <dgm:txPr/>
     <dgm:style>
       <a:lnRef idx="2">
@@ -2853,6 +2766,7 @@
       <a:camera prst="orthographicFront"/>
       <a:lightRig rig="threePt" dir="t"/>
     </dgm:scene3d>
+    <dgm:sp3d/>
     <dgm:txPr/>
     <dgm:style>
       <a:lnRef idx="2">
@@ -2874,6 +2788,7 @@
       <a:camera prst="orthographicFront"/>
       <a:lightRig rig="threePt" dir="t"/>
     </dgm:scene3d>
+    <dgm:sp3d/>
     <dgm:txPr/>
     <dgm:style>
       <a:lnRef idx="2">
@@ -2895,6 +2810,7 @@
       <a:camera prst="orthographicFront"/>
       <a:lightRig rig="threePt" dir="t"/>
     </dgm:scene3d>
+    <dgm:sp3d/>
     <dgm:txPr/>
     <dgm:style>
       <a:lnRef idx="2">
@@ -2916,6 +2832,7 @@
       <a:camera prst="orthographicFront"/>
       <a:lightRig rig="threePt" dir="t"/>
     </dgm:scene3d>
+    <dgm:sp3d/>
     <dgm:txPr/>
     <dgm:style>
       <a:lnRef idx="2">
@@ -2937,6 +2854,7 @@
       <a:camera prst="orthographicFront"/>
       <a:lightRig rig="threePt" dir="t"/>
     </dgm:scene3d>
+    <dgm:sp3d/>
     <dgm:txPr/>
     <dgm:style>
       <a:lnRef idx="2">
@@ -2956,6 +2874,7 @@
       <a:camera prst="orthographicFront"/>
       <a:lightRig rig="threePt" dir="t"/>
     </dgm:scene3d>
+    <dgm:sp3d/>
     <dgm:txPr/>
     <dgm:style>
       <a:lnRef idx="2">
@@ -2975,6 +2894,7 @@
       <a:camera prst="orthographicFront"/>
       <a:lightRig rig="threePt" dir="t"/>
     </dgm:scene3d>
+    <dgm:sp3d/>
     <dgm:txPr/>
     <dgm:style>
       <a:lnRef idx="2">
@@ -2994,6 +2914,7 @@
       <a:camera prst="orthographicFront"/>
       <a:lightRig rig="threePt" dir="t"/>
     </dgm:scene3d>
+    <dgm:sp3d/>
     <dgm:txPr/>
     <dgm:style>
       <a:lnRef idx="2">
@@ -3013,6 +2934,7 @@
       <a:camera prst="orthographicFront"/>
       <a:lightRig rig="threePt" dir="t"/>
     </dgm:scene3d>
+    <dgm:sp3d/>
     <dgm:txPr/>
     <dgm:style>
       <a:lnRef idx="2">
@@ -3034,6 +2956,7 @@
       <a:camera prst="orthographicFront"/>
       <a:lightRig rig="threePt" dir="t"/>
     </dgm:scene3d>
+    <dgm:sp3d/>
     <dgm:txPr/>
     <dgm:style>
       <a:lnRef idx="2">
@@ -3055,6 +2978,7 @@
       <a:camera prst="orthographicFront"/>
       <a:lightRig rig="threePt" dir="t"/>
     </dgm:scene3d>
+    <dgm:sp3d/>
     <dgm:txPr/>
     <dgm:style>
       <a:lnRef idx="2">
@@ -3076,6 +3000,7 @@
       <a:camera prst="orthographicFront"/>
       <a:lightRig rig="threePt" dir="t"/>
     </dgm:scene3d>
+    <dgm:sp3d/>
     <dgm:txPr/>
     <dgm:style>
       <a:lnRef idx="2">
@@ -3097,6 +3022,7 @@
       <a:camera prst="orthographicFront"/>
       <a:lightRig rig="threePt" dir="t"/>
     </dgm:scene3d>
+    <dgm:sp3d/>
     <dgm:txPr/>
     <dgm:style>
       <a:lnRef idx="0">
@@ -3116,6 +3042,7 @@
       <a:camera prst="orthographicFront"/>
       <a:lightRig rig="threePt" dir="t"/>
     </dgm:scene3d>
+    <dgm:sp3d/>
     <dgm:txPr/>
     <dgm:style>
       <a:lnRef idx="1">
@@ -3135,6 +3062,7 @@
       <a:camera prst="orthographicFront"/>
       <a:lightRig rig="threePt" dir="t"/>
     </dgm:scene3d>
+    <dgm:sp3d/>
     <dgm:txPr/>
     <dgm:style>
       <a:lnRef idx="0">
@@ -3156,6 +3084,7 @@
       <a:camera prst="orthographicFront"/>
       <a:lightRig rig="threePt" dir="t"/>
     </dgm:scene3d>
+    <dgm:sp3d/>
     <dgm:txPr/>
     <dgm:style>
       <a:lnRef idx="2">
@@ -3175,6 +3104,7 @@
       <a:camera prst="orthographicFront"/>
       <a:lightRig rig="threePt" dir="t"/>
     </dgm:scene3d>
+    <dgm:sp3d/>
     <dgm:txPr/>
     <dgm:style>
       <a:lnRef idx="2">
@@ -3194,6 +3124,7 @@
       <a:camera prst="orthographicFront"/>
       <a:lightRig rig="threePt" dir="t"/>
     </dgm:scene3d>
+    <dgm:sp3d/>
     <dgm:txPr/>
     <dgm:style>
       <a:lnRef idx="2">
@@ -3213,6 +3144,7 @@
       <a:camera prst="orthographicFront"/>
       <a:lightRig rig="threePt" dir="t"/>
     </dgm:scene3d>
+    <dgm:sp3d/>
     <dgm:txPr/>
     <dgm:style>
       <a:lnRef idx="1">
@@ -3232,6 +3164,7 @@
       <a:camera prst="orthographicFront"/>
       <a:lightRig rig="threePt" dir="t"/>
     </dgm:scene3d>
+    <dgm:sp3d/>
     <dgm:txPr/>
     <dgm:style>
       <a:lnRef idx="0">
@@ -3251,6 +3184,7 @@
       <a:camera prst="orthographicFront"/>
       <a:lightRig rig="threePt" dir="t"/>
     </dgm:scene3d>
+    <dgm:sp3d/>
     <dgm:txPr/>
     <dgm:style>
       <a:lnRef idx="2">
@@ -3352,6 +3286,7 @@
           <a:p>
             <a:fld id="{6455661B-2E2A-4413-A8EF-12FE8F14696A}" type="datetimeFigureOut">
               <a:rPr lang="en-US" smtClean="0"/>
+              <a:t>6/9/2026</a:t>
             </a:fld>
             <a:endParaRPr lang="en-US"/>
           </a:p>
@@ -3420,7 +3355,6 @@
               <a:rPr lang="en-US"/>
               <a:t>Click to edit Master text styles</a:t>
             </a:r>
-            <a:endParaRPr lang="en-US"/>
           </a:p>
           <a:p>
             <a:pPr lvl="1"/>
@@ -3428,7 +3362,6 @@
               <a:rPr lang="en-US"/>
               <a:t>Second level</a:t>
             </a:r>
-            <a:endParaRPr lang="en-US"/>
           </a:p>
           <a:p>
             <a:pPr lvl="2"/>
@@ -3436,7 +3369,6 @@
               <a:rPr lang="en-US"/>
               <a:t>Third level</a:t>
             </a:r>
-            <a:endParaRPr lang="en-US"/>
           </a:p>
           <a:p>
             <a:pPr lvl="3"/>
@@ -3444,7 +3376,6 @@
               <a:rPr lang="en-US"/>
               <a:t>Fourth level</a:t>
             </a:r>
-            <a:endParaRPr lang="en-US"/>
           </a:p>
           <a:p>
             <a:pPr lvl="4"/>
@@ -3452,7 +3383,6 @@
               <a:rPr lang="en-US"/>
               <a:t>Fifth level</a:t>
             </a:r>
-            <a:endParaRPr lang="en-US"/>
           </a:p>
         </p:txBody>
       </p:sp>
@@ -3516,6 +3446,7 @@
           <a:p>
             <a:fld id="{7CE77197-739D-4B26-AF33-8D06BC2CEE70}" type="slidenum">
               <a:rPr lang="en-US" smtClean="0"/>
+              <a:t>‹#›</a:t>
             </a:fld>
             <a:endParaRPr lang="en-US"/>
           </a:p>
@@ -3695,6 +3626,7 @@
           <a:p>
             <a:fld id="{7CE77197-739D-4B26-AF33-8D06BC2CEE70}" type="slidenum">
               <a:rPr lang="en-US" smtClean="0"/>
+              <a:t>5</a:t>
             </a:fld>
             <a:endParaRPr lang="en-US"/>
           </a:p>
@@ -3771,7 +3703,6 @@
               <a:rPr lang="en-US" dirty="0"/>
               <a:t>design does not get a fair trial, and is not born out of conflict and debate, so it’s not as good as it could be.</a:t>
             </a:r>
-            <a:endParaRPr lang="en-US" dirty="0"/>
           </a:p>
         </p:txBody>
       </p:sp>
@@ -3792,6 +3723,7 @@
           <a:p>
             <a:fld id="{7CE77197-739D-4B26-AF33-8D06BC2CEE70}" type="slidenum">
               <a:rPr lang="en-US" smtClean="0"/>
+              <a:t>17</a:t>
             </a:fld>
             <a:endParaRPr lang="en-US"/>
           </a:p>
@@ -3839,6 +3771,7 @@
           <a:p>
             <a:fld id="{4BA327C4-A3E9-4225-B9AB-AEEA0744708F}" type="slidenum">
               <a:rPr lang="zh-CN" altLang="en-US"/>
+              <a:t>31</a:t>
             </a:fld>
             <a:endParaRPr lang="en-US" altLang="zh-CN"/>
           </a:p>
@@ -3932,7 +3865,6 @@
               <a:rPr lang="en-US" b="1" dirty="0"/>
               <a:t>Another categorization:</a:t>
             </a:r>
-            <a:endParaRPr lang="en-US" b="1" dirty="0"/>
           </a:p>
           <a:p>
             <a:endParaRPr lang="en-US" b="1" dirty="0"/>
@@ -3946,7 +3878,6 @@
               <a:rPr lang="en-US" dirty="0"/>
               <a:t> – Deals with delivery of the project with the promised business value.</a:t>
             </a:r>
-            <a:endParaRPr lang="en-US" dirty="0"/>
           </a:p>
           <a:p>
             <a:r>
@@ -3957,7 +3888,6 @@
               <a:rPr lang="en-US" dirty="0"/>
               <a:t> – Deals with the feasibility of a technical solution within the time and cost constraints.</a:t>
             </a:r>
-            <a:endParaRPr lang="en-US" dirty="0"/>
           </a:p>
           <a:p>
             <a:r>
@@ -3968,7 +3898,6 @@
               <a:rPr lang="en-US" dirty="0"/>
               <a:t>– Deals with assumptions regarding people and infrastructure.</a:t>
             </a:r>
-            <a:endParaRPr lang="en-US" dirty="0"/>
           </a:p>
           <a:p>
             <a:endParaRPr lang="en-US" dirty="0"/>
@@ -3995,6 +3924,7 @@
           <a:p>
             <a:fld id="{76942CF7-076C-4076-8ECC-93F38D235C71}" type="slidenum">
               <a:rPr lang="en-US" smtClean="0"/>
+              <a:t>32</a:t>
             </a:fld>
             <a:endParaRPr lang="en-US"/>
           </a:p>
@@ -4074,7 +4004,6 @@
               <a:rPr lang="en-US" dirty="0"/>
               <a:t> (the impact to the project of a key member being hit by a bus) </a:t>
             </a:r>
-            <a:endParaRPr lang="en-US" dirty="0"/>
           </a:p>
           <a:p>
             <a:pPr marL="0" marR="0" lvl="1" indent="0" algn="l" defTabSz="914400" rtl="0" eaLnBrk="1" fontAlgn="auto" latinLnBrk="0" hangingPunct="1">
@@ -4120,7 +4049,6 @@
               <a:rPr lang="en-US" baseline="0" dirty="0"/>
               <a:t> avoid having all VIP boarding one air plane. </a:t>
             </a:r>
-            <a:endParaRPr lang="en-US" baseline="0" dirty="0"/>
           </a:p>
           <a:p>
             <a:pPr marL="0" marR="0" lvl="1" indent="0" algn="l" defTabSz="914400" rtl="0" eaLnBrk="1" fontAlgn="auto" latinLnBrk="0" hangingPunct="1">
@@ -4163,6 +4091,7 @@
           <a:p>
             <a:fld id="{76942CF7-076C-4076-8ECC-93F38D235C71}" type="slidenum">
               <a:rPr lang="en-US" smtClean="0"/>
+              <a:t>42</a:t>
             </a:fld>
             <a:endParaRPr lang="en-US"/>
           </a:p>
@@ -4299,6 +4228,7 @@
                 <a:ea typeface="+mn-ea"/>
                 <a:cs typeface="+mn-cs"/>
               </a:rPr>
+              <a:t>48</a:t>
             </a:fld>
             <a:endParaRPr kumimoji="0" lang="en-US" sz="1200" b="0" i="0" u="none" strike="noStrike" kern="1200" cap="none" spc="0" normalizeH="0" baseline="0" noProof="0">
               <a:ln>
@@ -4423,6 +4353,7 @@
                 <a:ea typeface="+mn-ea"/>
                 <a:cs typeface="+mn-cs"/>
               </a:rPr>
+              <a:t>51</a:t>
             </a:fld>
             <a:endParaRPr kumimoji="0" lang="en-US" sz="1200" b="0" i="0" u="none" strike="noStrike" kern="1200" cap="none" spc="0" normalizeH="0" baseline="0" noProof="0">
               <a:ln>
@@ -4442,6 +4373,124 @@
         </p:txBody>
       </p:sp>
     </p:spTree>
+  </p:cSld>
+  <p:clrMapOvr>
+    <a:masterClrMapping/>
+  </p:clrMapOvr>
+</p:notes>
+</file>
+
+<file path=ppt/notesSlides/notesSlide8.xml><?xml version="1.0" encoding="utf-8"?>
+<p:notes xmlns:a="http://schemas.openxmlformats.org/drawingml/2006/main" xmlns:r="http://schemas.openxmlformats.org/officeDocument/2006/relationships" xmlns:p="http://schemas.openxmlformats.org/presentationml/2006/main">
+  <p:cSld>
+    <p:spTree>
+      <p:nvGrpSpPr>
+        <p:cNvPr id="1" name=""/>
+        <p:cNvGrpSpPr/>
+        <p:nvPr/>
+      </p:nvGrpSpPr>
+      <p:grpSpPr>
+        <a:xfrm>
+          <a:off x="0" y="0"/>
+          <a:ext cx="0" cy="0"/>
+          <a:chOff x="0" y="0"/>
+          <a:chExt cx="0" cy="0"/>
+        </a:xfrm>
+      </p:grpSpPr>
+      <p:sp>
+        <p:nvSpPr>
+          <p:cNvPr id="2" name="幻灯片图像占位符 1"/>
+          <p:cNvSpPr>
+            <a:spLocks noGrp="1" noRot="1" noChangeAspect="1"/>
+          </p:cNvSpPr>
+          <p:nvPr>
+            <p:ph type="sldImg"/>
+          </p:nvPr>
+        </p:nvSpPr>
+        <p:spPr/>
+      </p:sp>
+      <p:sp>
+        <p:nvSpPr>
+          <p:cNvPr id="3" name="备注占位符 2"/>
+          <p:cNvSpPr>
+            <a:spLocks noGrp="1"/>
+          </p:cNvSpPr>
+          <p:nvPr>
+            <p:ph type="body" idx="1"/>
+          </p:nvPr>
+        </p:nvSpPr>
+        <p:spPr/>
+        <p:txBody>
+          <a:bodyPr/>
+          <a:lstStyle/>
+          <a:p>
+            <a:r>
+              <a:rPr lang="zh-CN" altLang="en-US" dirty="0"/>
+              <a:t>各种例子：</a:t>
+            </a:r>
+            <a:endParaRPr lang="en-US" altLang="zh-CN" dirty="0"/>
+          </a:p>
+          <a:p>
+            <a:endParaRPr lang="en-US" altLang="zh-CN" dirty="0"/>
+          </a:p>
+          <a:p>
+            <a:r>
+              <a:rPr lang="en-US" altLang="zh-CN" dirty="0"/>
+              <a:t>https://www.youtube.com/watch?v=-4EDhdAHrOg   </a:t>
+            </a:r>
+          </a:p>
+          <a:p>
+            <a:r>
+              <a:rPr lang="zh-CN" altLang="en-US" dirty="0">
+                <a:hlinkClick r:id="rId3"/>
+              </a:rPr>
+              <a:t>https://www.youtube.com/watch?v=eicyG2hPoIE</a:t>
+            </a:r>
+            <a:endParaRPr lang="en-US" altLang="zh-CN" dirty="0"/>
+          </a:p>
+          <a:p>
+            <a:r>
+              <a:rPr lang="zh-CN" altLang="en-US" dirty="0">
+                <a:hlinkClick r:id="rId4"/>
+              </a:rPr>
+              <a:t>https://www.youtube.com/watch?v=5WqdpUaBpzI</a:t>
+            </a:r>
+            <a:r>
+              <a:rPr lang="zh-CN" altLang="en-US" dirty="0"/>
+              <a:t> </a:t>
+            </a:r>
+          </a:p>
+        </p:txBody>
+      </p:sp>
+      <p:sp>
+        <p:nvSpPr>
+          <p:cNvPr id="4" name="灯片编号占位符 3"/>
+          <p:cNvSpPr>
+            <a:spLocks noGrp="1"/>
+          </p:cNvSpPr>
+          <p:nvPr>
+            <p:ph type="sldNum" sz="quarter" idx="5"/>
+          </p:nvPr>
+        </p:nvSpPr>
+        <p:spPr/>
+        <p:txBody>
+          <a:bodyPr/>
+          <a:lstStyle/>
+          <a:p>
+            <a:fld id="{7CE77197-739D-4B26-AF33-8D06BC2CEE70}" type="slidenum">
+              <a:rPr lang="en-US" smtClean="0"/>
+              <a:t>54</a:t>
+            </a:fld>
+            <a:endParaRPr lang="en-US"/>
+          </a:p>
+        </p:txBody>
+      </p:sp>
+    </p:spTree>
+    <p:extLst>
+      <p:ext uri="{BB962C8B-B14F-4D97-AF65-F5344CB8AC3E}">
+        <p14:creationId xmlns:p14="http://schemas.microsoft.com/office/powerpoint/2010/main" val="2383989094"/>
+      </p:ext>
+    </p:extLst>
   </p:cSld>
   <p:clrMapOvr>
     <a:masterClrMapping/>
@@ -4645,6 +4694,7 @@
           <a:p>
             <a:fld id="{48A87A34-81AB-432B-8DAE-1953F412C126}" type="datetimeFigureOut">
               <a:rPr lang="en-US" smtClean="0"/>
+              <a:t>6/9/2026</a:t>
             </a:fld>
             <a:endParaRPr lang="en-US" dirty="0"/>
           </a:p>
@@ -4686,6 +4736,7 @@
           <a:p>
             <a:fld id="{6D22F896-40B5-4ADD-8801-0D06FADFA095}" type="slidenum">
               <a:rPr lang="en-US" smtClean="0"/>
+              <a:t>‹#›</a:t>
             </a:fld>
             <a:endParaRPr lang="en-US" dirty="0"/>
           </a:p>
@@ -4899,7 +4950,6 @@
               <a:rPr lang="en-US"/>
               <a:t>Edit Master text styles</a:t>
             </a:r>
-            <a:endParaRPr lang="en-US"/>
           </a:p>
         </p:txBody>
       </p:sp>
@@ -4920,6 +4970,7 @@
           <a:p>
             <a:fld id="{48A87A34-81AB-432B-8DAE-1953F412C126}" type="datetimeFigureOut">
               <a:rPr lang="en-US" smtClean="0"/>
+              <a:t>6/9/2026</a:t>
             </a:fld>
             <a:endParaRPr lang="en-US" dirty="0"/>
           </a:p>
@@ -4961,6 +5012,7 @@
           <a:p>
             <a:fld id="{6D22F896-40B5-4ADD-8801-0D06FADFA095}" type="slidenum">
               <a:rPr lang="en-US" smtClean="0"/>
+              <a:t>‹#›</a:t>
             </a:fld>
             <a:endParaRPr lang="en-US" dirty="0"/>
           </a:p>
@@ -5085,7 +5137,6 @@
               <a:rPr lang="en-US"/>
               <a:t>Edit Master text styles</a:t>
             </a:r>
-            <a:endParaRPr lang="en-US"/>
           </a:p>
         </p:txBody>
       </p:sp>
@@ -5106,6 +5157,7 @@
           <a:p>
             <a:fld id="{48A87A34-81AB-432B-8DAE-1953F412C126}" type="datetimeFigureOut">
               <a:rPr lang="en-US" smtClean="0"/>
+              <a:t>6/9/2026</a:t>
             </a:fld>
             <a:endParaRPr lang="en-US" dirty="0"/>
           </a:p>
@@ -5147,6 +5199,7 @@
           <a:p>
             <a:fld id="{6D22F896-40B5-4ADD-8801-0D06FADFA095}" type="slidenum">
               <a:rPr lang="en-US" smtClean="0"/>
+              <a:t>‹#›</a:t>
             </a:fld>
             <a:endParaRPr lang="en-US" dirty="0"/>
           </a:p>
@@ -5273,7 +5326,6 @@
               <a:rPr lang="en-US"/>
               <a:t>Edit Master text styles</a:t>
             </a:r>
-            <a:endParaRPr lang="en-US"/>
           </a:p>
         </p:txBody>
       </p:sp>
@@ -5341,7 +5393,6 @@
               <a:rPr lang="en-US"/>
               <a:t>Edit Master text styles</a:t>
             </a:r>
-            <a:endParaRPr lang="en-US"/>
           </a:p>
         </p:txBody>
       </p:sp>
@@ -5362,6 +5413,7 @@
           <a:p>
             <a:fld id="{48A87A34-81AB-432B-8DAE-1953F412C126}" type="datetimeFigureOut">
               <a:rPr lang="en-US" smtClean="0"/>
+              <a:t>6/9/2026</a:t>
             </a:fld>
             <a:endParaRPr lang="en-US" dirty="0"/>
           </a:p>
@@ -5403,6 +5455,7 @@
           <a:p>
             <a:fld id="{6D22F896-40B5-4ADD-8801-0D06FADFA095}" type="slidenum">
               <a:rPr lang="en-US" smtClean="0"/>
+              <a:t>‹#›</a:t>
             </a:fld>
             <a:endParaRPr lang="en-US" dirty="0"/>
           </a:p>
@@ -5521,12 +5574,6 @@
               </a:rPr>
               <a:t>“</a:t>
             </a:r>
-            <a:endParaRPr lang="en-US" sz="8000" dirty="0">
-              <a:solidFill>
-                <a:schemeClr val="tx1"/>
-              </a:solidFill>
-              <a:effectLst/>
-            </a:endParaRPr>
           </a:p>
         </p:txBody>
       </p:sp>
@@ -5643,12 +5690,6 @@
               </a:rPr>
               <a:t>”</a:t>
             </a:r>
-            <a:endParaRPr lang="en-US" sz="8000" dirty="0">
-              <a:solidFill>
-                <a:schemeClr val="tx1"/>
-              </a:solidFill>
-              <a:effectLst/>
-            </a:endParaRPr>
           </a:p>
         </p:txBody>
       </p:sp>
@@ -5773,7 +5814,6 @@
               <a:rPr lang="en-US"/>
               <a:t>Edit Master text styles</a:t>
             </a:r>
-            <a:endParaRPr lang="en-US"/>
           </a:p>
         </p:txBody>
       </p:sp>
@@ -5794,6 +5834,7 @@
           <a:p>
             <a:fld id="{48A87A34-81AB-432B-8DAE-1953F412C126}" type="datetimeFigureOut">
               <a:rPr lang="en-US" smtClean="0"/>
+              <a:t>6/9/2026</a:t>
             </a:fld>
             <a:endParaRPr lang="en-US" dirty="0"/>
           </a:p>
@@ -5835,6 +5876,7 @@
           <a:p>
             <a:fld id="{6D22F896-40B5-4ADD-8801-0D06FADFA095}" type="slidenum">
               <a:rPr lang="en-US" smtClean="0"/>
+              <a:t>‹#›</a:t>
             </a:fld>
             <a:endParaRPr lang="en-US" dirty="0"/>
           </a:p>
@@ -5984,7 +6026,6 @@
               <a:rPr lang="en-US"/>
               <a:t>Edit Master text styles</a:t>
             </a:r>
-            <a:endParaRPr lang="en-US"/>
           </a:p>
         </p:txBody>
       </p:sp>
@@ -6052,7 +6093,6 @@
               <a:rPr lang="en-US"/>
               <a:t>Edit Master text styles</a:t>
             </a:r>
-            <a:endParaRPr lang="en-US"/>
           </a:p>
         </p:txBody>
       </p:sp>
@@ -6117,7 +6157,6 @@
               <a:rPr lang="en-US"/>
               <a:t>Edit Master text styles</a:t>
             </a:r>
-            <a:endParaRPr lang="en-US"/>
           </a:p>
         </p:txBody>
       </p:sp>
@@ -6185,7 +6224,6 @@
               <a:rPr lang="en-US"/>
               <a:t>Edit Master text styles</a:t>
             </a:r>
-            <a:endParaRPr lang="en-US"/>
           </a:p>
         </p:txBody>
       </p:sp>
@@ -6250,7 +6288,6 @@
               <a:rPr lang="en-US"/>
               <a:t>Edit Master text styles</a:t>
             </a:r>
-            <a:endParaRPr lang="en-US"/>
           </a:p>
         </p:txBody>
       </p:sp>
@@ -6318,7 +6355,6 @@
               <a:rPr lang="en-US"/>
               <a:t>Edit Master text styles</a:t>
             </a:r>
-            <a:endParaRPr lang="en-US"/>
           </a:p>
         </p:txBody>
       </p:sp>
@@ -6339,6 +6375,7 @@
           <a:p>
             <a:fld id="{48A87A34-81AB-432B-8DAE-1953F412C126}" type="datetimeFigureOut">
               <a:rPr lang="en-US" smtClean="0"/>
+              <a:t>6/9/2026</a:t>
             </a:fld>
             <a:endParaRPr lang="en-US" dirty="0"/>
           </a:p>
@@ -6380,6 +6417,7 @@
           <a:p>
             <a:fld id="{6D22F896-40B5-4ADD-8801-0D06FADFA095}" type="slidenum">
               <a:rPr lang="en-US" smtClean="0"/>
+              <a:t>‹#›</a:t>
             </a:fld>
             <a:endParaRPr lang="en-US" dirty="0"/>
           </a:p>
@@ -6525,7 +6563,6 @@
               <a:rPr lang="en-US"/>
               <a:t>Edit Master text styles</a:t>
             </a:r>
-            <a:endParaRPr lang="en-US"/>
           </a:p>
         </p:txBody>
       </p:sp>
@@ -6672,7 +6709,6 @@
               <a:rPr lang="en-US"/>
               <a:t>Edit Master text styles</a:t>
             </a:r>
-            <a:endParaRPr lang="en-US"/>
           </a:p>
         </p:txBody>
       </p:sp>
@@ -6763,7 +6799,6 @@
               <a:rPr lang="en-US"/>
               <a:t>Edit Master text styles</a:t>
             </a:r>
-            <a:endParaRPr lang="en-US"/>
           </a:p>
         </p:txBody>
       </p:sp>
@@ -6910,7 +6945,6 @@
               <a:rPr lang="en-US"/>
               <a:t>Edit Master text styles</a:t>
             </a:r>
-            <a:endParaRPr lang="en-US"/>
           </a:p>
         </p:txBody>
       </p:sp>
@@ -7001,7 +7035,6 @@
               <a:rPr lang="en-US"/>
               <a:t>Edit Master text styles</a:t>
             </a:r>
-            <a:endParaRPr lang="en-US"/>
           </a:p>
         </p:txBody>
       </p:sp>
@@ -7148,7 +7181,6 @@
               <a:rPr lang="en-US"/>
               <a:t>Edit Master text styles</a:t>
             </a:r>
-            <a:endParaRPr lang="en-US"/>
           </a:p>
         </p:txBody>
       </p:sp>
@@ -7169,6 +7201,7 @@
           <a:p>
             <a:fld id="{48A87A34-81AB-432B-8DAE-1953F412C126}" type="datetimeFigureOut">
               <a:rPr lang="en-US" smtClean="0"/>
+              <a:t>6/9/2026</a:t>
             </a:fld>
             <a:endParaRPr lang="en-US" dirty="0"/>
           </a:p>
@@ -7210,6 +7243,7 @@
           <a:p>
             <a:fld id="{6D22F896-40B5-4ADD-8801-0D06FADFA095}" type="slidenum">
               <a:rPr lang="en-US" smtClean="0"/>
+              <a:t>‹#›</a:t>
             </a:fld>
             <a:endParaRPr lang="en-US" dirty="0"/>
           </a:p>
@@ -7283,7 +7317,6 @@
               <a:rPr lang="en-US"/>
               <a:t>Edit Master text styles</a:t>
             </a:r>
-            <a:endParaRPr lang="en-US"/>
           </a:p>
           <a:p>
             <a:pPr lvl="1"/>
@@ -7291,7 +7324,6 @@
               <a:rPr lang="en-US"/>
               <a:t>Second level</a:t>
             </a:r>
-            <a:endParaRPr lang="en-US"/>
           </a:p>
           <a:p>
             <a:pPr lvl="2"/>
@@ -7299,7 +7331,6 @@
               <a:rPr lang="en-US"/>
               <a:t>Third level</a:t>
             </a:r>
-            <a:endParaRPr lang="en-US"/>
           </a:p>
           <a:p>
             <a:pPr lvl="3"/>
@@ -7307,7 +7338,6 @@
               <a:rPr lang="en-US"/>
               <a:t>Fourth level</a:t>
             </a:r>
-            <a:endParaRPr lang="en-US"/>
           </a:p>
           <a:p>
             <a:pPr lvl="4"/>
@@ -7336,6 +7366,7 @@
           <a:p>
             <a:fld id="{48A87A34-81AB-432B-8DAE-1953F412C126}" type="datetimeFigureOut">
               <a:rPr lang="en-US" smtClean="0"/>
+              <a:t>6/9/2026</a:t>
             </a:fld>
             <a:endParaRPr lang="en-US" dirty="0"/>
           </a:p>
@@ -7377,6 +7408,7 @@
           <a:p>
             <a:fld id="{6D22F896-40B5-4ADD-8801-0D06FADFA095}" type="slidenum">
               <a:rPr lang="en-US" smtClean="0"/>
+              <a:t>‹#›</a:t>
             </a:fld>
             <a:endParaRPr lang="en-US" dirty="0"/>
           </a:p>
@@ -7460,7 +7492,6 @@
               <a:rPr lang="en-US"/>
               <a:t>Edit Master text styles</a:t>
             </a:r>
-            <a:endParaRPr lang="en-US"/>
           </a:p>
           <a:p>
             <a:pPr lvl="1"/>
@@ -7468,7 +7499,6 @@
               <a:rPr lang="en-US"/>
               <a:t>Second level</a:t>
             </a:r>
-            <a:endParaRPr lang="en-US"/>
           </a:p>
           <a:p>
             <a:pPr lvl="2"/>
@@ -7476,7 +7506,6 @@
               <a:rPr lang="en-US"/>
               <a:t>Third level</a:t>
             </a:r>
-            <a:endParaRPr lang="en-US"/>
           </a:p>
           <a:p>
             <a:pPr lvl="3"/>
@@ -7484,7 +7513,6 @@
               <a:rPr lang="en-US"/>
               <a:t>Fourth level</a:t>
             </a:r>
-            <a:endParaRPr lang="en-US"/>
           </a:p>
           <a:p>
             <a:pPr lvl="4"/>
@@ -7513,6 +7541,7 @@
           <a:p>
             <a:fld id="{48A87A34-81AB-432B-8DAE-1953F412C126}" type="datetimeFigureOut">
               <a:rPr lang="en-US" smtClean="0"/>
+              <a:t>6/9/2026</a:t>
             </a:fld>
             <a:endParaRPr lang="en-US" dirty="0"/>
           </a:p>
@@ -7554,6 +7583,7 @@
           <a:p>
             <a:fld id="{6D22F896-40B5-4ADD-8801-0D06FADFA095}" type="slidenum">
               <a:rPr lang="en-US" smtClean="0"/>
+              <a:t>‹#›</a:t>
             </a:fld>
             <a:endParaRPr lang="en-US" dirty="0"/>
           </a:p>
@@ -7763,6 +7793,7 @@
           <a:p>
             <a:fld id="{48A87A34-81AB-432B-8DAE-1953F412C126}" type="datetimeFigureOut">
               <a:rPr lang="en-US" smtClean="0"/>
+              <a:t>6/9/2026</a:t>
             </a:fld>
             <a:endParaRPr lang="en-US" dirty="0"/>
           </a:p>
@@ -7804,6 +7835,7 @@
           <a:p>
             <a:fld id="{6D22F896-40B5-4ADD-8801-0D06FADFA095}" type="slidenum">
               <a:rPr lang="en-US" smtClean="0"/>
+              <a:t>‹#›</a:t>
             </a:fld>
             <a:endParaRPr lang="en-US" dirty="0"/>
           </a:p>
@@ -7877,7 +7909,6 @@
               <a:rPr lang="en-US"/>
               <a:t>Edit Master text styles</a:t>
             </a:r>
-            <a:endParaRPr lang="en-US"/>
           </a:p>
           <a:p>
             <a:pPr lvl="1"/>
@@ -7885,7 +7916,6 @@
               <a:rPr lang="en-US"/>
               <a:t>Second level</a:t>
             </a:r>
-            <a:endParaRPr lang="en-US"/>
           </a:p>
           <a:p>
             <a:pPr lvl="2"/>
@@ -7893,7 +7923,6 @@
               <a:rPr lang="en-US"/>
               <a:t>Third level</a:t>
             </a:r>
-            <a:endParaRPr lang="en-US"/>
           </a:p>
           <a:p>
             <a:pPr lvl="3"/>
@@ -7901,7 +7930,6 @@
               <a:rPr lang="en-US"/>
               <a:t>Fourth level</a:t>
             </a:r>
-            <a:endParaRPr lang="en-US"/>
           </a:p>
           <a:p>
             <a:pPr lvl="4"/>
@@ -7930,6 +7958,7 @@
           <a:p>
             <a:fld id="{48A87A34-81AB-432B-8DAE-1953F412C126}" type="datetimeFigureOut">
               <a:rPr lang="en-US" smtClean="0"/>
+              <a:t>6/9/2026</a:t>
             </a:fld>
             <a:endParaRPr lang="en-US" dirty="0"/>
           </a:p>
@@ -7971,6 +8000,7 @@
           <a:p>
             <a:fld id="{6D22F896-40B5-4ADD-8801-0D06FADFA095}" type="slidenum">
               <a:rPr lang="en-US" smtClean="0"/>
+              <a:t>‹#›</a:t>
             </a:fld>
             <a:endParaRPr lang="en-US" dirty="0"/>
           </a:p>
@@ -8044,7 +8074,6 @@
               <a:rPr lang="en-US"/>
               <a:t>Edit Master text styles</a:t>
             </a:r>
-            <a:endParaRPr lang="en-US"/>
           </a:p>
           <a:p>
             <a:pPr lvl="1"/>
@@ -8052,7 +8081,6 @@
               <a:rPr lang="en-US"/>
               <a:t>Second level</a:t>
             </a:r>
-            <a:endParaRPr lang="en-US"/>
           </a:p>
           <a:p>
             <a:pPr lvl="2"/>
@@ -8060,7 +8088,6 @@
               <a:rPr lang="en-US"/>
               <a:t>Third level</a:t>
             </a:r>
-            <a:endParaRPr lang="en-US"/>
           </a:p>
           <a:p>
             <a:pPr lvl="3"/>
@@ -8068,7 +8095,6 @@
               <a:rPr lang="en-US"/>
               <a:t>Fourth level</a:t>
             </a:r>
-            <a:endParaRPr lang="en-US"/>
           </a:p>
           <a:p>
             <a:pPr lvl="4"/>
@@ -8097,6 +8123,7 @@
           <a:p>
             <a:fld id="{48A87A34-81AB-432B-8DAE-1953F412C126}" type="datetimeFigureOut">
               <a:rPr lang="en-US" smtClean="0"/>
+              <a:t>6/9/2026</a:t>
             </a:fld>
             <a:endParaRPr lang="en-US" dirty="0"/>
           </a:p>
@@ -8138,6 +8165,7 @@
           <a:p>
             <a:fld id="{6D22F896-40B5-4ADD-8801-0D06FADFA095}" type="slidenum">
               <a:rPr lang="en-US" smtClean="0"/>
+              <a:t>‹#›</a:t>
             </a:fld>
             <a:endParaRPr lang="en-US" dirty="0"/>
           </a:p>
@@ -8347,6 +8375,7 @@
           <a:p>
             <a:fld id="{48A87A34-81AB-432B-8DAE-1953F412C126}" type="datetimeFigureOut">
               <a:rPr lang="en-US" smtClean="0"/>
+              <a:t>6/9/2026</a:t>
             </a:fld>
             <a:endParaRPr lang="en-US" dirty="0"/>
           </a:p>
@@ -8388,6 +8417,7 @@
           <a:p>
             <a:fld id="{6D22F896-40B5-4ADD-8801-0D06FADFA095}" type="slidenum">
               <a:rPr lang="en-US" smtClean="0"/>
+              <a:t>‹#›</a:t>
             </a:fld>
             <a:endParaRPr lang="en-US" dirty="0"/>
           </a:p>
@@ -8466,7 +8496,6 @@
               <a:rPr lang="en-US"/>
               <a:t>Edit Master text styles</a:t>
             </a:r>
-            <a:endParaRPr lang="en-US"/>
           </a:p>
           <a:p>
             <a:pPr lvl="1"/>
@@ -8474,7 +8503,6 @@
               <a:rPr lang="en-US"/>
               <a:t>Second level</a:t>
             </a:r>
-            <a:endParaRPr lang="en-US"/>
           </a:p>
           <a:p>
             <a:pPr lvl="2"/>
@@ -8482,7 +8510,6 @@
               <a:rPr lang="en-US"/>
               <a:t>Third level</a:t>
             </a:r>
-            <a:endParaRPr lang="en-US"/>
           </a:p>
           <a:p>
             <a:pPr lvl="3"/>
@@ -8490,7 +8517,6 @@
               <a:rPr lang="en-US"/>
               <a:t>Fourth level</a:t>
             </a:r>
-            <a:endParaRPr lang="en-US"/>
           </a:p>
           <a:p>
             <a:pPr lvl="4"/>
@@ -8527,7 +8553,6 @@
               <a:rPr lang="en-US"/>
               <a:t>Edit Master text styles</a:t>
             </a:r>
-            <a:endParaRPr lang="en-US"/>
           </a:p>
           <a:p>
             <a:pPr lvl="1"/>
@@ -8535,7 +8560,6 @@
               <a:rPr lang="en-US"/>
               <a:t>Second level</a:t>
             </a:r>
-            <a:endParaRPr lang="en-US"/>
           </a:p>
           <a:p>
             <a:pPr lvl="2"/>
@@ -8543,7 +8567,6 @@
               <a:rPr lang="en-US"/>
               <a:t>Third level</a:t>
             </a:r>
-            <a:endParaRPr lang="en-US"/>
           </a:p>
           <a:p>
             <a:pPr lvl="3"/>
@@ -8551,7 +8574,6 @@
               <a:rPr lang="en-US"/>
               <a:t>Fourth level</a:t>
             </a:r>
-            <a:endParaRPr lang="en-US"/>
           </a:p>
           <a:p>
             <a:pPr lvl="4"/>
@@ -8580,6 +8602,7 @@
           <a:p>
             <a:fld id="{48A87A34-81AB-432B-8DAE-1953F412C126}" type="datetimeFigureOut">
               <a:rPr lang="en-US" smtClean="0"/>
+              <a:t>6/9/2026</a:t>
             </a:fld>
             <a:endParaRPr lang="en-US" dirty="0"/>
           </a:p>
@@ -8621,6 +8644,7 @@
           <a:p>
             <a:fld id="{6D22F896-40B5-4ADD-8801-0D06FADFA095}" type="slidenum">
               <a:rPr lang="en-US" smtClean="0"/>
+              <a:t>‹#›</a:t>
             </a:fld>
             <a:endParaRPr lang="en-US" dirty="0"/>
           </a:p>
@@ -8768,7 +8792,6 @@
               <a:rPr lang="en-US"/>
               <a:t>Edit Master text styles</a:t>
             </a:r>
-            <a:endParaRPr lang="en-US"/>
           </a:p>
         </p:txBody>
       </p:sp>
@@ -8797,7 +8820,6 @@
               <a:rPr lang="en-US"/>
               <a:t>Edit Master text styles</a:t>
             </a:r>
-            <a:endParaRPr lang="en-US"/>
           </a:p>
           <a:p>
             <a:pPr lvl="1"/>
@@ -8805,7 +8827,6 @@
               <a:rPr lang="en-US"/>
               <a:t>Second level</a:t>
             </a:r>
-            <a:endParaRPr lang="en-US"/>
           </a:p>
           <a:p>
             <a:pPr lvl="2"/>
@@ -8813,7 +8834,6 @@
               <a:rPr lang="en-US"/>
               <a:t>Third level</a:t>
             </a:r>
-            <a:endParaRPr lang="en-US"/>
           </a:p>
           <a:p>
             <a:pPr lvl="3"/>
@@ -8821,7 +8841,6 @@
               <a:rPr lang="en-US"/>
               <a:t>Fourth level</a:t>
             </a:r>
-            <a:endParaRPr lang="en-US"/>
           </a:p>
           <a:p>
             <a:pPr lvl="4"/>
@@ -8894,7 +8913,6 @@
               <a:rPr lang="en-US"/>
               <a:t>Edit Master text styles</a:t>
             </a:r>
-            <a:endParaRPr lang="en-US"/>
           </a:p>
         </p:txBody>
       </p:sp>
@@ -8923,7 +8941,6 @@
               <a:rPr lang="en-US"/>
               <a:t>Edit Master text styles</a:t>
             </a:r>
-            <a:endParaRPr lang="en-US"/>
           </a:p>
           <a:p>
             <a:pPr lvl="1"/>
@@ -8931,7 +8948,6 @@
               <a:rPr lang="en-US"/>
               <a:t>Second level</a:t>
             </a:r>
-            <a:endParaRPr lang="en-US"/>
           </a:p>
           <a:p>
             <a:pPr lvl="2"/>
@@ -8939,7 +8955,6 @@
               <a:rPr lang="en-US"/>
               <a:t>Third level</a:t>
             </a:r>
-            <a:endParaRPr lang="en-US"/>
           </a:p>
           <a:p>
             <a:pPr lvl="3"/>
@@ -8947,7 +8962,6 @@
               <a:rPr lang="en-US"/>
               <a:t>Fourth level</a:t>
             </a:r>
-            <a:endParaRPr lang="en-US"/>
           </a:p>
           <a:p>
             <a:pPr lvl="4"/>
@@ -8976,6 +8990,7 @@
           <a:p>
             <a:fld id="{48A87A34-81AB-432B-8DAE-1953F412C126}" type="datetimeFigureOut">
               <a:rPr lang="en-US" smtClean="0"/>
+              <a:t>6/9/2026</a:t>
             </a:fld>
             <a:endParaRPr lang="en-US" dirty="0"/>
           </a:p>
@@ -9017,6 +9032,7 @@
           <a:p>
             <a:fld id="{6D22F896-40B5-4ADD-8801-0D06FADFA095}" type="slidenum">
               <a:rPr lang="en-US" smtClean="0"/>
+              <a:t>‹#›</a:t>
             </a:fld>
             <a:endParaRPr lang="en-US" dirty="0"/>
           </a:p>
@@ -9087,6 +9103,7 @@
           <a:p>
             <a:fld id="{48A87A34-81AB-432B-8DAE-1953F412C126}" type="datetimeFigureOut">
               <a:rPr lang="en-US" smtClean="0"/>
+              <a:t>6/9/2026</a:t>
             </a:fld>
             <a:endParaRPr lang="en-US" dirty="0"/>
           </a:p>
@@ -9128,6 +9145,7 @@
           <a:p>
             <a:fld id="{6D22F896-40B5-4ADD-8801-0D06FADFA095}" type="slidenum">
               <a:rPr lang="en-US" smtClean="0"/>
+              <a:t>‹#›</a:t>
             </a:fld>
             <a:endParaRPr lang="en-US" dirty="0"/>
           </a:p>
@@ -9175,6 +9193,7 @@
           <a:p>
             <a:fld id="{48A87A34-81AB-432B-8DAE-1953F412C126}" type="datetimeFigureOut">
               <a:rPr lang="en-US" smtClean="0"/>
+              <a:t>6/9/2026</a:t>
             </a:fld>
             <a:endParaRPr lang="en-US" dirty="0"/>
           </a:p>
@@ -9216,6 +9235,7 @@
           <a:p>
             <a:fld id="{6D22F896-40B5-4ADD-8801-0D06FADFA095}" type="slidenum">
               <a:rPr lang="en-US" smtClean="0"/>
+              <a:t>‹#›</a:t>
             </a:fld>
             <a:endParaRPr lang="en-US" dirty="0"/>
           </a:p>
@@ -9303,7 +9323,6 @@
               <a:rPr lang="en-US"/>
               <a:t>Edit Master text styles</a:t>
             </a:r>
-            <a:endParaRPr lang="en-US"/>
           </a:p>
           <a:p>
             <a:pPr lvl="1"/>
@@ -9311,7 +9330,6 @@
               <a:rPr lang="en-US"/>
               <a:t>Second level</a:t>
             </a:r>
-            <a:endParaRPr lang="en-US"/>
           </a:p>
           <a:p>
             <a:pPr lvl="2"/>
@@ -9319,7 +9337,6 @@
               <a:rPr lang="en-US"/>
               <a:t>Third level</a:t>
             </a:r>
-            <a:endParaRPr lang="en-US"/>
           </a:p>
           <a:p>
             <a:pPr lvl="3"/>
@@ -9327,7 +9344,6 @@
               <a:rPr lang="en-US"/>
               <a:t>Fourth level</a:t>
             </a:r>
-            <a:endParaRPr lang="en-US"/>
           </a:p>
           <a:p>
             <a:pPr lvl="4"/>
@@ -9425,7 +9441,6 @@
               <a:rPr lang="en-US"/>
               <a:t>Edit Master text styles</a:t>
             </a:r>
-            <a:endParaRPr lang="en-US"/>
           </a:p>
         </p:txBody>
       </p:sp>
@@ -9446,6 +9461,7 @@
           <a:p>
             <a:fld id="{48A87A34-81AB-432B-8DAE-1953F412C126}" type="datetimeFigureOut">
               <a:rPr lang="en-US" smtClean="0"/>
+              <a:t>6/9/2026</a:t>
             </a:fld>
             <a:endParaRPr lang="en-US" dirty="0"/>
           </a:p>
@@ -9487,6 +9503,7 @@
           <a:p>
             <a:fld id="{6D22F896-40B5-4ADD-8801-0D06FADFA095}" type="slidenum">
               <a:rPr lang="en-US" smtClean="0"/>
+              <a:t>‹#›</a:t>
             </a:fld>
             <a:endParaRPr lang="en-US" dirty="0"/>
           </a:p>
@@ -9700,7 +9717,6 @@
               <a:rPr lang="en-US"/>
               <a:t>Edit Master text styles</a:t>
             </a:r>
-            <a:endParaRPr lang="en-US"/>
           </a:p>
         </p:txBody>
       </p:sp>
@@ -9721,6 +9737,7 @@
           <a:p>
             <a:fld id="{48A87A34-81AB-432B-8DAE-1953F412C126}" type="datetimeFigureOut">
               <a:rPr lang="en-US" smtClean="0"/>
+              <a:t>6/9/2026</a:t>
             </a:fld>
             <a:endParaRPr lang="en-US" dirty="0"/>
           </a:p>
@@ -9762,6 +9779,7 @@
           <a:p>
             <a:fld id="{6D22F896-40B5-4ADD-8801-0D06FADFA095}" type="slidenum">
               <a:rPr lang="en-US" smtClean="0"/>
+              <a:t>‹#›</a:t>
             </a:fld>
             <a:endParaRPr lang="en-US" dirty="0"/>
           </a:p>
@@ -9975,7 +9993,6 @@
               <a:rPr lang="en-US"/>
               <a:t>Edit Master text styles</a:t>
             </a:r>
-            <a:endParaRPr lang="en-US"/>
           </a:p>
         </p:txBody>
       </p:sp>
@@ -9996,6 +10013,7 @@
           <a:p>
             <a:fld id="{48A87A34-81AB-432B-8DAE-1953F412C126}" type="datetimeFigureOut">
               <a:rPr lang="en-US" smtClean="0"/>
+              <a:t>6/9/2026</a:t>
             </a:fld>
             <a:endParaRPr lang="en-US" dirty="0"/>
           </a:p>
@@ -10037,6 +10055,7 @@
           <a:p>
             <a:fld id="{6D22F896-40B5-4ADD-8801-0D06FADFA095}" type="slidenum">
               <a:rPr lang="en-US" smtClean="0"/>
+              <a:t>‹#›</a:t>
             </a:fld>
             <a:endParaRPr lang="en-US" dirty="0"/>
           </a:p>
@@ -10161,7 +10180,6 @@
               <a:rPr lang="en-US"/>
               <a:t>Edit Master text styles</a:t>
             </a:r>
-            <a:endParaRPr lang="en-US"/>
           </a:p>
         </p:txBody>
       </p:sp>
@@ -10182,6 +10200,7 @@
           <a:p>
             <a:fld id="{48A87A34-81AB-432B-8DAE-1953F412C126}" type="datetimeFigureOut">
               <a:rPr lang="en-US" smtClean="0"/>
+              <a:t>6/9/2026</a:t>
             </a:fld>
             <a:endParaRPr lang="en-US" dirty="0"/>
           </a:p>
@@ -10223,6 +10242,7 @@
           <a:p>
             <a:fld id="{6D22F896-40B5-4ADD-8801-0D06FADFA095}" type="slidenum">
               <a:rPr lang="en-US" smtClean="0"/>
+              <a:t>‹#›</a:t>
             </a:fld>
             <a:endParaRPr lang="en-US" dirty="0"/>
           </a:p>
@@ -10349,7 +10369,6 @@
               <a:rPr lang="en-US"/>
               <a:t>Edit Master text styles</a:t>
             </a:r>
-            <a:endParaRPr lang="en-US"/>
           </a:p>
         </p:txBody>
       </p:sp>
@@ -10417,7 +10436,6 @@
               <a:rPr lang="en-US"/>
               <a:t>Edit Master text styles</a:t>
             </a:r>
-            <a:endParaRPr lang="en-US"/>
           </a:p>
         </p:txBody>
       </p:sp>
@@ -10438,6 +10456,7 @@
           <a:p>
             <a:fld id="{48A87A34-81AB-432B-8DAE-1953F412C126}" type="datetimeFigureOut">
               <a:rPr lang="en-US" smtClean="0"/>
+              <a:t>6/9/2026</a:t>
             </a:fld>
             <a:endParaRPr lang="en-US" dirty="0"/>
           </a:p>
@@ -10479,6 +10498,7 @@
           <a:p>
             <a:fld id="{6D22F896-40B5-4ADD-8801-0D06FADFA095}" type="slidenum">
               <a:rPr lang="en-US" smtClean="0"/>
+              <a:t>‹#›</a:t>
             </a:fld>
             <a:endParaRPr lang="en-US" dirty="0"/>
           </a:p>
@@ -10597,12 +10617,6 @@
               </a:rPr>
               <a:t>“</a:t>
             </a:r>
-            <a:endParaRPr lang="en-US" sz="8000" dirty="0">
-              <a:solidFill>
-                <a:schemeClr val="tx1"/>
-              </a:solidFill>
-              <a:effectLst/>
-            </a:endParaRPr>
           </a:p>
         </p:txBody>
       </p:sp>
@@ -10719,12 +10733,6 @@
               </a:rPr>
               <a:t>”</a:t>
             </a:r>
-            <a:endParaRPr lang="en-US" sz="8000" dirty="0">
-              <a:solidFill>
-                <a:schemeClr val="tx1"/>
-              </a:solidFill>
-              <a:effectLst/>
-            </a:endParaRPr>
           </a:p>
         </p:txBody>
       </p:sp>
@@ -10932,6 +10940,7 @@
           <a:p>
             <a:fld id="{48A87A34-81AB-432B-8DAE-1953F412C126}" type="datetimeFigureOut">
               <a:rPr lang="en-US" smtClean="0"/>
+              <a:t>6/9/2026</a:t>
             </a:fld>
             <a:endParaRPr lang="en-US" dirty="0"/>
           </a:p>
@@ -10973,6 +10982,7 @@
           <a:p>
             <a:fld id="{6D22F896-40B5-4ADD-8801-0D06FADFA095}" type="slidenum">
               <a:rPr lang="en-US" smtClean="0"/>
+              <a:t>‹#›</a:t>
             </a:fld>
             <a:endParaRPr lang="en-US" dirty="0"/>
           </a:p>
@@ -11099,7 +11109,6 @@
               <a:rPr lang="en-US"/>
               <a:t>Edit Master text styles</a:t>
             </a:r>
-            <a:endParaRPr lang="en-US"/>
           </a:p>
         </p:txBody>
       </p:sp>
@@ -11120,6 +11129,7 @@
           <a:p>
             <a:fld id="{48A87A34-81AB-432B-8DAE-1953F412C126}" type="datetimeFigureOut">
               <a:rPr lang="en-US" smtClean="0"/>
+              <a:t>6/9/2026</a:t>
             </a:fld>
             <a:endParaRPr lang="en-US" dirty="0"/>
           </a:p>
@@ -11161,6 +11171,7 @@
           <a:p>
             <a:fld id="{6D22F896-40B5-4ADD-8801-0D06FADFA095}" type="slidenum">
               <a:rPr lang="en-US" smtClean="0"/>
+              <a:t>‹#›</a:t>
             </a:fld>
             <a:endParaRPr lang="en-US" dirty="0"/>
           </a:p>
@@ -11310,7 +11321,6 @@
               <a:rPr lang="en-US"/>
               <a:t>Edit Master text styles</a:t>
             </a:r>
-            <a:endParaRPr lang="en-US"/>
           </a:p>
         </p:txBody>
       </p:sp>
@@ -11378,7 +11388,6 @@
               <a:rPr lang="en-US"/>
               <a:t>Edit Master text styles</a:t>
             </a:r>
-            <a:endParaRPr lang="en-US"/>
           </a:p>
         </p:txBody>
       </p:sp>
@@ -11443,7 +11452,6 @@
               <a:rPr lang="en-US"/>
               <a:t>Edit Master text styles</a:t>
             </a:r>
-            <a:endParaRPr lang="en-US"/>
           </a:p>
         </p:txBody>
       </p:sp>
@@ -11511,7 +11519,6 @@
               <a:rPr lang="en-US"/>
               <a:t>Edit Master text styles</a:t>
             </a:r>
-            <a:endParaRPr lang="en-US"/>
           </a:p>
         </p:txBody>
       </p:sp>
@@ -11576,7 +11583,6 @@
               <a:rPr lang="en-US"/>
               <a:t>Edit Master text styles</a:t>
             </a:r>
-            <a:endParaRPr lang="en-US"/>
           </a:p>
         </p:txBody>
       </p:sp>
@@ -11644,7 +11650,6 @@
               <a:rPr lang="en-US"/>
               <a:t>Edit Master text styles</a:t>
             </a:r>
-            <a:endParaRPr lang="en-US"/>
           </a:p>
         </p:txBody>
       </p:sp>
@@ -11665,6 +11670,7 @@
           <a:p>
             <a:fld id="{48A87A34-81AB-432B-8DAE-1953F412C126}" type="datetimeFigureOut">
               <a:rPr lang="en-US" smtClean="0"/>
+              <a:t>6/9/2026</a:t>
             </a:fld>
             <a:endParaRPr lang="en-US" dirty="0"/>
           </a:p>
@@ -11706,6 +11712,7 @@
           <a:p>
             <a:fld id="{6D22F896-40B5-4ADD-8801-0D06FADFA095}" type="slidenum">
               <a:rPr lang="en-US" smtClean="0"/>
+              <a:t>‹#›</a:t>
             </a:fld>
             <a:endParaRPr lang="en-US" dirty="0"/>
           </a:p>
@@ -11851,7 +11858,6 @@
               <a:rPr lang="en-US"/>
               <a:t>Edit Master text styles</a:t>
             </a:r>
-            <a:endParaRPr lang="en-US"/>
           </a:p>
         </p:txBody>
       </p:sp>
@@ -11998,7 +12004,6 @@
               <a:rPr lang="en-US"/>
               <a:t>Edit Master text styles</a:t>
             </a:r>
-            <a:endParaRPr lang="en-US"/>
           </a:p>
         </p:txBody>
       </p:sp>
@@ -12089,7 +12094,6 @@
               <a:rPr lang="en-US"/>
               <a:t>Edit Master text styles</a:t>
             </a:r>
-            <a:endParaRPr lang="en-US"/>
           </a:p>
         </p:txBody>
       </p:sp>
@@ -12236,7 +12240,6 @@
               <a:rPr lang="en-US"/>
               <a:t>Edit Master text styles</a:t>
             </a:r>
-            <a:endParaRPr lang="en-US"/>
           </a:p>
         </p:txBody>
       </p:sp>
@@ -12327,7 +12330,6 @@
               <a:rPr lang="en-US"/>
               <a:t>Edit Master text styles</a:t>
             </a:r>
-            <a:endParaRPr lang="en-US"/>
           </a:p>
         </p:txBody>
       </p:sp>
@@ -12474,7 +12476,6 @@
               <a:rPr lang="en-US"/>
               <a:t>Edit Master text styles</a:t>
             </a:r>
-            <a:endParaRPr lang="en-US"/>
           </a:p>
         </p:txBody>
       </p:sp>
@@ -12495,6 +12496,7 @@
           <a:p>
             <a:fld id="{48A87A34-81AB-432B-8DAE-1953F412C126}" type="datetimeFigureOut">
               <a:rPr lang="en-US" smtClean="0"/>
+              <a:t>6/9/2026</a:t>
             </a:fld>
             <a:endParaRPr lang="en-US" dirty="0"/>
           </a:p>
@@ -12536,6 +12538,7 @@
           <a:p>
             <a:fld id="{6D22F896-40B5-4ADD-8801-0D06FADFA095}" type="slidenum">
               <a:rPr lang="en-US" smtClean="0"/>
+              <a:t>‹#›</a:t>
             </a:fld>
             <a:endParaRPr lang="en-US" dirty="0"/>
           </a:p>
@@ -12609,7 +12612,6 @@
               <a:rPr lang="en-US"/>
               <a:t>Edit Master text styles</a:t>
             </a:r>
-            <a:endParaRPr lang="en-US"/>
           </a:p>
           <a:p>
             <a:pPr lvl="1"/>
@@ -12617,7 +12619,6 @@
               <a:rPr lang="en-US"/>
               <a:t>Second level</a:t>
             </a:r>
-            <a:endParaRPr lang="en-US"/>
           </a:p>
           <a:p>
             <a:pPr lvl="2"/>
@@ -12625,7 +12626,6 @@
               <a:rPr lang="en-US"/>
               <a:t>Third level</a:t>
             </a:r>
-            <a:endParaRPr lang="en-US"/>
           </a:p>
           <a:p>
             <a:pPr lvl="3"/>
@@ -12633,7 +12633,6 @@
               <a:rPr lang="en-US"/>
               <a:t>Fourth level</a:t>
             </a:r>
-            <a:endParaRPr lang="en-US"/>
           </a:p>
           <a:p>
             <a:pPr lvl="4"/>
@@ -12662,6 +12661,7 @@
           <a:p>
             <a:fld id="{48A87A34-81AB-432B-8DAE-1953F412C126}" type="datetimeFigureOut">
               <a:rPr lang="en-US" smtClean="0"/>
+              <a:t>6/9/2026</a:t>
             </a:fld>
             <a:endParaRPr lang="en-US" dirty="0"/>
           </a:p>
@@ -12703,6 +12703,7 @@
           <a:p>
             <a:fld id="{6D22F896-40B5-4ADD-8801-0D06FADFA095}" type="slidenum">
               <a:rPr lang="en-US" smtClean="0"/>
+              <a:t>‹#›</a:t>
             </a:fld>
             <a:endParaRPr lang="en-US" dirty="0"/>
           </a:p>
@@ -12786,7 +12787,6 @@
               <a:rPr lang="en-US"/>
               <a:t>Edit Master text styles</a:t>
             </a:r>
-            <a:endParaRPr lang="en-US"/>
           </a:p>
           <a:p>
             <a:pPr lvl="1"/>
@@ -12794,7 +12794,6 @@
               <a:rPr lang="en-US"/>
               <a:t>Second level</a:t>
             </a:r>
-            <a:endParaRPr lang="en-US"/>
           </a:p>
           <a:p>
             <a:pPr lvl="2"/>
@@ -12802,7 +12801,6 @@
               <a:rPr lang="en-US"/>
               <a:t>Third level</a:t>
             </a:r>
-            <a:endParaRPr lang="en-US"/>
           </a:p>
           <a:p>
             <a:pPr lvl="3"/>
@@ -12810,7 +12808,6 @@
               <a:rPr lang="en-US"/>
               <a:t>Fourth level</a:t>
             </a:r>
-            <a:endParaRPr lang="en-US"/>
           </a:p>
           <a:p>
             <a:pPr lvl="4"/>
@@ -12839,6 +12836,7 @@
           <a:p>
             <a:fld id="{48A87A34-81AB-432B-8DAE-1953F412C126}" type="datetimeFigureOut">
               <a:rPr lang="en-US" smtClean="0"/>
+              <a:t>6/9/2026</a:t>
             </a:fld>
             <a:endParaRPr lang="en-US" dirty="0"/>
           </a:p>
@@ -12880,6 +12878,7 @@
           <a:p>
             <a:fld id="{6D22F896-40B5-4ADD-8801-0D06FADFA095}" type="slidenum">
               <a:rPr lang="en-US" smtClean="0"/>
+              <a:t>‹#›</a:t>
             </a:fld>
             <a:endParaRPr lang="en-US" dirty="0"/>
           </a:p>
@@ -12958,7 +12957,6 @@
               <a:rPr lang="en-US"/>
               <a:t>Edit Master text styles</a:t>
             </a:r>
-            <a:endParaRPr lang="en-US"/>
           </a:p>
           <a:p>
             <a:pPr lvl="1"/>
@@ -12966,7 +12964,6 @@
               <a:rPr lang="en-US"/>
               <a:t>Second level</a:t>
             </a:r>
-            <a:endParaRPr lang="en-US"/>
           </a:p>
           <a:p>
             <a:pPr lvl="2"/>
@@ -12974,7 +12971,6 @@
               <a:rPr lang="en-US"/>
               <a:t>Third level</a:t>
             </a:r>
-            <a:endParaRPr lang="en-US"/>
           </a:p>
           <a:p>
             <a:pPr lvl="3"/>
@@ -12982,7 +12978,6 @@
               <a:rPr lang="en-US"/>
               <a:t>Fourth level</a:t>
             </a:r>
-            <a:endParaRPr lang="en-US"/>
           </a:p>
           <a:p>
             <a:pPr lvl="4"/>
@@ -13019,7 +13014,6 @@
               <a:rPr lang="en-US"/>
               <a:t>Edit Master text styles</a:t>
             </a:r>
-            <a:endParaRPr lang="en-US"/>
           </a:p>
           <a:p>
             <a:pPr lvl="1"/>
@@ -13027,7 +13021,6 @@
               <a:rPr lang="en-US"/>
               <a:t>Second level</a:t>
             </a:r>
-            <a:endParaRPr lang="en-US"/>
           </a:p>
           <a:p>
             <a:pPr lvl="2"/>
@@ -13035,7 +13028,6 @@
               <a:rPr lang="en-US"/>
               <a:t>Third level</a:t>
             </a:r>
-            <a:endParaRPr lang="en-US"/>
           </a:p>
           <a:p>
             <a:pPr lvl="3"/>
@@ -13043,7 +13035,6 @@
               <a:rPr lang="en-US"/>
               <a:t>Fourth level</a:t>
             </a:r>
-            <a:endParaRPr lang="en-US"/>
           </a:p>
           <a:p>
             <a:pPr lvl="4"/>
@@ -13072,6 +13063,7 @@
           <a:p>
             <a:fld id="{48A87A34-81AB-432B-8DAE-1953F412C126}" type="datetimeFigureOut">
               <a:rPr lang="en-US" smtClean="0"/>
+              <a:t>6/9/2026</a:t>
             </a:fld>
             <a:endParaRPr lang="en-US" dirty="0"/>
           </a:p>
@@ -13113,6 +13105,7 @@
           <a:p>
             <a:fld id="{6D22F896-40B5-4ADD-8801-0D06FADFA095}" type="slidenum">
               <a:rPr lang="en-US" smtClean="0"/>
+              <a:t>‹#›</a:t>
             </a:fld>
             <a:endParaRPr lang="en-US" dirty="0"/>
           </a:p>
@@ -13260,7 +13253,6 @@
               <a:rPr lang="en-US"/>
               <a:t>Edit Master text styles</a:t>
             </a:r>
-            <a:endParaRPr lang="en-US"/>
           </a:p>
         </p:txBody>
       </p:sp>
@@ -13289,7 +13281,6 @@
               <a:rPr lang="en-US"/>
               <a:t>Edit Master text styles</a:t>
             </a:r>
-            <a:endParaRPr lang="en-US"/>
           </a:p>
           <a:p>
             <a:pPr lvl="1"/>
@@ -13297,7 +13288,6 @@
               <a:rPr lang="en-US"/>
               <a:t>Second level</a:t>
             </a:r>
-            <a:endParaRPr lang="en-US"/>
           </a:p>
           <a:p>
             <a:pPr lvl="2"/>
@@ -13305,7 +13295,6 @@
               <a:rPr lang="en-US"/>
               <a:t>Third level</a:t>
             </a:r>
-            <a:endParaRPr lang="en-US"/>
           </a:p>
           <a:p>
             <a:pPr lvl="3"/>
@@ -13313,7 +13302,6 @@
               <a:rPr lang="en-US"/>
               <a:t>Fourth level</a:t>
             </a:r>
-            <a:endParaRPr lang="en-US"/>
           </a:p>
           <a:p>
             <a:pPr lvl="4"/>
@@ -13386,7 +13374,6 @@
               <a:rPr lang="en-US"/>
               <a:t>Edit Master text styles</a:t>
             </a:r>
-            <a:endParaRPr lang="en-US"/>
           </a:p>
         </p:txBody>
       </p:sp>
@@ -13415,7 +13402,6 @@
               <a:rPr lang="en-US"/>
               <a:t>Edit Master text styles</a:t>
             </a:r>
-            <a:endParaRPr lang="en-US"/>
           </a:p>
           <a:p>
             <a:pPr lvl="1"/>
@@ -13423,7 +13409,6 @@
               <a:rPr lang="en-US"/>
               <a:t>Second level</a:t>
             </a:r>
-            <a:endParaRPr lang="en-US"/>
           </a:p>
           <a:p>
             <a:pPr lvl="2"/>
@@ -13431,7 +13416,6 @@
               <a:rPr lang="en-US"/>
               <a:t>Third level</a:t>
             </a:r>
-            <a:endParaRPr lang="en-US"/>
           </a:p>
           <a:p>
             <a:pPr lvl="3"/>
@@ -13439,7 +13423,6 @@
               <a:rPr lang="en-US"/>
               <a:t>Fourth level</a:t>
             </a:r>
-            <a:endParaRPr lang="en-US"/>
           </a:p>
           <a:p>
             <a:pPr lvl="4"/>
@@ -13468,6 +13451,7 @@
           <a:p>
             <a:fld id="{48A87A34-81AB-432B-8DAE-1953F412C126}" type="datetimeFigureOut">
               <a:rPr lang="en-US" smtClean="0"/>
+              <a:t>6/9/2026</a:t>
             </a:fld>
             <a:endParaRPr lang="en-US" dirty="0"/>
           </a:p>
@@ -13509,6 +13493,7 @@
           <a:p>
             <a:fld id="{6D22F896-40B5-4ADD-8801-0D06FADFA095}" type="slidenum">
               <a:rPr lang="en-US" smtClean="0"/>
+              <a:t>‹#›</a:t>
             </a:fld>
             <a:endParaRPr lang="en-US" dirty="0"/>
           </a:p>
@@ -13579,6 +13564,7 @@
           <a:p>
             <a:fld id="{48A87A34-81AB-432B-8DAE-1953F412C126}" type="datetimeFigureOut">
               <a:rPr lang="en-US" smtClean="0"/>
+              <a:t>6/9/2026</a:t>
             </a:fld>
             <a:endParaRPr lang="en-US" dirty="0"/>
           </a:p>
@@ -13620,6 +13606,7 @@
           <a:p>
             <a:fld id="{6D22F896-40B5-4ADD-8801-0D06FADFA095}" type="slidenum">
               <a:rPr lang="en-US" smtClean="0"/>
+              <a:t>‹#›</a:t>
             </a:fld>
             <a:endParaRPr lang="en-US" dirty="0"/>
           </a:p>
@@ -13667,6 +13654,7 @@
           <a:p>
             <a:fld id="{48A87A34-81AB-432B-8DAE-1953F412C126}" type="datetimeFigureOut">
               <a:rPr lang="en-US" smtClean="0"/>
+              <a:t>6/9/2026</a:t>
             </a:fld>
             <a:endParaRPr lang="en-US" dirty="0"/>
           </a:p>
@@ -13708,6 +13696,7 @@
           <a:p>
             <a:fld id="{6D22F896-40B5-4ADD-8801-0D06FADFA095}" type="slidenum">
               <a:rPr lang="en-US" smtClean="0"/>
+              <a:t>‹#›</a:t>
             </a:fld>
             <a:endParaRPr lang="en-US" dirty="0"/>
           </a:p>
@@ -13795,7 +13784,6 @@
               <a:rPr lang="en-US"/>
               <a:t>Edit Master text styles</a:t>
             </a:r>
-            <a:endParaRPr lang="en-US"/>
           </a:p>
           <a:p>
             <a:pPr lvl="1"/>
@@ -13803,7 +13791,6 @@
               <a:rPr lang="en-US"/>
               <a:t>Second level</a:t>
             </a:r>
-            <a:endParaRPr lang="en-US"/>
           </a:p>
           <a:p>
             <a:pPr lvl="2"/>
@@ -13811,7 +13798,6 @@
               <a:rPr lang="en-US"/>
               <a:t>Third level</a:t>
             </a:r>
-            <a:endParaRPr lang="en-US"/>
           </a:p>
           <a:p>
             <a:pPr lvl="3"/>
@@ -13819,7 +13805,6 @@
               <a:rPr lang="en-US"/>
               <a:t>Fourth level</a:t>
             </a:r>
-            <a:endParaRPr lang="en-US"/>
           </a:p>
           <a:p>
             <a:pPr lvl="4"/>
@@ -13917,7 +13902,6 @@
               <a:rPr lang="en-US"/>
               <a:t>Edit Master text styles</a:t>
             </a:r>
-            <a:endParaRPr lang="en-US"/>
           </a:p>
         </p:txBody>
       </p:sp>
@@ -13938,6 +13922,7 @@
           <a:p>
             <a:fld id="{48A87A34-81AB-432B-8DAE-1953F412C126}" type="datetimeFigureOut">
               <a:rPr lang="en-US" smtClean="0"/>
+              <a:t>6/9/2026</a:t>
             </a:fld>
             <a:endParaRPr lang="en-US" dirty="0"/>
           </a:p>
@@ -13979,6 +13964,7 @@
           <a:p>
             <a:fld id="{6D22F896-40B5-4ADD-8801-0D06FADFA095}" type="slidenum">
               <a:rPr lang="en-US" smtClean="0"/>
+              <a:t>‹#›</a:t>
             </a:fld>
             <a:endParaRPr lang="en-US" dirty="0"/>
           </a:p>
@@ -14192,7 +14178,6 @@
               <a:rPr lang="en-US"/>
               <a:t>Edit Master text styles</a:t>
             </a:r>
-            <a:endParaRPr lang="en-US"/>
           </a:p>
         </p:txBody>
       </p:sp>
@@ -14213,6 +14198,7 @@
           <a:p>
             <a:fld id="{48A87A34-81AB-432B-8DAE-1953F412C126}" type="datetimeFigureOut">
               <a:rPr lang="en-US" smtClean="0"/>
+              <a:t>6/9/2026</a:t>
             </a:fld>
             <a:endParaRPr lang="en-US" dirty="0"/>
           </a:p>
@@ -14254,6 +14240,7 @@
           <a:p>
             <a:fld id="{6D22F896-40B5-4ADD-8801-0D06FADFA095}" type="slidenum">
               <a:rPr lang="en-US" smtClean="0"/>
+              <a:t>‹#›</a:t>
             </a:fld>
             <a:endParaRPr lang="en-US" dirty="0"/>
           </a:p>
@@ -14273,7 +14260,7 @@
     <p:bg>
       <p:bgPr>
         <a:blipFill dpi="0" rotWithShape="1">
-          <a:blip r:embed="rId18">
+          <a:blip r:embed="rId19">
             <a:lum/>
           </a:blip>
           <a:srcRect/>
@@ -14361,7 +14348,6 @@
               <a:rPr lang="en-US"/>
               <a:t>Edit Master text styles</a:t>
             </a:r>
-            <a:endParaRPr lang="en-US"/>
           </a:p>
           <a:p>
             <a:pPr lvl="1"/>
@@ -14369,7 +14355,6 @@
               <a:rPr lang="en-US"/>
               <a:t>Second level</a:t>
             </a:r>
-            <a:endParaRPr lang="en-US"/>
           </a:p>
           <a:p>
             <a:pPr lvl="2"/>
@@ -14377,7 +14362,6 @@
               <a:rPr lang="en-US"/>
               <a:t>Third level</a:t>
             </a:r>
-            <a:endParaRPr lang="en-US"/>
           </a:p>
           <a:p>
             <a:pPr lvl="3"/>
@@ -14385,7 +14369,6 @@
               <a:rPr lang="en-US"/>
               <a:t>Fourth level</a:t>
             </a:r>
-            <a:endParaRPr lang="en-US"/>
           </a:p>
           <a:p>
             <a:pPr lvl="4"/>
@@ -14450,6 +14433,7 @@
           <a:p>
             <a:fld id="{48A87A34-81AB-432B-8DAE-1953F412C126}" type="datetimeFigureOut">
               <a:rPr lang="en-US" smtClean="0"/>
+              <a:t>6/9/2026</a:t>
             </a:fld>
             <a:endParaRPr lang="en-US" dirty="0"/>
           </a:p>
@@ -14563,6 +14547,7 @@
           <a:p>
             <a:fld id="{6D22F896-40B5-4ADD-8801-0D06FADFA095}" type="slidenum">
               <a:rPr lang="en-US" smtClean="0"/>
+              <a:t>‹#›</a:t>
             </a:fld>
             <a:endParaRPr lang="en-US" dirty="0"/>
           </a:p>
@@ -14994,7 +14979,7 @@
     <p:bg>
       <p:bgPr>
         <a:blipFill dpi="0" rotWithShape="1">
-          <a:blip r:embed="rId18">
+          <a:blip r:embed="rId19">
             <a:lum/>
           </a:blip>
           <a:srcRect/>
@@ -15082,7 +15067,6 @@
               <a:rPr lang="en-US"/>
               <a:t>Edit Master text styles</a:t>
             </a:r>
-            <a:endParaRPr lang="en-US"/>
           </a:p>
           <a:p>
             <a:pPr lvl="1"/>
@@ -15090,7 +15074,6 @@
               <a:rPr lang="en-US"/>
               <a:t>Second level</a:t>
             </a:r>
-            <a:endParaRPr lang="en-US"/>
           </a:p>
           <a:p>
             <a:pPr lvl="2"/>
@@ -15098,7 +15081,6 @@
               <a:rPr lang="en-US"/>
               <a:t>Third level</a:t>
             </a:r>
-            <a:endParaRPr lang="en-US"/>
           </a:p>
           <a:p>
             <a:pPr lvl="3"/>
@@ -15106,7 +15088,6 @@
               <a:rPr lang="en-US"/>
               <a:t>Fourth level</a:t>
             </a:r>
-            <a:endParaRPr lang="en-US"/>
           </a:p>
           <a:p>
             <a:pPr lvl="4"/>
@@ -15171,6 +15152,7 @@
           <a:p>
             <a:fld id="{48A87A34-81AB-432B-8DAE-1953F412C126}" type="datetimeFigureOut">
               <a:rPr lang="en-US" smtClean="0"/>
+              <a:t>6/9/2026</a:t>
             </a:fld>
             <a:endParaRPr lang="en-US" dirty="0"/>
           </a:p>
@@ -15284,6 +15266,7 @@
           <a:p>
             <a:fld id="{6D22F896-40B5-4ADD-8801-0D06FADFA095}" type="slidenum">
               <a:rPr lang="en-US" smtClean="0"/>
+              <a:t>‹#›</a:t>
             </a:fld>
             <a:endParaRPr lang="en-US" dirty="0"/>
           </a:p>
@@ -15821,7 +15804,6 @@
               <a:rPr lang="en-US" altLang="zh-CN" sz="1100" dirty="0"/>
               <a:t>2018</a:t>
             </a:r>
-            <a:endParaRPr lang="en-US" altLang="zh-CN" sz="1100" dirty="0"/>
           </a:p>
         </p:txBody>
       </p:sp>
@@ -15894,8 +15876,20 @@
                 <a:tableStyleId>{5C22544A-7EE6-4342-B048-85BDC9FD1C3A}</a:tableStyleId>
               </a:tblPr>
               <a:tblGrid>
-                <a:gridCol w="3886200"/>
-                <a:gridCol w="3886200"/>
+                <a:gridCol w="3886200">
+                  <a:extLst>
+                    <a:ext uri="{9D8B030D-6E8A-4147-A177-3AD203B41FA5}">
+                      <a16:colId xmlns:a16="http://schemas.microsoft.com/office/drawing/2014/main" val="20000"/>
+                    </a:ext>
+                  </a:extLst>
+                </a:gridCol>
+                <a:gridCol w="3886200">
+                  <a:extLst>
+                    <a:ext uri="{9D8B030D-6E8A-4147-A177-3AD203B41FA5}">
+                      <a16:colId xmlns:a16="http://schemas.microsoft.com/office/drawing/2014/main" val="20001"/>
+                    </a:ext>
+                  </a:extLst>
+                </a:gridCol>
               </a:tblGrid>
               <a:tr h="567809">
                 <a:tc>
@@ -15911,7 +15905,6 @@
                         <a:rPr lang="en-US" sz="2400" dirty="0"/>
                         <a:t>. Manager</a:t>
                       </a:r>
-                      <a:endParaRPr lang="en-US" sz="2400" dirty="0"/>
                     </a:p>
                   </a:txBody>
                   <a:tcPr/>
@@ -15929,11 +15922,15 @@
                         <a:rPr lang="en-US" sz="2400" dirty="0"/>
                         <a:t>. Manager</a:t>
                       </a:r>
-                      <a:endParaRPr lang="en-US" sz="2400" dirty="0"/>
                     </a:p>
                   </a:txBody>
                   <a:tcPr/>
                 </a:tc>
+                <a:extLst>
+                  <a:ext uri="{0D108BD9-81ED-4DB2-BD59-A6C34878D82A}">
+                    <a16:rowId xmlns:a16="http://schemas.microsoft.com/office/drawing/2014/main" val="10000"/>
+                  </a:ext>
+                </a:extLst>
               </a:tr>
               <a:tr h="980053">
                 <a:tc>
@@ -15945,7 +15942,6 @@
                         <a:rPr lang="en-US" sz="2400" dirty="0"/>
                         <a:t>Leads a team of subordinates to work on a project</a:t>
                       </a:r>
-                      <a:endParaRPr lang="en-US" sz="2400" dirty="0"/>
                     </a:p>
                   </a:txBody>
                   <a:tcPr/>
@@ -15968,6 +15964,11 @@
                   </a:txBody>
                   <a:tcPr/>
                 </a:tc>
+                <a:extLst>
+                  <a:ext uri="{0D108BD9-81ED-4DB2-BD59-A6C34878D82A}">
+                    <a16:rowId xmlns:a16="http://schemas.microsoft.com/office/drawing/2014/main" val="10001"/>
+                  </a:ext>
+                </a:extLst>
               </a:tr>
               <a:tr h="1400076">
                 <a:tc>
@@ -15987,7 +15988,6 @@
                         <a:rPr lang="en-US" sz="2400" dirty="0"/>
                         <a:t>the single person representing the project to stake holders and customer</a:t>
                       </a:r>
-                      <a:endParaRPr lang="en-US" sz="2400" dirty="0"/>
                     </a:p>
                   </a:txBody>
                   <a:tcPr/>
@@ -16001,11 +16001,15 @@
                         <a:rPr lang="en-US" sz="2400" dirty="0"/>
                         <a:t>many PMs working inside a team</a:t>
                       </a:r>
-                      <a:endParaRPr lang="en-US" sz="2400" dirty="0"/>
                     </a:p>
                   </a:txBody>
                   <a:tcPr/>
                 </a:tc>
+                <a:extLst>
+                  <a:ext uri="{0D108BD9-81ED-4DB2-BD59-A6C34878D82A}">
+                    <a16:rowId xmlns:a16="http://schemas.microsoft.com/office/drawing/2014/main" val="10002"/>
+                  </a:ext>
+                </a:extLst>
               </a:tr>
               <a:tr h="980053">
                 <a:tc>
@@ -16017,7 +16021,6 @@
                         <a:rPr lang="en-US" sz="2400" dirty="0"/>
                         <a:t>Has final say about features and other decisions</a:t>
                       </a:r>
-                      <a:endParaRPr lang="en-US" sz="2400" dirty="0"/>
                     </a:p>
                   </a:txBody>
                   <a:tcPr/>
@@ -16040,6 +16043,11 @@
                   </a:txBody>
                   <a:tcPr/>
                 </a:tc>
+                <a:extLst>
+                  <a:ext uri="{0D108BD9-81ED-4DB2-BD59-A6C34878D82A}">
+                    <a16:rowId xmlns:a16="http://schemas.microsoft.com/office/drawing/2014/main" val="10003"/>
+                  </a:ext>
+                </a:extLst>
               </a:tr>
               <a:tr h="567809">
                 <a:tc>
@@ -16069,11 +16077,15 @@
                         <a:rPr lang="en-US" sz="2400" dirty="0"/>
                         <a:t>Focus only on technical issues</a:t>
                       </a:r>
-                      <a:endParaRPr lang="en-US" sz="2400" dirty="0"/>
                     </a:p>
                   </a:txBody>
                   <a:tcPr/>
                 </a:tc>
+                <a:extLst>
+                  <a:ext uri="{0D108BD9-81ED-4DB2-BD59-A6C34878D82A}">
+                    <a16:rowId xmlns:a16="http://schemas.microsoft.com/office/drawing/2014/main" val="10004"/>
+                  </a:ext>
+                </a:extLst>
               </a:tr>
             </a:tbl>
           </a:graphicData>
@@ -16222,7 +16234,7 @@
           </p:nvPr>
         </p:nvPicPr>
         <p:blipFill>
-          <a:blip r:embed="rId1"/>
+          <a:blip r:embed="rId2"/>
           <a:stretch>
             <a:fillRect/>
           </a:stretch>
@@ -16312,7 +16324,6 @@
               <a:rPr lang="en-US" altLang="zh-CN" sz="2400" dirty="0"/>
               <a:t> / Skills:</a:t>
             </a:r>
-            <a:endParaRPr lang="en-US" altLang="zh-CN" sz="2400" dirty="0"/>
           </a:p>
           <a:p>
             <a:pPr lvl="1"/>
@@ -16320,7 +16331,6 @@
               <a:rPr lang="en-US" altLang="zh-CN" sz="2000" dirty="0"/>
               <a:t>Interpersonal awareness</a:t>
             </a:r>
-            <a:endParaRPr lang="en-US" altLang="zh-CN" sz="2000" dirty="0"/>
           </a:p>
           <a:p>
             <a:pPr lvl="1"/>
@@ -16328,7 +16338,6 @@
               <a:rPr lang="en-US" altLang="zh-CN" sz="2000" dirty="0"/>
               <a:t>Communication skills</a:t>
             </a:r>
-            <a:endParaRPr lang="en-US" altLang="zh-CN" sz="2000" dirty="0"/>
           </a:p>
           <a:p>
             <a:pPr lvl="1"/>
@@ -16336,7 +16345,6 @@
               <a:rPr lang="en-US" altLang="zh-CN" sz="2000" dirty="0"/>
               <a:t>Skills to deal with conflict</a:t>
             </a:r>
-            <a:endParaRPr lang="en-US" altLang="zh-CN" sz="2000" dirty="0"/>
           </a:p>
           <a:p>
             <a:pPr lvl="1"/>
@@ -16344,7 +16352,6 @@
               <a:rPr lang="en-US" altLang="zh-CN" sz="2000" dirty="0"/>
               <a:t>Design skills </a:t>
             </a:r>
-            <a:endParaRPr lang="en-US" altLang="zh-CN" sz="2000" dirty="0"/>
           </a:p>
           <a:p>
             <a:r>
@@ -16363,7 +16370,6 @@
               <a:rPr lang="en-US" altLang="zh-CN" sz="1600" dirty="0"/>
               <a:t>PM</a:t>
             </a:r>
-            <a:endParaRPr lang="en-US" altLang="zh-CN" sz="1600" dirty="0"/>
           </a:p>
           <a:p>
             <a:pPr lvl="1"/>
@@ -16459,7 +16465,6 @@
               <a:rPr lang="en-US" altLang="zh-CN" dirty="0"/>
               <a:t>Time/Resource/Feature</a:t>
             </a:r>
-            <a:endParaRPr lang="en-US" altLang="zh-CN" dirty="0"/>
           </a:p>
           <a:p>
             <a:pPr>
@@ -16930,7 +16935,6 @@
               <a:rPr lang="en-US" dirty="0"/>
               <a:t>Another view</a:t>
             </a:r>
-            <a:endParaRPr lang="en-US" dirty="0"/>
           </a:p>
         </p:txBody>
       </p:sp>
@@ -16945,7 +16949,7 @@
           </p:nvPr>
         </p:nvPicPr>
         <p:blipFill>
-          <a:blip r:embed="rId1">
+          <a:blip r:embed="rId2">
             <a:extLst>
               <a:ext uri="{28A0092B-C50C-407E-A947-70E740481C1C}">
                 <a14:useLocalDpi xmlns:a14="http://schemas.microsoft.com/office/drawing/2010/main" val="0"/>
@@ -17519,7 +17523,6 @@
               <a:rPr lang="en-US" altLang="zh-CN" sz="2000" dirty="0"/>
               <a:t>1:3 ~ 1:6</a:t>
             </a:r>
-            <a:endParaRPr lang="en-US" altLang="zh-CN" sz="2000" dirty="0"/>
           </a:p>
           <a:p>
             <a:pPr>
@@ -17591,7 +17594,6 @@
               <a:rPr lang="en-US" altLang="zh-CN" sz="2400" dirty="0"/>
               <a:t>PM</a:t>
             </a:r>
-            <a:endParaRPr lang="en-US" altLang="zh-CN" sz="2400" dirty="0"/>
           </a:p>
           <a:p>
             <a:pPr>
@@ -17635,7 +17637,6 @@
               <a:rPr lang="en-US" altLang="zh-CN" sz="2400" dirty="0"/>
               <a:t>PM</a:t>
             </a:r>
-            <a:endParaRPr lang="en-US" altLang="zh-CN" sz="2400" dirty="0"/>
           </a:p>
           <a:p>
             <a:pPr>
@@ -17671,7 +17672,6 @@
               <a:rPr lang="en-US" altLang="zh-CN" sz="2400" dirty="0"/>
               <a:t>PM</a:t>
             </a:r>
-            <a:endParaRPr lang="en-US" altLang="zh-CN" sz="2400" dirty="0"/>
           </a:p>
           <a:p>
             <a:pPr>
@@ -17767,7 +17767,6 @@
               <a:rPr lang="en-US" altLang="zh-CN" sz="2400" dirty="0"/>
               <a:t>PM </a:t>
             </a:r>
-            <a:endParaRPr lang="en-US" altLang="zh-CN" sz="2400" dirty="0"/>
           </a:p>
         </p:txBody>
       </p:sp>
@@ -18426,7 +18425,6 @@
               <a:rPr lang="en-US" dirty="0"/>
               <a:t>PM Requirement</a:t>
             </a:r>
-            <a:endParaRPr lang="en-US" dirty="0"/>
           </a:p>
         </p:txBody>
       </p:sp>
@@ -18460,7 +18458,6 @@
               <a:rPr lang="en-US" sz="2800" dirty="0"/>
               <a:t>includes results related to conviction, building consensus, leading change, and acquiring talent</a:t>
             </a:r>
-            <a:endParaRPr lang="en-US" sz="2800" dirty="0"/>
           </a:p>
           <a:p>
             <a:r>
@@ -18478,7 +18475,6 @@
               <a:rPr lang="en-US" sz="2800" dirty="0"/>
               <a:t>includes results related to: understanding and advocating for the customer, listening and responding, building relationships, negotiating agreements, representing Microsoft, and the customer support system</a:t>
             </a:r>
-            <a:endParaRPr lang="en-US" sz="2800" dirty="0"/>
           </a:p>
           <a:p>
             <a:endParaRPr lang="en-US" dirty="0"/>
@@ -18570,7 +18566,6 @@
               <a:rPr lang="en-US" altLang="zh-CN" dirty="0"/>
               <a:t>PM: Program Manager </a:t>
             </a:r>
-            <a:endParaRPr lang="en-US" altLang="zh-CN" dirty="0"/>
           </a:p>
           <a:p>
             <a:pPr eaLnBrk="1" hangingPunct="1"/>
@@ -18578,7 +18573,6 @@
               <a:rPr lang="en-US" altLang="zh-CN" dirty="0"/>
               <a:t>History of PM</a:t>
             </a:r>
-            <a:endParaRPr lang="en-US" altLang="zh-CN" dirty="0"/>
           </a:p>
           <a:p>
             <a:pPr eaLnBrk="1" hangingPunct="1"/>
@@ -18586,7 +18580,6 @@
               <a:rPr lang="en-US" altLang="zh-CN" dirty="0"/>
               <a:t>Role of PM</a:t>
             </a:r>
-            <a:endParaRPr lang="en-US" altLang="zh-CN" dirty="0"/>
           </a:p>
           <a:p>
             <a:pPr eaLnBrk="1" hangingPunct="1"/>
@@ -18594,7 +18587,6 @@
               <a:rPr lang="en-US" altLang="zh-CN" dirty="0"/>
               <a:t>Impact of PM</a:t>
             </a:r>
-            <a:endParaRPr lang="en-US" altLang="zh-CN" dirty="0"/>
           </a:p>
           <a:p>
             <a:pPr eaLnBrk="1" hangingPunct="1"/>
@@ -18702,7 +18694,6 @@
               <a:rPr lang="en-US" dirty="0"/>
               <a:t> the product vision into elegant designs that will ultimately turn into products used by customers.</a:t>
             </a:r>
-            <a:endParaRPr lang="en-US" dirty="0"/>
           </a:p>
           <a:p>
             <a:pPr>
@@ -18720,7 +18711,6 @@
               <a:rPr lang="en-US" dirty="0"/>
               <a:t> </a:t>
             </a:r>
-            <a:endParaRPr lang="en-US" dirty="0"/>
           </a:p>
           <a:p>
             <a:pPr>
@@ -18734,7 +18724,6 @@
               <a:rPr lang="en-US" dirty="0"/>
               <a:t> throughout the product lifecycle, you’ll have the chance to see your design through to completion. You’ll also work directly with other key team members including SDEs and SDETs.</a:t>
             </a:r>
-            <a:endParaRPr lang="en-US" dirty="0"/>
           </a:p>
           <a:p>
             <a:pPr>
@@ -18835,7 +18824,6 @@
               <a:rPr lang="en-US" dirty="0"/>
               <a:t>, so your passion for anticipating customer needs and creating outside-the-box solutions for them.</a:t>
             </a:r>
-            <a:endParaRPr lang="en-US" dirty="0"/>
           </a:p>
           <a:p>
             <a:pPr>
@@ -18881,7 +18869,6 @@
               <a:rPr lang="en-US" dirty="0"/>
               <a:t>.</a:t>
             </a:r>
-            <a:endParaRPr lang="en-US" dirty="0"/>
           </a:p>
           <a:p>
             <a:pPr>
@@ -19053,7 +19040,6 @@
               <a:rPr lang="en-US" altLang="zh-CN" dirty="0"/>
               <a:t>App?</a:t>
             </a:r>
-            <a:endParaRPr lang="en-US" altLang="zh-CN" dirty="0"/>
           </a:p>
         </p:txBody>
       </p:sp>
@@ -19180,7 +19166,6 @@
               <a:rPr lang="en-US" altLang="zh-CN" dirty="0"/>
               <a:t>App</a:t>
             </a:r>
-            <a:endParaRPr lang="en-US" altLang="zh-CN" dirty="0"/>
           </a:p>
           <a:p>
             <a:pPr lvl="2"/>
@@ -19192,7 +19177,6 @@
               <a:rPr lang="en-US" altLang="zh-CN" dirty="0"/>
               <a:t>App</a:t>
             </a:r>
-            <a:endParaRPr lang="en-US" altLang="zh-CN" dirty="0"/>
           </a:p>
           <a:p>
             <a:pPr lvl="2"/>
@@ -19204,7 +19188,6 @@
               <a:rPr lang="en-US" altLang="zh-CN" dirty="0"/>
               <a:t>App</a:t>
             </a:r>
-            <a:endParaRPr lang="en-US" altLang="zh-CN" dirty="0"/>
           </a:p>
           <a:p>
             <a:r>
@@ -19336,14 +19319,12 @@
               <a:rPr lang="en-US" altLang="zh-CN" dirty="0"/>
               <a:t>, 3-5 test, </a:t>
             </a:r>
-            <a:endParaRPr lang="en-US" altLang="zh-CN" dirty="0"/>
           </a:p>
           <a:p>
             <a:r>
               <a:rPr lang="en-US" altLang="zh-CN" dirty="0"/>
               <a:t>A feature team (crew) owns an end-to-end scenario</a:t>
             </a:r>
-            <a:endParaRPr lang="en-US" altLang="zh-CN" dirty="0"/>
           </a:p>
           <a:p>
             <a:r>
@@ -19365,7 +19346,6 @@
               <a:rPr lang="en-US" altLang="zh-CN" dirty="0"/>
               <a:t>?</a:t>
             </a:r>
-            <a:endParaRPr lang="en-US" altLang="zh-CN" dirty="0"/>
           </a:p>
           <a:p>
             <a:pPr lvl="1"/>
@@ -19373,7 +19353,6 @@
               <a:rPr lang="en-US" altLang="zh-CN" dirty="0"/>
               <a:t>Work as a peer</a:t>
             </a:r>
-            <a:endParaRPr lang="en-US" altLang="zh-CN" dirty="0"/>
           </a:p>
           <a:p>
             <a:pPr lvl="1"/>
@@ -19381,7 +19360,6 @@
               <a:rPr lang="en-US" altLang="zh-CN" dirty="0"/>
               <a:t>Earn their respect</a:t>
             </a:r>
-            <a:endParaRPr lang="en-US" altLang="zh-CN" dirty="0"/>
           </a:p>
           <a:p>
             <a:pPr lvl="1"/>
@@ -19389,7 +19367,6 @@
               <a:rPr lang="en-US" dirty="0"/>
               <a:t>To demonstrate intelligence, open-mindedness, and fairness in any debates that come up.</a:t>
             </a:r>
-            <a:endParaRPr lang="en-US" dirty="0"/>
           </a:p>
         </p:txBody>
       </p:sp>
@@ -20170,7 +20147,6 @@
               <a:rPr lang="en-US" altLang="zh-CN" dirty="0"/>
               <a:t>With trust from team members,  a PM can </a:t>
             </a:r>
-            <a:endParaRPr lang="en-US" altLang="zh-CN" dirty="0"/>
           </a:p>
           <a:p>
             <a:pPr lvl="1"/>
@@ -20178,7 +20154,6 @@
               <a:rPr lang="en-US" altLang="zh-CN" dirty="0"/>
               <a:t>Own the process </a:t>
             </a:r>
-            <a:endParaRPr lang="en-US" altLang="zh-CN" dirty="0"/>
           </a:p>
           <a:p>
             <a:pPr lvl="1"/>
@@ -20186,7 +20161,6 @@
               <a:rPr lang="en-US" altLang="zh-CN" dirty="0"/>
               <a:t>Drive meetings, status</a:t>
             </a:r>
-            <a:endParaRPr lang="en-US" altLang="zh-CN" dirty="0"/>
           </a:p>
           <a:p>
             <a:pPr lvl="1"/>
@@ -20194,7 +20168,6 @@
               <a:rPr lang="en-US" altLang="zh-CN" dirty="0"/>
               <a:t>Present status to other people</a:t>
             </a:r>
-            <a:endParaRPr lang="en-US" altLang="zh-CN" dirty="0"/>
           </a:p>
           <a:p>
             <a:pPr lvl="1"/>
@@ -20202,14 +20175,12 @@
               <a:rPr lang="en-US" altLang="zh-CN" dirty="0"/>
               <a:t>Make great impact to a product,  without writing one line of code, or execute a single test case</a:t>
             </a:r>
-            <a:endParaRPr lang="en-US" altLang="zh-CN" dirty="0"/>
           </a:p>
           <a:p>
             <a:r>
               <a:rPr lang="en-US" altLang="zh-CN" dirty="0"/>
               <a:t>Without the trust of team members</a:t>
             </a:r>
-            <a:endParaRPr lang="en-US" altLang="zh-CN" dirty="0"/>
           </a:p>
           <a:p>
             <a:pPr lvl="1"/>
@@ -20217,7 +20188,6 @@
               <a:rPr lang="en-US" altLang="zh-CN" dirty="0"/>
               <a:t>A PM will waste people’s time in meetings, </a:t>
             </a:r>
-            <a:endParaRPr lang="en-US" altLang="zh-CN" dirty="0"/>
           </a:p>
           <a:p>
             <a:pPr lvl="1"/>
@@ -20225,7 +20195,6 @@
               <a:rPr lang="en-US" altLang="zh-CN" dirty="0"/>
               <a:t>Make infertile effort in uniting the team</a:t>
             </a:r>
-            <a:endParaRPr lang="en-US" altLang="zh-CN" dirty="0"/>
           </a:p>
           <a:p>
             <a:pPr lvl="1"/>
@@ -20233,7 +20202,6 @@
               <a:rPr lang="en-US" altLang="zh-CN" dirty="0"/>
               <a:t>Represent the team poorly to stakeholder and customers</a:t>
             </a:r>
-            <a:endParaRPr lang="en-US" altLang="zh-CN" dirty="0"/>
           </a:p>
           <a:p>
             <a:pPr lvl="1"/>
@@ -20819,56 +20787,48 @@
               <a:rPr lang="en-US" b="1" dirty="0"/>
               <a:t>Drive the whole team to the finish line</a:t>
             </a:r>
-            <a:endParaRPr lang="en-US" b="1" dirty="0"/>
           </a:p>
           <a:p>
             <a:r>
               <a:rPr lang="en-US" dirty="0"/>
               <a:t>Work on requirement of your project</a:t>
             </a:r>
-            <a:endParaRPr lang="en-US" dirty="0"/>
           </a:p>
           <a:p>
             <a:r>
               <a:rPr lang="en-US" dirty="0"/>
               <a:t>Deliver good persona/scenario/spec, w/ team members</a:t>
             </a:r>
-            <a:endParaRPr lang="en-US" dirty="0"/>
           </a:p>
           <a:p>
             <a:r>
               <a:rPr lang="en-US" dirty="0"/>
               <a:t>Build trust within the team</a:t>
             </a:r>
-            <a:endParaRPr lang="en-US" dirty="0"/>
           </a:p>
           <a:p>
             <a:r>
               <a:rPr lang="en-US" dirty="0"/>
               <a:t>Keep the balance between Time/Feature/Resource</a:t>
             </a:r>
-            <a:endParaRPr lang="en-US" dirty="0"/>
           </a:p>
           <a:p>
             <a:r>
               <a:rPr lang="en-US" dirty="0"/>
               <a:t>Make sure the project hit various milestones (code complete, beta release, final release)</a:t>
             </a:r>
-            <a:endParaRPr lang="en-US" dirty="0"/>
           </a:p>
           <a:p>
             <a:r>
               <a:rPr lang="en-US" dirty="0"/>
               <a:t>Deliver presentation/demo/blog/etc, become the “point of contact” of your team</a:t>
             </a:r>
-            <a:endParaRPr lang="en-US" dirty="0"/>
           </a:p>
           <a:p>
             <a:r>
               <a:rPr lang="en-US" dirty="0"/>
               <a:t>Drive the process of reviews, evaluation, postmortem</a:t>
             </a:r>
-            <a:endParaRPr lang="en-US" dirty="0"/>
           </a:p>
           <a:p>
             <a:endParaRPr lang="en-US" dirty="0"/>
@@ -21451,7 +21411,7 @@
           </p:nvPr>
         </p:nvPicPr>
         <p:blipFill>
-          <a:blip r:embed="rId1">
+          <a:blip r:embed="rId2">
             <a:extLst>
               <a:ext uri="{28A0092B-C50C-407E-A947-70E740481C1C}">
                 <a14:useLocalDpi xmlns:a14="http://schemas.microsoft.com/office/drawing/2010/main" val="0"/>
@@ -21726,7 +21686,6 @@
               <a:rPr lang="en-US" dirty="0"/>
               <a:t>PM in a college software team</a:t>
             </a:r>
-            <a:endParaRPr lang="en-US" dirty="0"/>
           </a:p>
         </p:txBody>
       </p:sp>
@@ -21757,14 +21716,12 @@
               <a:rPr lang="zh-CN" altLang="en-US" sz="2000" dirty="0"/>
               <a:t>的任务。</a:t>
             </a:r>
-            <a:endParaRPr lang="zh-CN" altLang="en-US" sz="2000" dirty="0"/>
           </a:p>
           <a:p>
             <a:r>
               <a:rPr lang="zh-CN" altLang="en-US" sz="2000" dirty="0"/>
               <a:t>数据分析，有些任务为什么会比预期多花很多时间？是员工的技术问题，还是管理层有不切实际的期望和压力，或者我们有另外的技术因素没有考虑？</a:t>
             </a:r>
-            <a:endParaRPr lang="zh-CN" altLang="en-US" sz="2000" dirty="0"/>
           </a:p>
           <a:p>
             <a:r>
@@ -21783,7 +21740,6 @@
               <a:rPr lang="zh-CN" altLang="en-US" sz="2000" dirty="0"/>
               <a:t>例如突然发现还没有考虑项目的国际化。</a:t>
             </a:r>
-            <a:endParaRPr lang="zh-CN" altLang="en-US" sz="2000" dirty="0"/>
           </a:p>
           <a:p>
             <a:r>
@@ -21836,7 +21792,6 @@
               <a:rPr lang="zh-CN" altLang="en-US" sz="2000" b="1" dirty="0"/>
               <a:t>要时不时抬起头来看看。</a:t>
             </a:r>
-            <a:endParaRPr lang="zh-CN" altLang="en-US" sz="2000" b="1" dirty="0"/>
           </a:p>
           <a:p>
             <a:endParaRPr lang="en-US" sz="2000" dirty="0"/>
@@ -22443,7 +22398,6 @@
               <a:rPr lang="en-US" dirty="0"/>
               <a:t>?</a:t>
             </a:r>
-            <a:endParaRPr lang="en-US" dirty="0"/>
           </a:p>
         </p:txBody>
       </p:sp>
@@ -22472,7 +22426,6 @@
               <a:rPr lang="en-US" sz="3600" dirty="0"/>
               <a:t>:</a:t>
             </a:r>
-            <a:endParaRPr lang="en-US" sz="3600" dirty="0"/>
           </a:p>
           <a:p>
             <a:pPr lvl="1"/>
@@ -22480,7 +22433,6 @@
               <a:rPr lang="en-US" sz="3600" i="1" dirty="0"/>
               <a:t>“A possible event that affects the project negatively if happens” </a:t>
             </a:r>
-            <a:endParaRPr lang="en-US" sz="3600" i="1" dirty="0"/>
           </a:p>
           <a:p>
             <a:pPr lvl="1"/>
@@ -22583,9 +22535,6 @@
               </a:rPr>
               <a:t>Goals</a:t>
             </a:r>
-            <a:endParaRPr lang="en-US" altLang="zh-CN" dirty="0">
-              <a:latin typeface="+mn-ea"/>
-            </a:endParaRPr>
           </a:p>
           <a:p>
             <a:pPr lvl="1"/>
@@ -22612,9 +22561,6 @@
               </a:rPr>
               <a:t> –</a:t>
             </a:r>
-            <a:endParaRPr lang="en-US" altLang="zh-CN" dirty="0">
-              <a:latin typeface="+mn-ea"/>
-            </a:endParaRPr>
           </a:p>
           <a:p>
             <a:pPr lvl="1"/>
@@ -22642,9 +22588,6 @@
               </a:rPr>
               <a:t>Risk statement – </a:t>
             </a:r>
-            <a:endParaRPr lang="en-US" altLang="zh-CN" dirty="0">
-              <a:latin typeface="+mn-ea"/>
-            </a:endParaRPr>
           </a:p>
           <a:p>
             <a:pPr lvl="1"/>
@@ -22660,9 +22603,6 @@
               </a:rPr>
               <a:t> </a:t>
             </a:r>
-            <a:endParaRPr lang="en-US" altLang="zh-CN" dirty="0">
-              <a:latin typeface="+mn-ea"/>
-            </a:endParaRPr>
           </a:p>
         </p:txBody>
       </p:sp>
@@ -22743,8 +22683,20 @@
             <a:tbl>
               <a:tblPr/>
               <a:tblGrid>
-                <a:gridCol w="1371600"/>
-                <a:gridCol w="6858000"/>
+                <a:gridCol w="1371600">
+                  <a:extLst>
+                    <a:ext uri="{9D8B030D-6E8A-4147-A177-3AD203B41FA5}">
+                      <a16:colId xmlns:a16="http://schemas.microsoft.com/office/drawing/2014/main" val="20000"/>
+                    </a:ext>
+                  </a:extLst>
+                </a:gridCol>
+                <a:gridCol w="6858000">
+                  <a:extLst>
+                    <a:ext uri="{9D8B030D-6E8A-4147-A177-3AD203B41FA5}">
+                      <a16:colId xmlns:a16="http://schemas.microsoft.com/office/drawing/2014/main" val="20001"/>
+                    </a:ext>
+                  </a:extLst>
+                </a:gridCol>
               </a:tblGrid>
               <a:tr h="830140">
                 <a:tc>
@@ -22894,17 +22846,6 @@
                         </a:rPr>
                         <a:t> Sources</a:t>
                       </a:r>
-                      <a:endParaRPr kumimoji="0" lang="en-US" altLang="zh-CN" sz="2000" b="1" i="0" u="none" strike="noStrike" cap="none" normalizeH="0" baseline="0" dirty="0">
-                        <a:ln>
-                          <a:noFill/>
-                        </a:ln>
-                        <a:solidFill>
-                          <a:schemeClr val="tx2"/>
-                        </a:solidFill>
-                        <a:effectLst/>
-                        <a:latin typeface="+mn-ea"/>
-                        <a:ea typeface="+mn-ea"/>
-                      </a:endParaRPr>
                     </a:p>
                   </a:txBody>
                   <a:tcPr anchor="ctr" horzOverflow="overflow">
@@ -22955,6 +22896,11 @@
                     </a:solidFill>
                   </a:tcPr>
                 </a:tc>
+                <a:extLst>
+                  <a:ext uri="{0D108BD9-81ED-4DB2-BD59-A6C34878D82A}">
+                    <a16:rowId xmlns:a16="http://schemas.microsoft.com/office/drawing/2014/main" val="10000"/>
+                  </a:ext>
+                </a:extLst>
               </a:tr>
               <a:tr h="791995">
                 <a:tc>
@@ -23147,6 +23093,11 @@
                     <a:noFill/>
                   </a:tcPr>
                 </a:tc>
+                <a:extLst>
+                  <a:ext uri="{0D108BD9-81ED-4DB2-BD59-A6C34878D82A}">
+                    <a16:rowId xmlns:a16="http://schemas.microsoft.com/office/drawing/2014/main" val="10001"/>
+                  </a:ext>
+                </a:extLst>
               </a:tr>
               <a:tr h="1024507">
                 <a:tc>
@@ -23339,6 +23290,11 @@
                     <a:noFill/>
                   </a:tcPr>
                 </a:tc>
+                <a:extLst>
+                  <a:ext uri="{0D108BD9-81ED-4DB2-BD59-A6C34878D82A}">
+                    <a16:rowId xmlns:a16="http://schemas.microsoft.com/office/drawing/2014/main" val="10002"/>
+                  </a:ext>
+                </a:extLst>
               </a:tr>
               <a:tr h="717155">
                 <a:tc>
@@ -23531,6 +23487,11 @@
                     <a:noFill/>
                   </a:tcPr>
                 </a:tc>
+                <a:extLst>
+                  <a:ext uri="{0D108BD9-81ED-4DB2-BD59-A6C34878D82A}">
+                    <a16:rowId xmlns:a16="http://schemas.microsoft.com/office/drawing/2014/main" val="10003"/>
+                  </a:ext>
+                </a:extLst>
               </a:tr>
               <a:tr h="598603">
                 <a:tc>
@@ -23723,6 +23684,11 @@
                     <a:noFill/>
                   </a:tcPr>
                 </a:tc>
+                <a:extLst>
+                  <a:ext uri="{0D108BD9-81ED-4DB2-BD59-A6C34878D82A}">
+                    <a16:rowId xmlns:a16="http://schemas.microsoft.com/office/drawing/2014/main" val="10004"/>
+                  </a:ext>
+                </a:extLst>
               </a:tr>
             </a:tbl>
           </a:graphicData>
@@ -23823,7 +23789,6 @@
               <a:rPr lang="en-US" altLang="zh-CN" dirty="0"/>
               <a:t>?</a:t>
             </a:r>
-            <a:endParaRPr lang="en-US" altLang="zh-CN" dirty="0"/>
           </a:p>
           <a:p>
             <a:pPr lvl="1"/>
@@ -23831,7 +23796,6 @@
               <a:rPr lang="en-US" altLang="zh-CN" dirty="0"/>
               <a:t>People</a:t>
             </a:r>
-            <a:endParaRPr lang="en-US" altLang="zh-CN" dirty="0"/>
           </a:p>
           <a:p>
             <a:pPr lvl="1"/>
@@ -23839,7 +23803,6 @@
               <a:rPr lang="en-US" altLang="zh-CN" dirty="0"/>
               <a:t>Process</a:t>
             </a:r>
-            <a:endParaRPr lang="en-US" altLang="zh-CN" dirty="0"/>
           </a:p>
           <a:p>
             <a:pPr lvl="1"/>
@@ -23847,7 +23810,6 @@
               <a:rPr lang="en-US" altLang="zh-CN" dirty="0"/>
               <a:t>Technology</a:t>
             </a:r>
-            <a:endParaRPr lang="en-US" altLang="zh-CN" dirty="0"/>
           </a:p>
           <a:p>
             <a:pPr lvl="1"/>
@@ -23855,7 +23817,6 @@
               <a:rPr lang="en-US" altLang="zh-CN" dirty="0"/>
               <a:t>Environment</a:t>
             </a:r>
-            <a:endParaRPr lang="en-US" altLang="zh-CN" dirty="0"/>
           </a:p>
           <a:p>
             <a:r>
@@ -23969,9 +23930,6 @@
               </a:rPr>
               <a:t>Risk analysis &amp; prioritization </a:t>
             </a:r>
-            <a:endParaRPr lang="en-US" altLang="zh-CN" dirty="0">
-              <a:ea typeface="宋体" panose="02010600030101010101" pitchFamily="2" charset="-122"/>
-            </a:endParaRPr>
           </a:p>
           <a:p>
             <a:pPr lvl="1"/>
@@ -24060,9 +24018,6 @@
               </a:rPr>
               <a:t>Goals</a:t>
             </a:r>
-            <a:endParaRPr lang="en-US" altLang="zh-CN" dirty="0">
-              <a:ea typeface="宋体" panose="02010600030101010101" pitchFamily="2" charset="-122"/>
-            </a:endParaRPr>
           </a:p>
           <a:p>
             <a:pPr lvl="1"/>
@@ -24078,9 +24033,6 @@
               </a:rPr>
               <a:t> </a:t>
             </a:r>
-            <a:endParaRPr lang="en-US" altLang="zh-CN" dirty="0">
-              <a:ea typeface="宋体" panose="02010600030101010101" pitchFamily="2" charset="-122"/>
-            </a:endParaRPr>
           </a:p>
           <a:p>
             <a:pPr lvl="1"/>
@@ -24101,9 +24053,6 @@
               </a:rPr>
               <a:t>Planning </a:t>
             </a:r>
-            <a:endParaRPr lang="en-US" altLang="zh-CN" dirty="0">
-              <a:ea typeface="宋体" panose="02010600030101010101" pitchFamily="2" charset="-122"/>
-            </a:endParaRPr>
           </a:p>
           <a:p>
             <a:pPr lvl="1"/>
@@ -24202,7 +24151,6 @@
               <a:rPr lang="en-US" dirty="0"/>
               <a:t> </a:t>
             </a:r>
-            <a:endParaRPr lang="en-US" dirty="0"/>
           </a:p>
           <a:p>
             <a:pPr lvl="1"/>
@@ -24222,7 +24170,6 @@
               <a:rPr lang="en-US" dirty="0"/>
               <a:t> </a:t>
             </a:r>
-            <a:endParaRPr lang="en-US" dirty="0"/>
           </a:p>
           <a:p>
             <a:pPr lvl="1"/>
@@ -24253,7 +24200,6 @@
               <a:rPr lang="en-US" dirty="0"/>
               <a:t>”</a:t>
             </a:r>
-            <a:endParaRPr lang="en-US" dirty="0"/>
           </a:p>
           <a:p>
             <a:r>
@@ -24282,7 +24228,6 @@
               <a:rPr lang="en-US" dirty="0"/>
               <a:t>. </a:t>
             </a:r>
-            <a:endParaRPr lang="en-US" dirty="0"/>
           </a:p>
         </p:txBody>
       </p:sp>
@@ -24357,9 +24302,6 @@
               </a:rPr>
               <a:t>Research </a:t>
             </a:r>
-            <a:endParaRPr lang="en-US" altLang="zh-CN" sz="2400" dirty="0">
-              <a:ea typeface="宋体" panose="02010600030101010101" pitchFamily="2" charset="-122"/>
-            </a:endParaRPr>
           </a:p>
           <a:p>
             <a:pPr lvl="1"/>
@@ -24369,9 +24311,6 @@
               </a:rPr>
               <a:t>Can we acquire more information about the risk before taking action?</a:t>
             </a:r>
-            <a:endParaRPr lang="en-US" altLang="zh-CN" sz="2000" dirty="0">
-              <a:ea typeface="宋体" panose="02010600030101010101" pitchFamily="2" charset="-122"/>
-            </a:endParaRPr>
           </a:p>
           <a:p>
             <a:pPr lvl="1"/>
@@ -24393,9 +24332,6 @@
               </a:rPr>
               <a:t>”</a:t>
             </a:r>
-            <a:endParaRPr lang="en-US" altLang="zh-CN" sz="2000" dirty="0">
-              <a:ea typeface="宋体" panose="02010600030101010101" pitchFamily="2" charset="-122"/>
-            </a:endParaRPr>
           </a:p>
           <a:p>
             <a:pPr lvl="1"/>
@@ -24420,7 +24356,7 @@
             <a:r>
               <a:rPr lang="en-US" altLang="zh-CN" sz="2000" dirty="0">
                 <a:ea typeface="宋体" panose="02010600030101010101" pitchFamily="2" charset="-122"/>
-                <a:hlinkClick r:id="rId1"/>
+                <a:hlinkClick r:id="rId2"/>
               </a:rPr>
               <a:t>link</a:t>
             </a:r>
@@ -24430,9 +24366,6 @@
               </a:rPr>
               <a:t>)</a:t>
             </a:r>
-            <a:endParaRPr lang="en-US" altLang="zh-CN" sz="2000" dirty="0">
-              <a:ea typeface="宋体" panose="02010600030101010101" pitchFamily="2" charset="-122"/>
-            </a:endParaRPr>
           </a:p>
           <a:p>
             <a:r>
@@ -24441,9 +24374,6 @@
               </a:rPr>
               <a:t>Accept </a:t>
             </a:r>
-            <a:endParaRPr lang="en-US" altLang="zh-CN" sz="2400" dirty="0">
-              <a:ea typeface="宋体" panose="02010600030101010101" pitchFamily="2" charset="-122"/>
-            </a:endParaRPr>
           </a:p>
           <a:p>
             <a:pPr lvl="1"/>
@@ -24453,9 +24383,6 @@
               </a:rPr>
               <a:t>Can we live with the consequences if risk were to occur?</a:t>
             </a:r>
-            <a:endParaRPr lang="en-US" altLang="zh-CN" sz="2000" dirty="0">
-              <a:ea typeface="宋体" panose="02010600030101010101" pitchFamily="2" charset="-122"/>
-            </a:endParaRPr>
           </a:p>
           <a:p>
             <a:pPr lvl="1"/>
@@ -24477,9 +24404,6 @@
               </a:rPr>
               <a:t>?”</a:t>
             </a:r>
-            <a:endParaRPr lang="en-US" altLang="zh-CN" sz="2000" dirty="0">
-              <a:ea typeface="宋体" panose="02010600030101010101" pitchFamily="2" charset="-122"/>
-            </a:endParaRPr>
           </a:p>
           <a:p>
             <a:r>
@@ -24488,9 +24412,6 @@
               </a:rPr>
               <a:t>Avoid </a:t>
             </a:r>
-            <a:endParaRPr lang="en-US" altLang="zh-CN" sz="2400" dirty="0">
-              <a:ea typeface="宋体" panose="02010600030101010101" pitchFamily="2" charset="-122"/>
-            </a:endParaRPr>
           </a:p>
           <a:p>
             <a:pPr lvl="1"/>
@@ -24500,9 +24421,6 @@
               </a:rPr>
               <a:t> Can we avoid the risk by changing project scope?</a:t>
             </a:r>
-            <a:endParaRPr lang="en-US" altLang="zh-CN" sz="2000" dirty="0">
-              <a:ea typeface="宋体" panose="02010600030101010101" pitchFamily="2" charset="-122"/>
-            </a:endParaRPr>
           </a:p>
           <a:p>
             <a:pPr lvl="1"/>
@@ -24512,9 +24430,6 @@
               </a:rPr>
               <a:t>(your example)</a:t>
             </a:r>
-            <a:endParaRPr lang="en-US" altLang="zh-CN" sz="2000" dirty="0">
-              <a:ea typeface="宋体" panose="02010600030101010101" pitchFamily="2" charset="-122"/>
-            </a:endParaRPr>
           </a:p>
           <a:p>
             <a:r>
@@ -24523,9 +24438,6 @@
               </a:rPr>
               <a:t>Transfer </a:t>
             </a:r>
-            <a:endParaRPr lang="en-US" altLang="zh-CN" sz="2400" dirty="0">
-              <a:ea typeface="宋体" panose="02010600030101010101" pitchFamily="2" charset="-122"/>
-            </a:endParaRPr>
           </a:p>
           <a:p>
             <a:pPr lvl="1"/>
@@ -24535,9 +24447,6 @@
               </a:rPr>
               <a:t>Can we transfer risk to other projects, teams, organizations, or individuals?</a:t>
             </a:r>
-            <a:endParaRPr lang="en-US" altLang="zh-CN" sz="2000" dirty="0">
-              <a:ea typeface="宋体" panose="02010600030101010101" pitchFamily="2" charset="-122"/>
-            </a:endParaRPr>
           </a:p>
           <a:p>
             <a:r>
@@ -24546,9 +24455,6 @@
               </a:rPr>
               <a:t>Mitigate</a:t>
             </a:r>
-            <a:endParaRPr lang="en-US" altLang="zh-CN" sz="2400" dirty="0">
-              <a:ea typeface="宋体" panose="02010600030101010101" pitchFamily="2" charset="-122"/>
-            </a:endParaRPr>
           </a:p>
           <a:p>
             <a:pPr lvl="1"/>
@@ -24582,9 +24488,6 @@
               </a:rPr>
               <a:t>) of the risk? </a:t>
             </a:r>
-            <a:endParaRPr lang="en-US" altLang="zh-CN" sz="2000" dirty="0">
-              <a:ea typeface="宋体" panose="02010600030101010101" pitchFamily="2" charset="-122"/>
-            </a:endParaRPr>
           </a:p>
           <a:p>
             <a:r>
@@ -24593,9 +24496,6 @@
               </a:rPr>
               <a:t>Plan contingency </a:t>
             </a:r>
-            <a:endParaRPr lang="en-US" altLang="zh-CN" sz="2400" dirty="0">
-              <a:ea typeface="宋体" panose="02010600030101010101" pitchFamily="2" charset="-122"/>
-            </a:endParaRPr>
           </a:p>
           <a:p>
             <a:pPr lvl="1"/>
@@ -24605,9 +24505,6 @@
               </a:rPr>
               <a:t> Can the impact be reduced through a planned reaction?</a:t>
             </a:r>
-            <a:endParaRPr lang="en-US" altLang="zh-CN" sz="2000" dirty="0">
-              <a:ea typeface="宋体" panose="02010600030101010101" pitchFamily="2" charset="-122"/>
-            </a:endParaRPr>
           </a:p>
         </p:txBody>
       </p:sp>
@@ -24717,7 +24614,6 @@
               <a:rPr lang="en-US" altLang="zh-CN" dirty="0"/>
               <a:t>…… </a:t>
             </a:r>
-            <a:endParaRPr lang="en-US" altLang="zh-CN" dirty="0"/>
           </a:p>
           <a:p>
             <a:pPr>
@@ -24741,7 +24637,6 @@
               <a:rPr lang="zh-CN" altLang="en-US" dirty="0"/>
               <a:t>个月后，监管机构会严格 控制视频播放软件和机顶盒的资质，我们的项目能否避开这一领域？</a:t>
             </a:r>
-            <a:endParaRPr lang="zh-CN" altLang="en-US" dirty="0"/>
           </a:p>
           <a:p>
             <a:pPr>
@@ -24789,7 +24684,6 @@
               <a:rPr lang="zh-CN" altLang="en-US" dirty="0"/>
               <a:t>：下半年的预算很可能会缩减，我们不能支持所有的开发和测试人员， 但是团队的目标不会有大的变化。这时候我们要准备一两套预案。</a:t>
             </a:r>
-            <a:endParaRPr lang="zh-CN" altLang="en-US" dirty="0"/>
           </a:p>
         </p:txBody>
       </p:sp>
@@ -24978,7 +24872,6 @@
               <a:rPr lang="zh-CN" altLang="en-US" dirty="0"/>
               <a:t> 对一个或多个产品或产品线负责。核心要求是，根据市场和 用户需求，协调各部门资源，正确地把握产品定位和方向，解决用户的痛点，持续优化产品。</a:t>
             </a:r>
-            <a:endParaRPr lang="zh-CN" altLang="en-US" dirty="0"/>
           </a:p>
           <a:p>
             <a:r>
@@ -25001,7 +24894,6 @@
               <a:rPr lang="zh-CN" altLang="en-US" dirty="0"/>
               <a:t>与产品经理分开单列。 他们对项目流程负责，即项目从立项到上线按时完成。正确地协调团队内部外部，调配各部门 资源和时间，有效进行风险管理，保证一个项目顺利 按计划结项。</a:t>
             </a:r>
-            <a:endParaRPr lang="zh-CN" altLang="en-US" dirty="0"/>
           </a:p>
           <a:p>
             <a:r>
@@ -25076,7 +24968,6 @@
               <a:rPr lang="en-US" dirty="0"/>
               <a:t> (1)</a:t>
             </a:r>
-            <a:endParaRPr lang="en-US" dirty="0"/>
           </a:p>
         </p:txBody>
       </p:sp>
@@ -25124,7 +25015,6 @@
               <a:rPr lang="en-US" dirty="0"/>
               <a:t>.</a:t>
             </a:r>
-            <a:endParaRPr lang="en-US" dirty="0"/>
           </a:p>
           <a:p>
             <a:r>
@@ -25139,7 +25029,6 @@
               <a:rPr lang="en-US" dirty="0"/>
               <a:t> </a:t>
             </a:r>
-            <a:endParaRPr lang="en-US" dirty="0"/>
           </a:p>
           <a:p>
             <a:pPr lvl="1"/>
@@ -25175,7 +25064,6 @@
               <a:rPr lang="en-US" dirty="0"/>
               <a:t>. </a:t>
             </a:r>
-            <a:endParaRPr lang="en-US" dirty="0"/>
           </a:p>
           <a:p>
             <a:pPr lvl="1"/>
@@ -25187,7 +25075,6 @@
               <a:rPr lang="en-US" dirty="0"/>
               <a:t>.</a:t>
             </a:r>
-            <a:endParaRPr lang="en-US" dirty="0"/>
           </a:p>
           <a:p>
             <a:pPr lvl="1"/>
@@ -25247,7 +25134,6 @@
               <a:rPr lang="en-US" dirty="0"/>
               <a:t> (2)</a:t>
             </a:r>
-            <a:endParaRPr lang="en-US" dirty="0"/>
           </a:p>
         </p:txBody>
       </p:sp>
@@ -25295,7 +25181,6 @@
               <a:rPr lang="en-US" dirty="0"/>
               <a:t>.</a:t>
             </a:r>
-            <a:endParaRPr lang="en-US" dirty="0"/>
           </a:p>
           <a:p>
             <a:r>
@@ -25306,7 +25191,6 @@
               <a:rPr lang="en-US" dirty="0"/>
               <a:t> </a:t>
             </a:r>
-            <a:endParaRPr lang="en-US" dirty="0"/>
           </a:p>
           <a:p>
             <a:pPr lvl="1"/>
@@ -25350,7 +25234,6 @@
               <a:rPr lang="en-US" dirty="0"/>
               <a:t>. </a:t>
             </a:r>
-            <a:endParaRPr lang="en-US" dirty="0"/>
           </a:p>
           <a:p>
             <a:endParaRPr lang="en-US" dirty="0"/>
@@ -25405,7 +25288,6 @@
               <a:rPr lang="en-US" dirty="0"/>
               <a:t> (3)</a:t>
             </a:r>
-            <a:endParaRPr lang="en-US" dirty="0"/>
           </a:p>
         </p:txBody>
       </p:sp>
@@ -25446,7 +25328,6 @@
               <a:rPr lang="en-US" b="1" dirty="0"/>
               <a:t>)</a:t>
             </a:r>
-            <a:endParaRPr lang="en-US" b="1" dirty="0"/>
           </a:p>
           <a:p>
             <a:r>
@@ -25465,7 +25346,6 @@
               <a:rPr lang="en-US" dirty="0"/>
               <a:t>.</a:t>
             </a:r>
-            <a:endParaRPr lang="en-US" dirty="0"/>
           </a:p>
           <a:p>
             <a:r>
@@ -25480,7 +25360,6 @@
               <a:rPr lang="en-US" dirty="0"/>
               <a:t> </a:t>
             </a:r>
-            <a:endParaRPr lang="en-US" dirty="0"/>
           </a:p>
           <a:p>
             <a:pPr lvl="1"/>
@@ -25500,7 +25379,6 @@
               <a:rPr lang="en-US" dirty="0"/>
               <a:t> </a:t>
             </a:r>
-            <a:endParaRPr lang="en-US" dirty="0"/>
           </a:p>
           <a:p>
             <a:pPr lvl="1"/>
@@ -25512,7 +25390,6 @@
               <a:rPr lang="en-US" dirty="0"/>
               <a:t>. </a:t>
             </a:r>
-            <a:endParaRPr lang="en-US" dirty="0"/>
           </a:p>
           <a:p>
             <a:pPr lvl="1"/>
@@ -25575,7 +25452,6 @@
               <a:rPr lang="en-US" dirty="0"/>
               <a:t> (4)</a:t>
             </a:r>
-            <a:endParaRPr lang="en-US" dirty="0"/>
           </a:p>
         </p:txBody>
       </p:sp>
@@ -25635,7 +25511,6 @@
               <a:rPr lang="en-US" dirty="0"/>
               <a:t>.</a:t>
             </a:r>
-            <a:endParaRPr lang="en-US" dirty="0"/>
           </a:p>
           <a:p>
             <a:r>
@@ -25650,7 +25525,6 @@
               <a:rPr lang="en-US" dirty="0"/>
               <a:t> </a:t>
             </a:r>
-            <a:endParaRPr lang="en-US" dirty="0"/>
           </a:p>
           <a:p>
             <a:pPr lvl="1"/>
@@ -25670,7 +25544,6 @@
               <a:rPr lang="en-US" dirty="0"/>
               <a:t>. </a:t>
             </a:r>
-            <a:endParaRPr lang="en-US" dirty="0"/>
           </a:p>
           <a:p>
             <a:pPr lvl="1"/>
@@ -25682,7 +25555,6 @@
               <a:rPr lang="en-US" dirty="0"/>
               <a:t>. </a:t>
             </a:r>
-            <a:endParaRPr lang="en-US" dirty="0"/>
           </a:p>
           <a:p>
             <a:pPr lvl="1"/>
@@ -25753,7 +25625,6 @@
               <a:rPr lang="en-US" dirty="0"/>
               <a:t> (5)</a:t>
             </a:r>
-            <a:endParaRPr lang="en-US" dirty="0"/>
           </a:p>
         </p:txBody>
       </p:sp>
@@ -25801,7 +25672,6 @@
               <a:rPr lang="en-US" dirty="0"/>
               <a:t>.</a:t>
             </a:r>
-            <a:endParaRPr lang="en-US" dirty="0"/>
           </a:p>
           <a:p>
             <a:r>
@@ -25816,7 +25686,6 @@
               <a:rPr lang="en-US" dirty="0"/>
               <a:t> </a:t>
             </a:r>
-            <a:endParaRPr lang="en-US" dirty="0"/>
           </a:p>
           <a:p>
             <a:pPr lvl="1"/>
@@ -25844,7 +25713,6 @@
               <a:rPr lang="en-US" dirty="0"/>
               <a:t>. </a:t>
             </a:r>
-            <a:endParaRPr lang="en-US" dirty="0"/>
           </a:p>
           <a:p>
             <a:pPr lvl="1"/>
@@ -25986,7 +25854,6 @@
               <a:rPr lang="en-US" altLang="zh-CN" dirty="0"/>
               <a:t>…… </a:t>
             </a:r>
-            <a:endParaRPr lang="en-US" altLang="zh-CN" dirty="0"/>
           </a:p>
           <a:p>
             <a:pPr>
@@ -26010,7 +25877,6 @@
               <a:rPr lang="zh-CN" altLang="en-US" dirty="0"/>
               <a:t>个月后，监管机构会严格 控制视频播放软件和机顶盒的资质，我们的项目能否避开这一领域？</a:t>
             </a:r>
-            <a:endParaRPr lang="zh-CN" altLang="en-US" dirty="0"/>
           </a:p>
           <a:p>
             <a:pPr>
@@ -26058,7 +25924,6 @@
               <a:rPr lang="zh-CN" altLang="en-US" dirty="0"/>
               <a:t>下半年的预算很可能会缩减，我们不能支持所有的开发和测试人员， 但是团队的目标不会有大的变化。这时候我们要准备一两套预案。</a:t>
             </a:r>
-            <a:endParaRPr lang="zh-CN" altLang="en-US" dirty="0"/>
           </a:p>
         </p:txBody>
       </p:sp>
@@ -26391,14 +26256,14 @@
         <p:nvPicPr>
           <p:cNvPr id="7" name="内容占位符 6"/>
           <p:cNvPicPr>
-            <a:picLocks noChangeAspect="1"/>
+            <a:picLocks noGrp="1" noChangeAspect="1"/>
           </p:cNvPicPr>
           <p:nvPr>
             <p:ph idx="1"/>
           </p:nvPr>
         </p:nvPicPr>
         <p:blipFill>
-          <a:blip r:embed="rId1"/>
+          <a:blip r:embed="rId3"/>
           <a:stretch>
             <a:fillRect/>
           </a:stretch>
@@ -26422,7 +26287,7 @@
           <p:nvPr/>
         </p:nvPicPr>
         <p:blipFill>
-          <a:blip r:embed="rId2"/>
+          <a:blip r:embed="rId4"/>
           <a:stretch>
             <a:fillRect/>
           </a:stretch>
@@ -26442,13 +26307,6 @@
   <p:clrMapOvr>
     <a:masterClrMapping/>
   </p:clrMapOvr>
-  <p:timing>
-    <p:tnLst>
-      <p:par>
-        <p:cTn id="1" dur="indefinite" restart="never" nodeType="tmRoot"/>
-      </p:par>
-    </p:tnLst>
-  </p:timing>
 </p:sld>
 </file>
 
@@ -26458,7 +26316,7 @@
     <p:bg>
       <p:bgPr>
         <a:blipFill dpi="0" rotWithShape="1">
-          <a:blip r:embed="rId1">
+          <a:blip r:embed="rId2">
             <a:lum/>
           </a:blip>
           <a:srcRect/>
@@ -26537,7 +26395,7 @@
         </p:xfrm>
         <a:graphic>
           <a:graphicData uri="http://schemas.openxmlformats.org/drawingml/2006/diagram">
-            <dgm:relIds xmlns:dgm="http://schemas.openxmlformats.org/drawingml/2006/diagram" xmlns:r="http://schemas.openxmlformats.org/officeDocument/2006/relationships" r:dm="rId2" r:lo="rId3" r:qs="rId4" r:cs="rId5"/>
+            <dgm:relIds xmlns:dgm="http://schemas.openxmlformats.org/drawingml/2006/diagram" xmlns:r="http://schemas.openxmlformats.org/officeDocument/2006/relationships" r:dm="rId3" r:lo="rId4" r:qs="rId5" r:cs="rId6"/>
           </a:graphicData>
         </a:graphic>
       </p:graphicFrame>
@@ -26613,7 +26471,6 @@
               <a:rPr lang="en-US" altLang="zh-CN" dirty="0"/>
               <a:t>As the team grows, communication becomes a problem</a:t>
             </a:r>
-            <a:endParaRPr lang="en-US" altLang="zh-CN" dirty="0"/>
           </a:p>
           <a:p>
             <a:pPr lvl="1"/>
@@ -26621,7 +26478,6 @@
               <a:rPr lang="en-US" altLang="zh-CN" dirty="0"/>
               <a:t>O(n^2)</a:t>
             </a:r>
-            <a:endParaRPr lang="en-US" altLang="zh-CN" dirty="0"/>
           </a:p>
           <a:p>
             <a:pPr lvl="1"/>
@@ -26629,7 +26485,6 @@
               <a:rPr lang="en-US" altLang="zh-CN" dirty="0"/>
               <a:t>Keep adding programmers into a </a:t>
             </a:r>
-            <a:endParaRPr lang="en-US" altLang="zh-CN" dirty="0"/>
           </a:p>
           <a:p>
             <a:pPr lvl="1">
@@ -26639,14 +26494,12 @@
               <a:rPr lang="en-US" altLang="zh-CN" dirty="0"/>
               <a:t>team is NOT going to work</a:t>
             </a:r>
-            <a:endParaRPr lang="en-US" altLang="zh-CN" dirty="0"/>
           </a:p>
           <a:p>
             <a:r>
               <a:rPr lang="en-US" altLang="zh-CN" dirty="0"/>
               <a:t>Charles Simonyi has an idea</a:t>
             </a:r>
-            <a:endParaRPr lang="en-US" altLang="zh-CN" dirty="0"/>
           </a:p>
           <a:p>
             <a:pPr>
@@ -26665,7 +26518,7 @@
           <p:nvPr/>
         </p:nvPicPr>
         <p:blipFill>
-          <a:blip r:embed="rId1" cstate="print"/>
+          <a:blip r:embed="rId3" cstate="print"/>
           <a:srcRect/>
           <a:stretch>
             <a:fillRect/>
@@ -26834,7 +26687,6 @@
               <a:rPr lang="en-US" altLang="zh-CN" dirty="0"/>
               <a:t>…</a:t>
             </a:r>
-            <a:endParaRPr lang="en-US" altLang="zh-CN" dirty="0"/>
           </a:p>
           <a:p>
             <a:pPr lvl="1"/>
@@ -26846,7 +26698,6 @@
               <a:rPr lang="en-US" altLang="zh-CN" dirty="0"/>
               <a:t>…</a:t>
             </a:r>
-            <a:endParaRPr lang="en-US" altLang="zh-CN" dirty="0"/>
           </a:p>
           <a:p>
             <a:pPr lvl="1"/>
@@ -26866,7 +26717,6 @@
               <a:rPr lang="en-US" altLang="zh-CN" dirty="0"/>
               <a:t>…</a:t>
             </a:r>
-            <a:endParaRPr lang="en-US" altLang="zh-CN" dirty="0"/>
           </a:p>
           <a:p>
             <a:pPr lvl="1"/>
@@ -26878,7 +26728,6 @@
               <a:rPr lang="en-US" altLang="zh-CN" dirty="0"/>
               <a:t>…</a:t>
             </a:r>
-            <a:endParaRPr lang="en-US" altLang="zh-CN" dirty="0"/>
           </a:p>
           <a:p>
             <a:pPr lvl="1"/>
@@ -26890,7 +26739,6 @@
               <a:rPr lang="en-US" altLang="zh-CN" dirty="0"/>
               <a:t>…</a:t>
             </a:r>
-            <a:endParaRPr lang="en-US" altLang="zh-CN" dirty="0"/>
           </a:p>
           <a:p>
             <a:pPr lvl="1"/>
@@ -26950,7 +26798,6 @@
               <a:rPr lang="zh-CN" altLang="en-US" dirty="0"/>
               <a:t>按点子数量多少来排序</a:t>
             </a:r>
-            <a:endParaRPr lang="zh-CN" altLang="en-US" dirty="0"/>
           </a:p>
         </p:txBody>
       </p:sp>
@@ -28497,7 +28344,6 @@
               <a:rPr lang="en-US" altLang="zh-CN" dirty="0"/>
               <a:t>…”</a:t>
             </a:r>
-            <a:endParaRPr lang="en-US" altLang="zh-CN" dirty="0"/>
           </a:p>
           <a:p>
             <a:endParaRPr lang="en-US" altLang="zh-CN" dirty="0"/>
@@ -28600,20 +28446,6 @@
               </a:rPr>
               <a:t>?</a:t>
             </a:r>
-            <a:endParaRPr kumimoji="0" lang="en-US" altLang="zh-CN" sz="1800" b="0" i="0" u="none" strike="noStrike" kern="1200" cap="none" spc="0" normalizeH="0" baseline="0" noProof="0" dirty="0">
-              <a:ln>
-                <a:noFill/>
-              </a:ln>
-              <a:solidFill>
-                <a:prstClr val="white"/>
-              </a:solidFill>
-              <a:effectLst/>
-              <a:uLnTx/>
-              <a:uFillTx/>
-              <a:latin typeface="Calibri" panose="020F0502020204030204"/>
-              <a:ea typeface="微软雅黑" panose="020B0503020204020204" charset="-122"/>
-              <a:cs typeface="+mn-cs"/>
-            </a:endParaRPr>
           </a:p>
           <a:p>
             <a:pPr marL="0" marR="0" lvl="0" indent="0" algn="l" defTabSz="457200" rtl="0" eaLnBrk="1" fontAlgn="auto" latinLnBrk="0" hangingPunct="1">
@@ -28837,27 +28669,6 @@
               </a:rPr>
               <a:t>不通畅</a:t>
             </a:r>
-            <a:endParaRPr lang="en-US" altLang="zh-CN" dirty="0">
-              <a:solidFill>
-                <a:srgbClr val="FF0000"/>
-              </a:solidFill>
-            </a:endParaRPr>
-          </a:p>
-          <a:p>
-            <a:pPr lvl="1"/>
-            <a:r>
-              <a:rPr lang="en-US" altLang="zh-CN" dirty="0">
-                <a:hlinkClick r:id="rId1"/>
-              </a:rPr>
-              <a:t>It's Not About The Nail - YouTube</a:t>
-            </a:r>
-            <a:endParaRPr lang="zh-CN" altLang="en-US" dirty="0">
-              <a:solidFill>
-                <a:srgbClr val="FF0000"/>
-              </a:solidFill>
-            </a:endParaRPr>
-          </a:p>
-          <a:p>
             <a:endParaRPr lang="en-US" altLang="zh-CN" dirty="0"/>
           </a:p>
           <a:p>
@@ -28870,40 +28681,13 @@
           <a:p>
             <a:r>
               <a:rPr lang="zh-CN" altLang="en-US" dirty="0"/>
-              <a:t>让思路发展</a:t>
+              <a:t>让</a:t>
+            </a:r>
+            <a:r>
+              <a:rPr lang="zh-CN" altLang="en-US"/>
+              <a:t>思路发展： 看附录中的例子</a:t>
             </a:r>
             <a:endParaRPr lang="en-US" altLang="zh-CN" dirty="0"/>
-          </a:p>
-          <a:p>
-            <a:r>
-              <a:rPr lang="zh-CN" altLang="en-US" dirty="0">
-                <a:hlinkClick r:id="rId2"/>
-              </a:rPr>
-              <a:t>例子</a:t>
-            </a:r>
-            <a:r>
-              <a:rPr lang="en-US" altLang="zh-CN" dirty="0">
-                <a:hlinkClick r:id="rId2"/>
-              </a:rPr>
-              <a:t>1</a:t>
-            </a:r>
-            <a:r>
-              <a:rPr lang="zh-CN" altLang="en-US" dirty="0"/>
-              <a:t>， </a:t>
-            </a:r>
-            <a:r>
-              <a:rPr lang="zh-CN" altLang="en-US" dirty="0">
-                <a:hlinkClick r:id="rId3"/>
-              </a:rPr>
-              <a:t>例子</a:t>
-            </a:r>
-            <a:r>
-              <a:rPr lang="en-US" altLang="zh-CN" dirty="0">
-                <a:hlinkClick r:id="rId3"/>
-              </a:rPr>
-              <a:t>2</a:t>
-            </a:r>
-            <a:endParaRPr lang="en-US" dirty="0"/>
           </a:p>
         </p:txBody>
       </p:sp>
@@ -29410,7 +29194,7 @@
     <p:bg>
       <p:bgPr>
         <a:blipFill dpi="0" rotWithShape="1">
-          <a:blip r:embed="rId1">
+          <a:blip r:embed="rId2">
             <a:lum/>
           </a:blip>
           <a:srcRect/>
@@ -29755,7 +29539,7 @@
           <p:nvPr/>
         </p:nvPicPr>
         <p:blipFill>
-          <a:blip r:embed="rId2"/>
+          <a:blip r:embed="rId3"/>
           <a:stretch>
             <a:fillRect/>
           </a:stretch>
@@ -29814,7 +29598,6 @@
               <a:rPr lang="en-US" dirty="0"/>
               <a:t>Exercise</a:t>
             </a:r>
-            <a:endParaRPr lang="en-US" dirty="0"/>
           </a:p>
         </p:txBody>
       </p:sp>
@@ -29885,14 +29668,12 @@
               <a:rPr lang="en-US" dirty="0"/>
               <a:t>? </a:t>
             </a:r>
-            <a:endParaRPr lang="en-US" dirty="0"/>
           </a:p>
           <a:p>
             <a:r>
               <a:rPr lang="en-US" dirty="0"/>
               <a:t>  </a:t>
             </a:r>
-            <a:endParaRPr lang="en-US" dirty="0"/>
           </a:p>
           <a:p>
             <a:pPr marL="0" indent="0">
@@ -30017,7 +29798,6 @@
               <a:rPr lang="en-US" dirty="0"/>
               <a:t>"</a:t>
             </a:r>
-            <a:endParaRPr lang="en-US" dirty="0"/>
           </a:p>
           <a:p>
             <a:pPr lvl="0"/>
@@ -30087,7 +29867,6 @@
               <a:rPr lang="en-US" dirty="0"/>
               <a:t>Exercise</a:t>
             </a:r>
-            <a:endParaRPr lang="en-US" dirty="0"/>
           </a:p>
         </p:txBody>
       </p:sp>
@@ -30126,7 +29905,6 @@
               <a:rPr lang="en-US" altLang="zh-CN" dirty="0"/>
               <a:t>UX</a:t>
             </a:r>
-            <a:endParaRPr lang="en-US" altLang="zh-CN" dirty="0"/>
           </a:p>
           <a:p>
             <a:pPr lvl="1"/>
@@ -30221,7 +29999,6 @@
               <a:rPr lang="en-US" altLang="zh-CN" dirty="0"/>
               <a:t>)</a:t>
             </a:r>
-            <a:endParaRPr lang="en-US" altLang="zh-CN" dirty="0"/>
           </a:p>
           <a:p>
             <a:pPr lvl="1"/>
@@ -30312,21 +30089,18 @@
               <a:rPr lang="en-US" altLang="zh-CN" dirty="0"/>
               <a:t>History of PM</a:t>
             </a:r>
-            <a:endParaRPr lang="en-US" altLang="zh-CN" dirty="0"/>
           </a:p>
           <a:p>
             <a:r>
               <a:rPr lang="en-US" altLang="zh-CN" dirty="0"/>
               <a:t>Role of PM</a:t>
             </a:r>
-            <a:endParaRPr lang="en-US" altLang="zh-CN" dirty="0"/>
           </a:p>
           <a:p>
             <a:r>
               <a:rPr lang="en-US" altLang="zh-CN" dirty="0"/>
               <a:t>Impact of PM</a:t>
             </a:r>
-            <a:endParaRPr lang="en-US" altLang="zh-CN" dirty="0"/>
           </a:p>
           <a:p>
             <a:endParaRPr lang="en-US" dirty="0"/>
@@ -30336,14 +30110,12 @@
               <a:rPr lang="en-US" altLang="zh-CN" dirty="0"/>
               <a:t>Q&amp;A</a:t>
             </a:r>
-            <a:endParaRPr lang="en-US" altLang="zh-CN" dirty="0"/>
           </a:p>
           <a:p>
             <a:r>
               <a:rPr lang="en-US" altLang="zh-CN" dirty="0"/>
               <a:t>Book for PM:</a:t>
             </a:r>
-            <a:endParaRPr lang="en-US" altLang="zh-CN" dirty="0"/>
           </a:p>
           <a:p>
             <a:pPr lvl="1"/>
@@ -30351,7 +30123,6 @@
               <a:rPr lang="en-US" altLang="zh-CN" dirty="0"/>
               <a:t>The Art of Project Management</a:t>
             </a:r>
-            <a:endParaRPr lang="en-US" altLang="zh-CN" dirty="0"/>
           </a:p>
           <a:p>
             <a:pPr lvl="1"/>
@@ -30359,7 +30130,6 @@
               <a:rPr lang="en-US" altLang="zh-CN" dirty="0"/>
               <a:t>The Power of Persuasion</a:t>
             </a:r>
-            <a:endParaRPr lang="en-US" altLang="zh-CN" dirty="0"/>
           </a:p>
           <a:p>
             <a:pPr lvl="1"/>
@@ -30452,7 +30222,6 @@
               <a:rPr lang="en-US" altLang="zh-CN" dirty="0"/>
               <a:t>Program Manager</a:t>
             </a:r>
-            <a:endParaRPr lang="en-US" altLang="zh-CN" dirty="0"/>
           </a:p>
           <a:p>
             <a:pPr lvl="1"/>
@@ -30460,7 +30229,6 @@
               <a:rPr lang="en-US" altLang="zh-CN" dirty="0"/>
               <a:t>Meta Programmer vs. Individual Contributor</a:t>
             </a:r>
-            <a:endParaRPr lang="en-US" altLang="zh-CN" dirty="0"/>
           </a:p>
           <a:p>
             <a:r>
@@ -30479,7 +30247,6 @@
               <a:rPr lang="en-US" altLang="zh-CN" dirty="0"/>
               <a:t>Write high level code</a:t>
             </a:r>
-            <a:endParaRPr lang="en-US" altLang="zh-CN" dirty="0"/>
           </a:p>
           <a:p>
             <a:r>
@@ -30498,7 +30265,6 @@
               <a:rPr lang="en-US" altLang="zh-CN" dirty="0"/>
               <a:t>Write detail implementation code</a:t>
             </a:r>
-            <a:endParaRPr lang="en-US" altLang="zh-CN" dirty="0"/>
           </a:p>
           <a:p>
             <a:pPr lvl="1"/>
@@ -30506,14 +30272,12 @@
               <a:rPr lang="en-US" altLang="zh-CN" dirty="0"/>
               <a:t>Works for a PM</a:t>
             </a:r>
-            <a:endParaRPr lang="en-US" altLang="zh-CN" dirty="0"/>
           </a:p>
           <a:p>
             <a:r>
               <a:rPr lang="en-US" altLang="zh-CN" dirty="0"/>
               <a:t>“programmer’s apprentice”  - similar idea</a:t>
             </a:r>
-            <a:endParaRPr lang="en-US" altLang="zh-CN" dirty="0"/>
           </a:p>
           <a:p>
             <a:pPr>
@@ -31113,7 +30877,7 @@
           <a:p>
             <a:r>
               <a:rPr lang="en-US" dirty="0">
-                <a:hlinkClick r:id="rId1"/>
+                <a:hlinkClick r:id="rId2"/>
               </a:rPr>
               <a:t>http://www.cnblogs.com/xinz/p/3855189.html</a:t>
             </a:r>
@@ -31197,7 +30961,6 @@
               <a:rPr lang="zh-CN" altLang="en-US" sz="2400" dirty="0"/>
               <a:t>随着产品的发展，我们需要专门的人才来做下面的事，而这些事往往是程序员不愿意花时间去做的：</a:t>
             </a:r>
-            <a:endParaRPr lang="zh-CN" altLang="en-US" sz="2400" dirty="0"/>
           </a:p>
           <a:p>
             <a:pPr lvl="1"/>
@@ -31744,7 +31507,7 @@
           </p:nvPr>
         </p:nvPicPr>
         <p:blipFill>
-          <a:blip r:embed="rId1" cstate="print"/>
+          <a:blip r:embed="rId2" cstate="print"/>
           <a:srcRect/>
           <a:stretch>
             <a:fillRect/>
@@ -31816,9 +31579,6 @@
               </a:rPr>
               <a:t> Blumenthal (1984, first Microsoft PM)</a:t>
             </a:r>
-            <a:endParaRPr lang="en-US" altLang="zh-CN" sz="2400" dirty="0">
-              <a:latin typeface="+mn-lt"/>
-            </a:endParaRPr>
           </a:p>
           <a:p>
             <a:pPr marL="273050" indent="-273050">
@@ -31839,9 +31599,6 @@
               </a:rPr>
               <a:t>PM</a:t>
             </a:r>
-            <a:endParaRPr lang="en-US" altLang="zh-CN" sz="2400" dirty="0">
-              <a:latin typeface="+mn-lt"/>
-            </a:endParaRPr>
           </a:p>
           <a:p>
             <a:pPr marL="730250" lvl="1" indent="-273050">
@@ -31861,9 +31618,6 @@
               </a:rPr>
               <a:t>Do everything besides coding and testing</a:t>
             </a:r>
-            <a:endParaRPr lang="en-US" altLang="zh-CN" sz="2400" dirty="0">
-              <a:latin typeface="+mn-lt"/>
-            </a:endParaRPr>
           </a:p>
           <a:p>
             <a:pPr marL="273050" indent="-273050">
@@ -31964,9 +31718,6 @@
               </a:rPr>
               <a:t>PM-&gt;PM II  -&gt; Senior PM -&gt; Principal PM -&gt;…</a:t>
             </a:r>
-            <a:endParaRPr lang="en-US" altLang="zh-CN" sz="2000" dirty="0">
-              <a:latin typeface="+mn-lt"/>
-            </a:endParaRPr>
           </a:p>
           <a:p>
             <a:pPr marL="730250" lvl="1" indent="-273050">
@@ -31992,9 +31743,6 @@
               </a:rPr>
               <a:t>PM-&gt;PM lead -&gt; PM Manager (Group PM) -&gt;Director of PM -&gt; VP in charge of PM</a:t>
             </a:r>
-            <a:endParaRPr lang="en-US" altLang="zh-CN" sz="2000" dirty="0">
-              <a:latin typeface="+mn-lt"/>
-            </a:endParaRPr>
           </a:p>
           <a:p>
             <a:pPr marL="730250" lvl="1" indent="-273050">
@@ -32485,7 +32233,6 @@
               <a:rPr lang="en-US" altLang="zh-CN" sz="2400" dirty="0"/>
               <a:t>Role of PM</a:t>
             </a:r>
-            <a:endParaRPr lang="en-US" altLang="zh-CN" sz="2400" dirty="0"/>
           </a:p>
           <a:p>
             <a:pPr marL="730250" lvl="1" indent="-273050">
@@ -32500,7 +32247,6 @@
               <a:rPr lang="en-US" altLang="zh-CN" dirty="0"/>
               <a:t>Gather requirements</a:t>
             </a:r>
-            <a:endParaRPr lang="en-US" altLang="zh-CN" dirty="0"/>
           </a:p>
           <a:p>
             <a:pPr marL="730250" lvl="1" indent="-273050">
@@ -32515,7 +32261,6 @@
               <a:rPr lang="en-US" altLang="zh-CN" dirty="0"/>
               <a:t>Design UI, Write spec</a:t>
             </a:r>
-            <a:endParaRPr lang="en-US" altLang="zh-CN" dirty="0"/>
           </a:p>
           <a:p>
             <a:pPr marL="730250" lvl="1" indent="-273050">
@@ -32534,7 +32279,6 @@
               <a:rPr lang="en-US" dirty="0"/>
               <a:t>marketing, documentation, testing, localization</a:t>
             </a:r>
-            <a:endParaRPr lang="en-US" dirty="0"/>
           </a:p>
           <a:p>
             <a:pPr marL="730250" lvl="1" indent="-273050">
@@ -32549,21 +32293,18 @@
               <a:rPr lang="en-US" altLang="zh-CN" dirty="0"/>
               <a:t>Lead the team to reach decision (as money to the society)</a:t>
             </a:r>
-            <a:endParaRPr lang="en-US" altLang="zh-CN" dirty="0"/>
           </a:p>
           <a:p>
             <a:r>
               <a:rPr lang="en-US" altLang="zh-CN" sz="2400" dirty="0"/>
               <a:t>PM: focus on the big picture, the balance of Time/Resource/Feature</a:t>
             </a:r>
-            <a:endParaRPr lang="en-US" altLang="zh-CN" sz="2400" dirty="0"/>
           </a:p>
           <a:p>
             <a:r>
               <a:rPr lang="en-US" altLang="zh-CN" sz="2400" dirty="0"/>
               <a:t>Dev/test/etc: focus on individual technical issues</a:t>
             </a:r>
-            <a:endParaRPr lang="en-US" altLang="zh-CN" sz="2400" dirty="0"/>
           </a:p>
         </p:txBody>
       </p:sp>
@@ -33154,6 +32895,8 @@
       </a:bgFillStyleLst>
     </a:fmtScheme>
   </a:themeElements>
+  <a:objectDefaults/>
+  <a:extraClrSchemeLst/>
   <a:extLst>
     <a:ext uri="{05A4C25C-085E-4340-85A3-A5531E510DB2}">
       <thm15:themeFamily xmlns:thm15="http://schemas.microsoft.com/office/thememl/2012/main" name="Office Theme" id="{62F939B6-93AF-4DB8-9C6B-D6C7DFDC589F}" vid="{4A3C46E8-61CC-4603-A589-7422A47A8E4A}"/>
@@ -33353,6 +33096,8 @@
       </a:bgFillStyleLst>
     </a:fmtScheme>
   </a:themeElements>
+  <a:objectDefaults/>
+  <a:extraClrSchemeLst/>
   <a:extLst>
     <a:ext uri="{05A4C25C-085E-4340-85A3-A5531E510DB2}">
       <thm15:themeFamily xmlns:thm15="http://schemas.microsoft.com/office/thememl/2012/main" name="Office Theme" id="{62F939B6-93AF-4DB8-9C6B-D6C7DFDC589F}" vid="{4A3C46E8-61CC-4603-A589-7422A47A8E4A}"/>
@@ -33639,6 +33384,8 @@
       </a:bgFillStyleLst>
     </a:fmtScheme>
   </a:themeElements>
+  <a:objectDefaults/>
+  <a:extraClrSchemeLst/>
   <a:extLst>
     <a:ext uri="{05A4C25C-085E-4340-85A3-A5531E510DB2}">
       <thm15:themeFamily xmlns:thm15="http://schemas.microsoft.com/office/thememl/2012/main" name="Office Theme" id="{62F939B6-93AF-4DB8-9C6B-D6C7DFDC589F}" vid="{4A3C46E8-61CC-4603-A589-7422A47A8E4A}"/>
@@ -33648,6 +33395,21 @@
 </file>
 
 <file path=customXml/item1.xml><?xml version="1.0" encoding="utf-8"?>
+<?mso-contentType ?>
+<FormTemplates xmlns="http://schemas.microsoft.com/sharepoint/v3/contenttype/forms">
+  <Display>DocumentLibraryForm</Display>
+  <Edit>DocumentLibraryForm</Edit>
+  <New>DocumentLibraryForm</New>
+</FormTemplates>
+</file>
+
+<file path=customXml/item2.xml><?xml version="1.0" encoding="utf-8"?>
+<p:properties xmlns:p="http://schemas.microsoft.com/office/2006/metadata/properties" xmlns:xsi="http://www.w3.org/2001/XMLSchema-instance" xmlns:pc="http://schemas.microsoft.com/office/infopath/2007/PartnerControls">
+  <documentManagement/>
+</p:properties>
+</file>
+
+<file path=customXml/item3.xml><?xml version="1.0" encoding="utf-8"?>
 <ct:contentTypeSchema xmlns:ct="http://schemas.microsoft.com/office/2006/metadata/contentType" xmlns:ma="http://schemas.microsoft.com/office/2006/metadata/properties/metaAttributes" ct:_="" ma:_="" ma:contentTypeName="Document" ma:contentTypeID="0x0101006371182FA640024E8A2815D490E1EF25" ma:contentTypeVersion="0" ma:contentTypeDescription="Create a new document." ma:contentTypeScope="" ma:versionID="3591aab47f172a2900f307f59d422227">
   <xsd:schema xmlns:xsd="http://www.w3.org/2001/XMLSchema" xmlns:xs="http://www.w3.org/2001/XMLSchema" xmlns:p="http://schemas.microsoft.com/office/2006/metadata/properties" targetNamespace="http://schemas.microsoft.com/office/2006/metadata/properties" ma:root="true" ma:fieldsID="1f28ea01430cdfb20a10736313f817e3">
     <xsd:element name="properties">
@@ -33761,35 +33523,20 @@
 </ct:contentTypeSchema>
 </file>
 
-<file path=customXml/item2.xml><?xml version="1.0" encoding="utf-8"?>
-<?mso-contentType ?>
-<FormTemplates xmlns="http://schemas.microsoft.com/sharepoint/v3/contenttype/forms">
-  <Display>DocumentLibraryForm</Display>
-  <Edit>DocumentLibraryForm</Edit>
-  <New>DocumentLibraryForm</New>
-</FormTemplates>
-</file>
-
-<file path=customXml/item3.xml><?xml version="1.0" encoding="utf-8"?>
-<p:properties xmlns:p="http://schemas.microsoft.com/office/2006/metadata/properties" xmlns:xsi="http://www.w3.org/2001/XMLSchema-instance" xmlns:pc="http://schemas.microsoft.com/office/infopath/2007/PartnerControls">
-  <documentManagement/>
-</p:properties>
-</file>
-
 <file path=customXml/itemProps1.xml><?xml version="1.0" encoding="utf-8"?>
-<ds:datastoreItem xmlns:ds="http://schemas.openxmlformats.org/officeDocument/2006/customXml" ds:itemID="{E69DE20C-3D83-4F73-B3D5-4904E50492F1}">
+<ds:datastoreItem xmlns:ds="http://schemas.openxmlformats.org/officeDocument/2006/customXml" ds:itemID="{E0F32828-20FB-41F1-93A8-15BC4BB130A9}">
   <ds:schemaRefs/>
 </ds:datastoreItem>
 </file>
 
 <file path=customXml/itemProps2.xml><?xml version="1.0" encoding="utf-8"?>
-<ds:datastoreItem xmlns:ds="http://schemas.openxmlformats.org/officeDocument/2006/customXml" ds:itemID="{E0F32828-20FB-41F1-93A8-15BC4BB130A9}">
+<ds:datastoreItem xmlns:ds="http://schemas.openxmlformats.org/officeDocument/2006/customXml" ds:itemID="{7EE3B803-03E0-452A-973D-71FA51A754ED}">
   <ds:schemaRefs/>
 </ds:datastoreItem>
 </file>
 
 <file path=customXml/itemProps3.xml><?xml version="1.0" encoding="utf-8"?>
-<ds:datastoreItem xmlns:ds="http://schemas.openxmlformats.org/officeDocument/2006/customXml" ds:itemID="{7EE3B803-03E0-452A-973D-71FA51A754ED}">
+<ds:datastoreItem xmlns:ds="http://schemas.openxmlformats.org/officeDocument/2006/customXml" ds:itemID="{E69DE20C-3D83-4F73-B3D5-4904E50492F1}">
   <ds:schemaRefs/>
 </ds:datastoreItem>
 </file>